--- a/ppt/NOX_SIH2026_PQFW.pptx
+++ b/ppt/NOX_SIH2026_PQFW.pptx
@@ -643,14 +643,9 @@
           </a:bodyPr>
           <a:lstStyle/>
           <a:p>
-            <a:pPr eaLnBrk="1" hangingPunct="1">
-              <a:spcBef>
-                <a:spcPct val="0"/>
-              </a:spcBef>
-            </a:pPr>
-            <a:endParaRPr lang="en-US">
-              <a:ea typeface="ＭＳ Ｐゴシック" pitchFamily="1" charset="-128"/>
-            </a:endParaRPr>
+            <a:r>
+              <a:t>The core idea in one sentence: the fingerprint is a consequence of which decryption keys you hold, not of software choosing to add a watermark. Each mark slot is written two ways that look identical and encrypted under different keys; you get one key per slot. The other rendering is an AES-GCM tag failure for you. There is no unmarked copy anywhere — not even on our own disk. Bottom left is a real verdict from the running system.</a:t>
+            </a:r>
           </a:p>
         </p:txBody>
       </p:sp>
@@ -762,14 +757,9 @@
           </a:bodyPr>
           <a:lstStyle/>
           <a:p>
-            <a:pPr eaLnBrk="1" hangingPunct="1">
-              <a:spcBef>
-                <a:spcPct val="0"/>
-              </a:spcBef>
-            </a:pPr>
-            <a:endParaRPr lang="en-US">
-              <a:ea typeface="ＭＳ Ｐゴシック" pitchFamily="1" charset="-128"/>
-            </a:endParaRPr>
+            <a:r>
+              <a:t>Three stages, all offline. Distribute: one ciphertext for everybody, plus a 14 KB key bundle each. Decrypt: the recipient spends one credential, gets a uniquely marked copy, and signs an ML-DSA-65 receipt with their own key — that is the non-repudiation. Record: three validators independently verify that receipt and commit it 2-of-3. Trace: extract the marks, score them, and check the ledger. No cloud KMS, no public chain, no network call at any point.</a:t>
+            </a:r>
           </a:p>
         </p:txBody>
       </p:sp>
@@ -881,14 +871,9 @@
           </a:bodyPr>
           <a:lstStyle/>
           <a:p>
-            <a:pPr eaLnBrk="1" hangingPunct="1">
-              <a:spcBef>
-                <a:spcPct val="0"/>
-              </a:spcBef>
-            </a:pPr>
-            <a:endParaRPr lang="en-US">
-              <a:ea typeface="ＭＳ Ｐゴシック" pitchFamily="1" charset="-128"/>
-            </a:endParaRPr>
+            <a:r>
+              <a:t>We are honest about what breaks it. Retyping, OCR and stripping invisible characters defeat the text carrier, and inserting a word desynchronises the slots — all four are measured and published rather than hidden. The point is the failure mode: when an attack wins the system fails to identify anybody. Misidentification stayed at zero across the whole erasure sweep. The bottom row is the actual next four steps, not an aspiration.</a:t>
+            </a:r>
           </a:p>
         </p:txBody>
       </p:sp>
@@ -1059,14 +1044,9 @@
           </a:bodyPr>
           <a:lstStyle/>
           <a:p>
-            <a:pPr eaLnBrk="1" hangingPunct="1">
-              <a:spcBef>
-                <a:spcPct val="0"/>
-              </a:spcBef>
-            </a:pPr>
-            <a:endParaRPr lang="en-US">
-              <a:ea typeface="ＭＳ Ｐゴシック" pitchFamily="1" charset="-128"/>
-            </a:endParaRPr>
+            <a:r>
+              <a:t>Ministry of Defence context: service HQ, procurement, DRDO and partners, inter-agency sharing. The real product is deterrence — when every holder knows their copy is individually accountable, most leaks never happen. And it protects the accused as much as it exposes the leaker: a stated error probability and a refusal to guess are what stop an innocent officer being named. Costs nothing to run.</a:t>
+            </a:r>
           </a:p>
         </p:txBody>
       </p:sp>
@@ -1237,14 +1217,9 @@
           </a:bodyPr>
           <a:lstStyle/>
           <a:p>
-            <a:pPr eaLnBrk="1" hangingPunct="1">
-              <a:spcBef>
-                <a:spcPct val="0"/>
-              </a:spcBef>
-            </a:pPr>
-            <a:endParaRPr lang="en-US">
-              <a:ea typeface="ＭＳ Ｐゴシック" pitchFamily="1" charset="-128"/>
-            </a:endParaRPr>
+            <a:r>
+              <a:t>Every requirement in the problem statement, and every one is exercised by an automated test and by a step of the live demo — 163 tests. Two things we do not claim: this proves traceability, not unframeability, because the distributor knows the codewords; post-quantum asymmetric fingerprinting has no drop-in construction yet and we say so rather than pretending. Scan the code and try to break it.</a:t>
+            </a:r>
           </a:p>
         </p:txBody>
       </p:sp>
@@ -1344,6 +1319,76 @@
         <p14:creationId xmlns:p14="http://schemas.microsoft.com/office/powerpoint/2010/main" val="1908672725"/>
       </p:ext>
     </p:extLst>
+  </p:cSld>
+  <p:clrMapOvr>
+    <a:masterClrMapping/>
+  </p:clrMapOvr>
+</p:notes>
+</file>
+
+<file path=ppt/notesSlides/notesSlide6.xml><?xml version="1.0" encoding="utf-8"?>
+<p:notes xmlns:a="http://schemas.openxmlformats.org/drawingml/2006/main" xmlns:p="http://schemas.openxmlformats.org/presentationml/2006/main" xmlns:r="http://schemas.openxmlformats.org/officeDocument/2006/relationships">
+  <p:cSld>
+    <p:spTree>
+      <p:nvGrpSpPr>
+        <p:cNvPr id="1" name=""/>
+        <p:cNvGrpSpPr/>
+        <p:nvPr/>
+      </p:nvGrpSpPr>
+      <p:grpSpPr>
+        <a:xfrm>
+          <a:off x="0" y="0"/>
+          <a:ext cx="0" cy="0"/>
+          <a:chOff x="0" y="0"/>
+          <a:chExt cx="0" cy="0"/>
+        </a:xfrm>
+      </p:grpSpPr>
+      <p:sp>
+        <p:nvSpPr>
+          <p:cNvPr id="2" name="Slide Image Placeholder 1"/>
+          <p:cNvSpPr>
+            <a:spLocks noGrp="1"/>
+          </p:cNvSpPr>
+          <p:nvPr>
+            <p:ph type="sldImg" idx="2"/>
+          </p:nvPr>
+        </p:nvSpPr>
+        <p:spPr/>
+      </p:sp>
+      <p:sp>
+        <p:nvSpPr>
+          <p:cNvPr id="3" name="Notes Placeholder 2"/>
+          <p:cNvSpPr>
+            <a:spLocks noGrp="1"/>
+          </p:cNvSpPr>
+          <p:nvPr>
+            <p:ph type="body" idx="3" sz="quarter"/>
+          </p:nvPr>
+        </p:nvSpPr>
+        <p:spPr/>
+        <p:txBody>
+          <a:bodyPr/>
+          <a:lstStyle/>
+          <a:p>
+            <a:r>
+              <a:t>Problem statement SIH26237, Ministry of Defence. One document goes to many cleared recipients; it leaks; today every one of them is an equally plausible suspect. We built PQFW, and it is running right now at the address on this slide — scan the code and follow along.</a:t>
+            </a:r>
+          </a:p>
+        </p:txBody>
+      </p:sp>
+      <p:sp>
+        <p:nvSpPr>
+          <p:cNvPr id="4" name="Slide Number Placeholder 3"/>
+          <p:cNvSpPr>
+            <a:spLocks noGrp="1"/>
+          </p:cNvSpPr>
+          <p:nvPr>
+            <p:ph type="sldNum" idx="5" sz="quarter"/>
+          </p:nvPr>
+        </p:nvSpPr>
+        <p:spPr/>
+      </p:sp>
+    </p:spTree>
   </p:cSld>
   <p:clrMapOvr>
     <a:masterClrMapping/>
@@ -5679,7 +5724,7 @@
         </p:nvSpPr>
         <p:spPr>
           <a:xfrm>
-            <a:off x="384048" y="2212848"/>
+            <a:off x="384048" y="2157984"/>
             <a:ext cx="6035040" cy="3017520"/>
           </a:xfrm>
           <a:prstGeom prst="rect">
@@ -5717,7 +5762,7 @@
                 </a:solidFill>
                 <a:latin typeface="Calibri"/>
               </a:rPr>
-              <a:t>SIH26XXX</a:t>
+              <a:t>SIH26237</a:t>
             </a:r>
           </a:p>
           <a:p>
@@ -5745,7 +5790,7 @@
                 </a:solidFill>
                 <a:latin typeface="Calibri"/>
               </a:rPr>
-              <a:t>Forensic attribution of leaked documents in broadcast-encrypt, individually-decrypt distribution</a:t>
+              <a:t>Cryptographic Attribution and Immutable Decryption Provenance for Multi-Recipient Encrypted Document Distribution</a:t>
             </a:r>
           </a:p>
           <a:p>
@@ -5764,6 +5809,34 @@
                 </a:solidFill>
                 <a:latin typeface="Calibri"/>
               </a:rPr>
+              <a:t>Organisation  </a:t>
+            </a:r>
+            <a:r>
+              <a:rPr sz="1050" b="1">
+                <a:solidFill>
+                  <a:srgbClr val="1F3864"/>
+                </a:solidFill>
+                <a:latin typeface="Calibri"/>
+              </a:rPr>
+              <a:t>Ministry of Defence</a:t>
+            </a:r>
+          </a:p>
+          <a:p>
+            <a:pPr algn="l">
+              <a:spcBef>
+                <a:spcPts val="0"/>
+              </a:spcBef>
+              <a:spcAft>
+                <a:spcPts val="600"/>
+              </a:spcAft>
+            </a:pPr>
+            <a:r>
+              <a:rPr sz="1050" b="1">
+                <a:solidFill>
+                  <a:srgbClr val="5A677D"/>
+                </a:solidFill>
+                <a:latin typeface="Calibri"/>
+              </a:rPr>
               <a:t>Theme  </a:t>
             </a:r>
             <a:r>
@@ -5829,7 +5902,7 @@
                 </a:solidFill>
                 <a:latin typeface="Calibri"/>
               </a:rPr>
-              <a:t>TEAM-ID</a:t>
+              <a:t>—  (to be assigned on the portal)</a:t>
             </a:r>
           </a:p>
           <a:p>
@@ -5870,8 +5943,8 @@
         </p:nvSpPr>
         <p:spPr>
           <a:xfrm>
-            <a:off x="384048" y="5230368"/>
-            <a:ext cx="6035040" cy="932688"/>
+            <a:off x="384048" y="5047488"/>
+            <a:ext cx="6035040" cy="1115568"/>
           </a:xfrm>
           <a:prstGeom prst="roundRect">
             <a:avLst>
@@ -5910,16 +5983,40 @@
           </a:p>
         </p:txBody>
       </p:sp>
-      <p:sp>
-        <p:nvSpPr>
-          <p:cNvPr id="40" name="TextBox 39"/>
+      <p:pic>
+        <p:nvPicPr>
+          <p:cNvPr id="40" name="Picture 39" descr="qr_live.png"/>
+          <p:cNvPicPr>
+            <a:picLocks noChangeAspect="1"/>
+          </p:cNvPicPr>
+          <p:nvPr/>
+        </p:nvPicPr>
+        <p:blipFill>
+          <a:blip r:embed="rId4"/>
+          <a:stretch>
+            <a:fillRect/>
+          </a:stretch>
+        </p:blipFill>
+        <p:spPr>
+          <a:xfrm>
+            <a:off x="530352" y="5175504"/>
+            <a:ext cx="859536" cy="859536"/>
+          </a:xfrm>
+          <a:prstGeom prst="rect">
+            <a:avLst/>
+          </a:prstGeom>
+        </p:spPr>
+      </p:pic>
+      <p:sp>
+        <p:nvSpPr>
+          <p:cNvPr id="41" name="TextBox 40"/>
           <p:cNvSpPr txBox="1"/>
           <p:nvPr/>
         </p:nvSpPr>
         <p:spPr>
           <a:xfrm>
-            <a:off x="530352" y="5349240"/>
-            <a:ext cx="5760720" cy="731520"/>
+            <a:off x="1517904" y="5193792"/>
+            <a:ext cx="4754880" cy="841248"/>
           </a:xfrm>
           <a:prstGeom prst="rect">
             <a:avLst/>
@@ -5941,7 +6038,7 @@
               </a:spcAft>
             </a:pPr>
             <a:r>
-              <a:rPr sz="900" b="1">
+              <a:rPr sz="860" b="1">
                 <a:solidFill>
                   <a:srgbClr val="1B7F5E"/>
                 </a:solidFill>
@@ -5950,13 +6047,13 @@
               <a:t>LIVE WORKING PROTOTYPE   </a:t>
             </a:r>
             <a:r>
-              <a:rPr sz="900" b="0">
+              <a:rPr sz="860" b="0">
                 <a:solidFill>
                   <a:srgbClr val="5A677D"/>
                 </a:solidFill>
                 <a:latin typeface="Calibri"/>
               </a:rPr>
-              <a:t>·  real ML-KEM-768 / ML-DSA-65, in the browser</a:t>
+              <a:t>·  scan it</a:t>
             </a:r>
           </a:p>
           <a:p>
@@ -5965,11 +6062,11 @@
                 <a:spcPts val="0"/>
               </a:spcBef>
               <a:spcAft>
-                <a:spcPts val="100"/>
-              </a:spcAft>
-            </a:pPr>
-            <a:r>
-              <a:rPr sz="1250" b="1" i="0">
+                <a:spcPts val="200"/>
+              </a:spcAft>
+            </a:pPr>
+            <a:r>
+              <a:rPr sz="1300" b="1" i="0">
                 <a:solidFill>
                   <a:srgbClr val="1F3864"/>
                 </a:solidFill>
@@ -5988,20 +6085,20 @@
               </a:spcAft>
             </a:pPr>
             <a:r>
-              <a:rPr sz="740" b="0" i="0">
+              <a:rPr sz="720" b="0" i="0">
                 <a:solidFill>
                   <a:srgbClr val="5A677D"/>
                 </a:solidFill>
                 <a:latin typeface="Calibri"/>
               </a:rPr>
-              <a:t>Evaluation, figures and attack results:  evildeity-pqfw-post-quantum-watermarking.static.hf.space</a:t>
-            </a:r>
-          </a:p>
-        </p:txBody>
-      </p:sp>
-      <p:sp>
-        <p:nvSpPr>
-          <p:cNvPr id="41" name="TextBox 40"/>
+              <a:t>Real ML-KEM-768 / ML-DSA-65 computed server-side. Evaluation and attack results: evildeity-pqfw-post-quantum-watermarking.static.hf.space</a:t>
+            </a:r>
+          </a:p>
+        </p:txBody>
+      </p:sp>
+      <p:sp>
+        <p:nvSpPr>
+          <p:cNvPr id="42" name="TextBox 41"/>
           <p:cNvSpPr txBox="1"/>
           <p:nvPr/>
         </p:nvSpPr>
@@ -8006,7 +8103,7 @@
         </p:nvSpPr>
         <p:spPr>
           <a:xfrm>
-            <a:off x="384048" y="4864607"/>
+            <a:off x="384048" y="4791456"/>
             <a:ext cx="7223760" cy="274320"/>
           </a:xfrm>
           <a:prstGeom prst="rect">
@@ -8035,7 +8132,7 @@
                 </a:solidFill>
                 <a:latin typeface="Calibri"/>
               </a:rPr>
-              <a:t>What that looks like on one document</a:t>
+              <a:t>What the system actually returns</a:t>
             </a:r>
           </a:p>
         </p:txBody>
@@ -8048,20 +8145,20 @@
         </p:nvSpPr>
         <p:spPr>
           <a:xfrm>
-            <a:off x="384048" y="5157216"/>
-            <a:ext cx="7223760" cy="987552"/>
+            <a:off x="384048" y="5065776"/>
+            <a:ext cx="7223760" cy="1152144"/>
           </a:xfrm>
           <a:prstGeom prst="roundRect">
             <a:avLst>
-              <a:gd name="adj" fmla="val 5000"/>
+              <a:gd name="adj" fmla="val 6000"/>
             </a:avLst>
           </a:prstGeom>
           <a:solidFill>
-            <a:srgbClr val="FDF3E2"/>
+            <a:srgbClr val="E8F4EE"/>
           </a:solidFill>
           <a:ln w="9525">
             <a:solidFill>
-              <a:srgbClr val="E8C993"/>
+              <a:srgbClr val="A8D3BF"/>
             </a:solidFill>
           </a:ln>
           <a:effectLst/>
@@ -8096,8 +8193,8 @@
         </p:nvSpPr>
         <p:spPr>
           <a:xfrm>
-            <a:off x="530352" y="5257799"/>
-            <a:ext cx="6931152" cy="804672"/>
+            <a:off x="566928" y="5166360"/>
+            <a:ext cx="4114800" cy="457200"/>
           </a:xfrm>
           <a:prstGeom prst="rect">
             <a:avLst/>
@@ -8115,26 +8212,139 @@
                 <a:spcPts val="0"/>
               </a:spcBef>
               <a:spcAft>
-                <a:spcPts val="500"/>
-              </a:spcAft>
-            </a:pPr>
-            <a:r>
-              <a:rPr sz="940" b="1">
+                <a:spcPts val="200"/>
+              </a:spcAft>
+            </a:pPr>
+            <a:r>
+              <a:rPr sz="1300" b="1">
+                <a:solidFill>
+                  <a:srgbClr val="1B7F5E"/>
+                </a:solidFill>
+                <a:latin typeface="Calibri"/>
+              </a:rPr>
+              <a:t>IDENTIFIED</a:t>
+            </a:r>
+            <a:r>
+              <a:rPr sz="1300" b="1">
                 <a:solidFill>
                   <a:srgbClr val="1F3864"/>
                 </a:solidFill>
                 <a:latin typeface="Calibri"/>
               </a:rPr>
-              <a:t>A 2 KB memo, 20 recipients, 301 mark slots. </a:t>
-            </a:r>
-            <a:r>
-              <a:rPr sz="940" b="0">
+              <a:t>   r07, session #0</a:t>
+            </a:r>
+          </a:p>
+          <a:p>
+            <a:pPr algn="l">
+              <a:spcBef>
+                <a:spcPts val="0"/>
+              </a:spcBef>
+              <a:spcAft>
+                <a:spcPts val="0"/>
+              </a:spcAft>
+            </a:pPr>
+            <a:r>
+              <a:rPr sz="860" b="0" i="0">
+                <a:solidFill>
+                  <a:srgbClr val="5A677D"/>
+                </a:solidFill>
+                <a:latin typeface="Calibri"/>
+              </a:rPr>
+              <a:t>false-accusation probability at most 2.8 × 10⁻⁵⁹</a:t>
+            </a:r>
+          </a:p>
+        </p:txBody>
+      </p:sp>
+      <p:sp>
+        <p:nvSpPr>
+          <p:cNvPr id="15393" name="TextBox 15392"/>
+          <p:cNvSpPr txBox="1"/>
+          <p:nvPr/>
+        </p:nvSpPr>
+        <p:spPr>
+          <a:xfrm>
+            <a:off x="566928" y="5696712"/>
+            <a:ext cx="4114800" cy="274320"/>
+          </a:xfrm>
+          <a:prstGeom prst="rect">
+            <a:avLst/>
+          </a:prstGeom>
+          <a:noFill/>
+        </p:spPr>
+        <p:txBody>
+          <a:bodyPr wrap="square" anchor="t" lIns="0" rIns="0" tIns="0" bIns="0">
+            <a:spAutoFit/>
+          </a:bodyPr>
+          <a:lstStyle/>
+          <a:p/>
+          <a:p>
+            <a:pPr algn="l">
+              <a:spcBef>
+                <a:spcPts val="0"/>
+              </a:spcBef>
+              <a:spcAft>
+                <a:spcPts val="0"/>
+              </a:spcAft>
+            </a:pPr>
+            <a:r>
+              <a:rPr sz="780" b="0" i="0">
+                <a:solidFill>
+                  <a:srgbClr val="5A677D"/>
+                </a:solidFill>
+                <a:latin typeface="Calibri"/>
+              </a:rPr>
+              <a:t>2 KB memo · 20 recipients · 301 mark slots · next suspect 10σ behind</a:t>
+            </a:r>
+          </a:p>
+        </p:txBody>
+      </p:sp>
+      <p:sp>
+        <p:nvSpPr>
+          <p:cNvPr id="15394" name="TextBox 15393"/>
+          <p:cNvSpPr txBox="1"/>
+          <p:nvPr/>
+        </p:nvSpPr>
+        <p:spPr>
+          <a:xfrm>
+            <a:off x="4882896" y="5157216"/>
+            <a:ext cx="3017520" cy="1024128"/>
+          </a:xfrm>
+          <a:prstGeom prst="rect">
+            <a:avLst/>
+          </a:prstGeom>
+          <a:noFill/>
+        </p:spPr>
+        <p:txBody>
+          <a:bodyPr wrap="square" anchor="t" lIns="0" rIns="0" tIns="0" bIns="0">
+            <a:spAutoFit/>
+          </a:bodyPr>
+          <a:lstStyle/>
+          <a:p>
+            <a:pPr algn="l">
+              <a:spcBef>
+                <a:spcPts val="0"/>
+              </a:spcBef>
+              <a:spcAft>
+                <a:spcPts val="220"/>
+              </a:spcAft>
+            </a:pPr>
+            <a:r>
+              <a:rPr sz="780" b="1">
+                <a:solidFill>
+                  <a:srgbClr val="1B7F5E"/>
+                </a:solidFill>
+                <a:latin typeface="Calibri"/>
+              </a:rPr>
+              <a:t>✓  </a:t>
+            </a:r>
+            <a:r>
+              <a:rPr sz="780" b="0">
                 <a:solidFill>
                   <a:srgbClr val="202838"/>
                 </a:solidFill>
                 <a:latin typeface="Calibri"/>
               </a:rPr>
-              <a:t>r07 opens it once and signs an ML-DSA-65 receipt. Their copy leaks.</a:t>
+              <a:t>statistical significance (provable bound &lt; α)</a:t>
             </a:r>
           </a:p>
           <a:p>
@@ -8143,53 +8353,110 @@
                 <a:spcPts val="0"/>
               </a:spcBef>
               <a:spcAft>
-                <a:spcPts val="0"/>
-              </a:spcAft>
-            </a:pPr>
-            <a:r>
-              <a:rPr sz="940" b="0">
+                <a:spcPts val="220"/>
+              </a:spcAft>
+            </a:pPr>
+            <a:r>
+              <a:rPr sz="780" b="1">
+                <a:solidFill>
+                  <a:srgbClr val="1B7F5E"/>
+                </a:solidFill>
+                <a:latin typeface="Calibri"/>
+              </a:rPr>
+              <a:t>✓  </a:t>
+            </a:r>
+            <a:r>
+              <a:rPr sz="780" b="0">
                 <a:solidFill>
                   <a:srgbClr val="202838"/>
                 </a:solidFill>
                 <a:latin typeface="Calibri"/>
               </a:rPr>
-              <a:t>Traced back to </a:t>
-            </a:r>
-            <a:r>
-              <a:rPr sz="940" b="1">
-                <a:solidFill>
-                  <a:srgbClr val="1F3864"/>
-                </a:solidFill>
-                <a:latin typeface="Calibri"/>
-              </a:rPr>
-              <a:t>r07, session #0</a:t>
-            </a:r>
-            <a:r>
-              <a:rPr sz="940" b="0">
+              <a:t>the accused's own ML-DSA-65 receipt verifies</a:t>
+            </a:r>
+          </a:p>
+          <a:p>
+            <a:pPr algn="l">
+              <a:spcBef>
+                <a:spcPts val="0"/>
+              </a:spcBef>
+              <a:spcAft>
+                <a:spcPts val="220"/>
+              </a:spcAft>
+            </a:pPr>
+            <a:r>
+              <a:rPr sz="780" b="1">
+                <a:solidFill>
+                  <a:srgbClr val="1B7F5E"/>
+                </a:solidFill>
+                <a:latin typeface="Calibri"/>
+              </a:rPr>
+              <a:t>✓  </a:t>
+            </a:r>
+            <a:r>
+              <a:rPr sz="780" b="0">
                 <a:solidFill>
                   <a:srgbClr val="202838"/>
                 </a:solidFill>
                 <a:latin typeface="Calibri"/>
               </a:rPr>
-              <a:t> — with a provable false-accusation probability of </a:t>
-            </a:r>
-            <a:r>
-              <a:rPr sz="940" b="1">
+              <a:t>ledger hash chain intact</a:t>
+            </a:r>
+          </a:p>
+          <a:p>
+            <a:pPr algn="l">
+              <a:spcBef>
+                <a:spcPts val="0"/>
+              </a:spcBef>
+              <a:spcAft>
+                <a:spcPts val="220"/>
+              </a:spcAft>
+            </a:pPr>
+            <a:r>
+              <a:rPr sz="780" b="1">
                 <a:solidFill>
                   <a:srgbClr val="1B7F5E"/>
                 </a:solidFill>
                 <a:latin typeface="Calibri"/>
               </a:rPr>
-              <a:t>2.8 x 10⁻⁵⁹</a:t>
-            </a:r>
-            <a:r>
-              <a:rPr sz="940" b="0">
+              <a:t>✓  </a:t>
+            </a:r>
+            <a:r>
+              <a:rPr sz="780" b="0">
                 <a:solidFill>
                   <a:srgbClr val="202838"/>
                 </a:solidFill>
                 <a:latin typeface="Calibri"/>
               </a:rPr>
-              <a:t>, the next-best suspect 10 sigma behind, and all five ledger checks green.</a:t>
+              <a:t>block committed by 2 of 3 validators</a:t>
+            </a:r>
+          </a:p>
+          <a:p>
+            <a:pPr algn="l">
+              <a:spcBef>
+                <a:spcPts val="0"/>
+              </a:spcBef>
+              <a:spcAft>
+                <a:spcPts val="220"/>
+              </a:spcAft>
+            </a:pPr>
+            <a:r>
+              <a:rPr sz="780" b="1">
+                <a:solidFill>
+                  <a:srgbClr val="1B7F5E"/>
+                </a:solidFill>
+                <a:latin typeface="Calibri"/>
+              </a:rPr>
+              <a:t>✓  </a:t>
+            </a:r>
+            <a:r>
+              <a:rPr sz="780" b="0">
+                <a:solidFill>
+                  <a:srgbClr val="202838"/>
+                </a:solidFill>
+                <a:latin typeface="Calibri"/>
+              </a:rPr>
+              <a:t>Merkle inclusion proof to the signed root</a:t>
             </a:r>
           </a:p>
         </p:txBody>
@@ -14008,7 +14275,7 @@
                 </a:solidFill>
                 <a:latin typeface="Calibri"/>
               </a:rPr>
-              <a:t>Ministries and secretariats. </a:t>
+              <a:t>Service headquarters. </a:t>
             </a:r>
             <a:r>
               <a:rPr sz="919" b="0">
@@ -14017,7 +14284,7 @@
                 </a:solidFill>
                 <a:latin typeface="Calibri"/>
               </a:rPr>
-              <a:t>Cabinet notes, draft policy and pre-budget material become individually accountable.</a:t>
+              <a:t>Operational orders and classified assessments distributed to a named list become individually accountable, not collectively deniable.</a:t>
             </a:r>
           </a:p>
           <a:p>
@@ -14036,7 +14303,7 @@
                 </a:solidFill>
                 <a:latin typeface="Calibri"/>
               </a:rPr>
-              <a:t>Procurement and tendering. </a:t>
+              <a:t>Defence procurement. </a:t>
             </a:r>
             <a:r>
               <a:rPr sz="919" b="0">
@@ -14045,7 +14312,7 @@
                 </a:solidFill>
                 <a:latin typeface="Calibri"/>
               </a:rPr>
-              <a:t>Bid documents leak before deadlines; each copy now names its holder.</a:t>
+              <a:t>Tender documents and technical specifications reach vendors traceably; a pre-bid leak has an owner.</a:t>
             </a:r>
           </a:p>
           <a:p>
@@ -14064,7 +14331,7 @@
                 </a:solidFill>
                 <a:latin typeface="Calibri"/>
               </a:rPr>
-              <a:t>Examination boards. </a:t>
+              <a:t>DRDO and defence PSUs. </a:t>
             </a:r>
             <a:r>
               <a:rPr sz="919" b="0">
@@ -14073,7 +14340,7 @@
                 </a:solidFill>
                 <a:latin typeface="Calibri"/>
               </a:rPr>
-              <a:t>Question papers reach centres traceably, so a leak has an owner within minutes.</a:t>
+              <a:t>Design data shared with partners and contractors carries a non-repudiable receipt per recipient.</a:t>
             </a:r>
           </a:p>
           <a:p>
@@ -14092,7 +14359,7 @@
                 </a:solidFill>
                 <a:latin typeface="Calibri"/>
               </a:rPr>
-              <a:t>Courts and legal discovery. </a:t>
+              <a:t>Inter-agency sharing. </a:t>
             </a:r>
             <a:r>
               <a:rPr sz="919" b="0">
@@ -14101,7 +14368,7 @@
                 </a:solidFill>
                 <a:latin typeface="Calibri"/>
               </a:rPr>
-              <a:t>Material shared with opposing counsel carries non-repudiable receipts.</a:t>
+              <a:t>Intelligence circulated across agencies keeps its provenance without a central authority anyone must trust.</a:t>
             </a:r>
           </a:p>
         </p:txBody>
@@ -14242,7 +14509,7 @@
                 </a:solidFill>
                 <a:latin typeface="Calibri"/>
               </a:rPr>
-              <a:t>When 20 people know each copy is accountable, most of them do not leak at all.</a:t>
+              <a:t>When every holder knows their copy is individually accountable, most leaks never happen.</a:t>
             </a:r>
           </a:p>
           <a:p>
@@ -14326,7 +14593,7 @@
                 </a:solidFill>
                 <a:latin typeface="Calibri"/>
               </a:rPr>
-              <a:t>A cabinet note is sensitive for decades; FIPS 203/204 resist harvest-now-decrypt-later.</a:t>
+              <a:t>A defence assessment stays sensitive for decades; FIPS 203/204 resist harvest-now-decrypt-later.</a:t>
             </a:r>
           </a:p>
           <a:p>
@@ -14354,7 +14621,7 @@
                 </a:solidFill>
                 <a:latin typeface="Calibri"/>
               </a:rPr>
-              <a:t>Any ministry distributing one document to a named list — the architecture does not change, only the list.</a:t>
+              <a:t>Any organisation distributing one document to a named list — the architecture does not change, only the list.</a:t>
             </a:r>
           </a:p>
         </p:txBody>
@@ -14505,7 +14772,7 @@
                 </a:solidFill>
                 <a:latin typeface="Calibri"/>
               </a:rPr>
-              <a:t>▪  Every recipient who could decrypt is an equally plausible suspect.</a:t>
+              <a:t>▪  Every cleared recipient is an equally plausible suspect.</a:t>
             </a:r>
           </a:p>
           <a:p>
@@ -16159,7 +16426,7 @@
         </p:nvSpPr>
         <p:spPr>
           <a:xfrm>
-            <a:off x="384048" y="3877056"/>
+            <a:off x="384048" y="3840480"/>
             <a:ext cx="11420856" cy="274320"/>
           </a:xfrm>
           <a:prstGeom prst="rect">
@@ -16188,7 +16455,26 @@
                 </a:solidFill>
                 <a:latin typeface="Calibri"/>
               </a:rPr>
-              <a:t>Compliance with the problem statement</a:t>
+              <a:t>Every requirement in SIH26237, and where it is met</a:t>
+            </a:r>
+          </a:p>
+          <a:p>
+            <a:pPr algn="l">
+              <a:spcBef>
+                <a:spcPts val="0"/>
+              </a:spcBef>
+              <a:spcAft>
+                <a:spcPts val="0"/>
+              </a:spcAft>
+            </a:pPr>
+            <a:r>
+              <a:rPr sz="850" b="0" i="1">
+                <a:solidFill>
+                  <a:srgbClr val="5A677D"/>
+                </a:solidFill>
+                <a:latin typeface="Calibri"/>
+              </a:rPr>
+              <a:t>each one is exercised by an automated test, and by a step of the live demo</a:t>
             </a:r>
           </a:p>
         </p:txBody>
@@ -16201,7 +16487,7 @@
         </p:nvSpPr>
         <p:spPr>
           <a:xfrm>
-            <a:off x="384048" y="4206240"/>
+            <a:off x="384048" y="4224528"/>
             <a:ext cx="11420856" cy="1481328"/>
           </a:xfrm>
           <a:prstGeom prst="roundRect">
@@ -16249,8 +16535,8 @@
         </p:nvSpPr>
         <p:spPr>
           <a:xfrm>
-            <a:off x="566928" y="4334256"/>
-            <a:ext cx="5436108" cy="237744"/>
+            <a:off x="566928" y="4315968"/>
+            <a:ext cx="5436108" cy="219456"/>
           </a:xfrm>
           <a:prstGeom prst="rect">
             <a:avLst/>
@@ -16272,7 +16558,7 @@
               </a:spcAft>
             </a:pPr>
             <a:r>
-              <a:rPr sz="860" b="1">
+              <a:rPr sz="830" b="1">
                 <a:solidFill>
                   <a:srgbClr val="1B7F5E"/>
                 </a:solidFill>
@@ -16281,13 +16567,13 @@
               <a:t>✓  </a:t>
             </a:r>
             <a:r>
-              <a:rPr sz="860" b="0">
+              <a:rPr sz="830" b="0">
                 <a:solidFill>
                   <a:srgbClr val="202838"/>
                 </a:solidFill>
                 <a:latin typeface="Calibri"/>
               </a:rPr>
-              <a:t>Invisible watermark generated at decryption</a:t>
+              <a:t>Unique invisible forensic watermark at the moment of decryption</a:t>
             </a:r>
           </a:p>
         </p:txBody>
@@ -16300,8 +16586,8 @@
         </p:nvSpPr>
         <p:spPr>
           <a:xfrm>
-            <a:off x="566928" y="4590288"/>
-            <a:ext cx="5436108" cy="237744"/>
+            <a:off x="566928" y="4539996"/>
+            <a:ext cx="5436108" cy="219456"/>
           </a:xfrm>
           <a:prstGeom prst="rect">
             <a:avLst/>
@@ -16323,7 +16609,7 @@
               </a:spcAft>
             </a:pPr>
             <a:r>
-              <a:rPr sz="860" b="1">
+              <a:rPr sz="830" b="1">
                 <a:solidFill>
                   <a:srgbClr val="1B7F5E"/>
                 </a:solidFill>
@@ -16332,13 +16618,13 @@
               <a:t>✓  </a:t>
             </a:r>
             <a:r>
-              <a:rPr sz="860" b="0">
+              <a:rPr sz="830" b="0">
                 <a:solidFill>
                   <a:srgbClr val="202838"/>
                 </a:solidFill>
                 <a:latin typeface="Calibri"/>
               </a:rPr>
-              <a:t>Unique per recipient and per decryption session</a:t>
+              <a:t>Specific to each recipient and each decryption session</a:t>
             </a:r>
           </a:p>
         </p:txBody>
@@ -16351,8 +16637,8 @@
         </p:nvSpPr>
         <p:spPr>
           <a:xfrm>
-            <a:off x="566928" y="4846320"/>
-            <a:ext cx="5436108" cy="237744"/>
+            <a:off x="566928" y="4764024"/>
+            <a:ext cx="5436108" cy="219456"/>
           </a:xfrm>
           <a:prstGeom prst="rect">
             <a:avLst/>
@@ -16374,7 +16660,7 @@
               </a:spcAft>
             </a:pPr>
             <a:r>
-              <a:rPr sz="860" b="1">
+              <a:rPr sz="830" b="1">
                 <a:solidFill>
                   <a:srgbClr val="1B7F5E"/>
                 </a:solidFill>
@@ -16383,13 +16669,13 @@
               <a:t>✓  </a:t>
             </a:r>
             <a:r>
-              <a:rPr sz="860" b="0">
+              <a:rPr sz="830" b="0">
                 <a:solidFill>
                   <a:srgbClr val="202838"/>
                 </a:solidFill>
                 <a:latin typeface="Calibri"/>
               </a:rPr>
-              <a:t>Visually identical, forensically distinct</a:t>
+              <a:t>Every copy visually identical, forensically distinct</a:t>
             </a:r>
           </a:p>
         </p:txBody>
@@ -16402,8 +16688,8 @@
         </p:nvSpPr>
         <p:spPr>
           <a:xfrm>
-            <a:off x="566928" y="5102352"/>
-            <a:ext cx="5436108" cy="237744"/>
+            <a:off x="566928" y="4988052"/>
+            <a:ext cx="5436108" cy="219456"/>
           </a:xfrm>
           <a:prstGeom prst="rect">
             <a:avLst/>
@@ -16425,7 +16711,7 @@
               </a:spcAft>
             </a:pPr>
             <a:r>
-              <a:rPr sz="860" b="1">
+              <a:rPr sz="830" b="1">
                 <a:solidFill>
                   <a:srgbClr val="1B7F5E"/>
                 </a:solidFill>
@@ -16434,13 +16720,13 @@
               <a:t>✓  </a:t>
             </a:r>
             <a:r>
-              <a:rPr sz="860" b="0">
+              <a:rPr sz="830" b="0">
                 <a:solidFill>
                   <a:srgbClr val="202838"/>
                 </a:solidFill>
                 <a:latin typeface="Calibri"/>
               </a:rPr>
-              <a:t>Decryption bound to identity, signed with the recipient's own key</a:t>
+              <a:t>Each decryption cryptographically bound to the recipient's identity</a:t>
             </a:r>
           </a:p>
         </p:txBody>
@@ -16453,8 +16739,8 @@
         </p:nvSpPr>
         <p:spPr>
           <a:xfrm>
-            <a:off x="566928" y="5358384"/>
-            <a:ext cx="5436108" cy="237744"/>
+            <a:off x="566928" y="5212079"/>
+            <a:ext cx="5436108" cy="219456"/>
           </a:xfrm>
           <a:prstGeom prst="rect">
             <a:avLst/>
@@ -16476,7 +16762,7 @@
               </a:spcAft>
             </a:pPr>
             <a:r>
-              <a:rPr sz="860" b="1">
+              <a:rPr sz="830" b="1">
                 <a:solidFill>
                   <a:srgbClr val="1B7F5E"/>
                 </a:solidFill>
@@ -16485,13 +16771,13 @@
               <a:t>✓  </a:t>
             </a:r>
             <a:r>
-              <a:rPr sz="860" b="0">
+              <a:rPr sz="830" b="0">
                 <a:solidFill>
                   <a:srgbClr val="202838"/>
                 </a:solidFill>
                 <a:latin typeface="Calibri"/>
               </a:rPr>
-              <a:t>NIST post-quantum algorithms for key exchange and signature</a:t>
+              <a:t>Signature generated with the recipient's own private key</a:t>
             </a:r>
           </a:p>
         </p:txBody>
@@ -16504,8 +16790,8 @@
         </p:nvSpPr>
         <p:spPr>
           <a:xfrm>
-            <a:off x="6094476" y="4334256"/>
-            <a:ext cx="5436108" cy="237744"/>
+            <a:off x="566928" y="5436108"/>
+            <a:ext cx="5436108" cy="219456"/>
           </a:xfrm>
           <a:prstGeom prst="rect">
             <a:avLst/>
@@ -16527,7 +16813,7 @@
               </a:spcAft>
             </a:pPr>
             <a:r>
-              <a:rPr sz="860" b="1">
+              <a:rPr sz="830" b="1">
                 <a:solidFill>
                   <a:srgbClr val="1B7F5E"/>
                 </a:solidFill>
@@ -16536,13 +16822,13 @@
               <a:t>✓  </a:t>
             </a:r>
             <a:r>
-              <a:rPr sz="860" b="0">
+              <a:rPr sz="830" b="0">
                 <a:solidFill>
                   <a:srgbClr val="202838"/>
                 </a:solidFill>
                 <a:latin typeface="Calibri"/>
               </a:rPr>
-              <a:t>Immutable audit layer on a distributed ledger</a:t>
+              <a:t>NIST-standardised PQC for key exchange and digital signatures</a:t>
             </a:r>
           </a:p>
         </p:txBody>
@@ -16555,8 +16841,8 @@
         </p:nvSpPr>
         <p:spPr>
           <a:xfrm>
-            <a:off x="6094476" y="4590288"/>
-            <a:ext cx="5436108" cy="237744"/>
+            <a:off x="6094476" y="4315968"/>
+            <a:ext cx="5436108" cy="219456"/>
           </a:xfrm>
           <a:prstGeom prst="rect">
             <a:avLst/>
@@ -16578,7 +16864,7 @@
               </a:spcAft>
             </a:pPr>
             <a:r>
-              <a:rPr sz="860" b="1">
+              <a:rPr sz="830" b="1">
                 <a:solidFill>
                   <a:srgbClr val="1B7F5E"/>
                 </a:solidFill>
@@ -16587,13 +16873,13 @@
               <a:t>✓  </a:t>
             </a:r>
             <a:r>
-              <a:rPr sz="860" b="0">
+              <a:rPr sz="830" b="0">
                 <a:solidFill>
                   <a:srgbClr val="202838"/>
                 </a:solidFill>
                 <a:latin typeface="Calibri"/>
               </a:rPr>
-              <a:t>No single admin or compromised account can alter records</a:t>
+              <a:t>Immutable audit layer implemented as a distributed ledger</a:t>
             </a:r>
           </a:p>
         </p:txBody>
@@ -16606,8 +16892,8 @@
         </p:nvSpPr>
         <p:spPr>
           <a:xfrm>
-            <a:off x="6094476" y="4846320"/>
-            <a:ext cx="5436108" cy="237744"/>
+            <a:off x="6094476" y="4539996"/>
+            <a:ext cx="5436108" cy="219456"/>
           </a:xfrm>
           <a:prstGeom prst="rect">
             <a:avLst/>
@@ -16629,7 +16915,7 @@
               </a:spcAft>
             </a:pPr>
             <a:r>
-              <a:rPr sz="860" b="1">
+              <a:rPr sz="830" b="1">
                 <a:solidFill>
                   <a:srgbClr val="1B7F5E"/>
                 </a:solidFill>
@@ -16638,13 +16924,13 @@
               <a:t>✓  </a:t>
             </a:r>
             <a:r>
-              <a:rPr sz="860" b="0">
+              <a:rPr sz="830" b="0">
                 <a:solidFill>
                   <a:srgbClr val="202838"/>
                 </a:solidFill>
                 <a:latin typeface="Calibri"/>
               </a:rPr>
-              <a:t>Extract watermark, look up the ledger, return a verifiable record</a:t>
+              <a:t>No single administrator or compromised account can alter records</a:t>
             </a:r>
           </a:p>
         </p:txBody>
@@ -16657,8 +16943,8 @@
         </p:nvSpPr>
         <p:spPr>
           <a:xfrm>
-            <a:off x="6094476" y="5102352"/>
-            <a:ext cx="5436108" cy="237744"/>
+            <a:off x="6094476" y="4764024"/>
+            <a:ext cx="5436108" cy="219456"/>
           </a:xfrm>
           <a:prstGeom prst="rect">
             <a:avLst/>
@@ -16680,7 +16966,7 @@
               </a:spcAft>
             </a:pPr>
             <a:r>
-              <a:rPr sz="860" b="1">
+              <a:rPr sz="830" b="1">
                 <a:solidFill>
                   <a:srgbClr val="1B7F5E"/>
                 </a:solidFill>
@@ -16689,13 +16975,13 @@
               <a:t>✓  </a:t>
             </a:r>
             <a:r>
-              <a:rPr sz="860" b="0">
+              <a:rPr sz="830" b="0">
                 <a:solidFill>
                   <a:srgbClr val="202838"/>
                 </a:solidFill>
                 <a:latin typeface="Calibri"/>
               </a:rPr>
-              <a:t>Operates fully offline and air-gapped</a:t>
+              <a:t>Extract the watermark, match it against the ledger, verify it</a:t>
             </a:r>
           </a:p>
         </p:txBody>
@@ -16708,8 +16994,8 @@
         </p:nvSpPr>
         <p:spPr>
           <a:xfrm>
-            <a:off x="6094476" y="5358384"/>
-            <a:ext cx="5436108" cy="237744"/>
+            <a:off x="6094476" y="4988052"/>
+            <a:ext cx="5436108" cy="219456"/>
           </a:xfrm>
           <a:prstGeom prst="rect">
             <a:avLst/>
@@ -16731,7 +17017,7 @@
               </a:spcAft>
             </a:pPr>
             <a:r>
-              <a:rPr sz="860" b="1">
+              <a:rPr sz="830" b="1">
                 <a:solidFill>
                   <a:srgbClr val="1B7F5E"/>
                 </a:solidFill>
@@ -16740,13 +17026,115 @@
               <a:t>✓  </a:t>
             </a:r>
             <a:r>
-              <a:rPr sz="860" b="0">
+              <a:rPr sz="830" b="0">
                 <a:solidFill>
                   <a:srgbClr val="202838"/>
                 </a:solidFill>
                 <a:latin typeface="Calibri"/>
               </a:rPr>
-              <a:t>No cloud KMS and no public blockchain</a:t>
+              <a:t>Complete operation offline and air-gapped</a:t>
+            </a:r>
+          </a:p>
+        </p:txBody>
+      </p:sp>
+      <p:sp>
+        <p:nvSpPr>
+          <p:cNvPr id="17431" name="TextBox 17430"/>
+          <p:cNvSpPr txBox="1"/>
+          <p:nvPr/>
+        </p:nvSpPr>
+        <p:spPr>
+          <a:xfrm>
+            <a:off x="6094476" y="5212079"/>
+            <a:ext cx="5436108" cy="219456"/>
+          </a:xfrm>
+          <a:prstGeom prst="rect">
+            <a:avLst/>
+          </a:prstGeom>
+          <a:noFill/>
+        </p:spPr>
+        <p:txBody>
+          <a:bodyPr wrap="square" anchor="t" lIns="0" rIns="0" tIns="0" bIns="0">
+            <a:spAutoFit/>
+          </a:bodyPr>
+          <a:lstStyle/>
+          <a:p>
+            <a:pPr algn="l">
+              <a:spcBef>
+                <a:spcPts val="0"/>
+              </a:spcBef>
+              <a:spcAft>
+                <a:spcPts val="0"/>
+              </a:spcAft>
+            </a:pPr>
+            <a:r>
+              <a:rPr sz="830" b="1">
+                <a:solidFill>
+                  <a:srgbClr val="1B7F5E"/>
+                </a:solidFill>
+                <a:latin typeface="Calibri"/>
+              </a:rPr>
+              <a:t>✓  </a:t>
+            </a:r>
+            <a:r>
+              <a:rPr sz="830" b="0">
+                <a:solidFill>
+                  <a:srgbClr val="202838"/>
+                </a:solidFill>
+                <a:latin typeface="Calibri"/>
+              </a:rPr>
+              <a:t>No dependency on external cloud KMS services</a:t>
+            </a:r>
+          </a:p>
+        </p:txBody>
+      </p:sp>
+      <p:sp>
+        <p:nvSpPr>
+          <p:cNvPr id="17432" name="TextBox 17431"/>
+          <p:cNvSpPr txBox="1"/>
+          <p:nvPr/>
+        </p:nvSpPr>
+        <p:spPr>
+          <a:xfrm>
+            <a:off x="6094476" y="5436108"/>
+            <a:ext cx="5436108" cy="219456"/>
+          </a:xfrm>
+          <a:prstGeom prst="rect">
+            <a:avLst/>
+          </a:prstGeom>
+          <a:noFill/>
+        </p:spPr>
+        <p:txBody>
+          <a:bodyPr wrap="square" anchor="t" lIns="0" rIns="0" tIns="0" bIns="0">
+            <a:spAutoFit/>
+          </a:bodyPr>
+          <a:lstStyle/>
+          <a:p>
+            <a:pPr algn="l">
+              <a:spcBef>
+                <a:spcPts val="0"/>
+              </a:spcBef>
+              <a:spcAft>
+                <a:spcPts val="0"/>
+              </a:spcAft>
+            </a:pPr>
+            <a:r>
+              <a:rPr sz="830" b="1">
+                <a:solidFill>
+                  <a:srgbClr val="1B7F5E"/>
+                </a:solidFill>
+                <a:latin typeface="Calibri"/>
+              </a:rPr>
+              <a:t>✓  </a:t>
+            </a:r>
+            <a:r>
+              <a:rPr sz="830" b="0">
+                <a:solidFill>
+                  <a:srgbClr val="202838"/>
+                </a:solidFill>
+                <a:latin typeface="Calibri"/>
+              </a:rPr>
+              <a:t>No dependency on public blockchain networks</a:t>
             </a:r>
           </a:p>
         </p:txBody>

--- a/ppt/NOX_SIH2026_PQFW.pptx
+++ b/ppt/NOX_SIH2026_PQFW.pptx
@@ -5658,8 +5658,8 @@
         </p:nvSpPr>
         <p:spPr>
           <a:xfrm>
-            <a:off x="0" y="932688"/>
-            <a:ext cx="6967728" cy="5925312"/>
+            <a:off x="0" y="914400"/>
+            <a:ext cx="6510528" cy="5943600"/>
           </a:xfrm>
           <a:prstGeom prst="roundRect">
             <a:avLst>
@@ -5698,52 +5698,6 @@
       </p:sp>
       <p:sp>
         <p:nvSpPr>
-          <p:cNvPr id="39" name="Rounded Rectangle 38"/>
-          <p:cNvSpPr/>
-          <p:nvPr/>
-        </p:nvSpPr>
-        <p:spPr>
-          <a:xfrm>
-            <a:off x="0" y="932688"/>
-            <a:ext cx="6967728" cy="50292"/>
-          </a:xfrm>
-          <a:prstGeom prst="roundRect">
-            <a:avLst>
-              <a:gd name="adj" fmla="val 0"/>
-            </a:avLst>
-          </a:prstGeom>
-          <a:solidFill>
-            <a:srgbClr val="F2790D"/>
-          </a:solidFill>
-          <a:ln>
-            <a:noFill/>
-          </a:ln>
-          <a:effectLst/>
-        </p:spPr>
-        <p:style>
-          <a:lnRef idx="1">
-            <a:schemeClr val="accent1"/>
-          </a:lnRef>
-          <a:fillRef idx="3">
-            <a:schemeClr val="accent1"/>
-          </a:fillRef>
-          <a:effectRef idx="2">
-            <a:schemeClr val="accent1"/>
-          </a:effectRef>
-          <a:fontRef idx="minor">
-            <a:schemeClr val="lt1"/>
-          </a:fontRef>
-        </p:style>
-        <p:txBody>
-          <a:bodyPr rtlCol="0" anchor="ctr"/>
-          <a:lstStyle/>
-          <a:p>
-            <a:pPr algn="ctr"/>
-          </a:p>
-        </p:txBody>
-      </p:sp>
-      <p:sp>
-        <p:nvSpPr>
           <p:cNvPr id="4" name="Subtitle 3"/>
           <p:cNvSpPr>
             <a:spLocks noGrp="1"/>
@@ -5754,8 +5708,8 @@
         </p:nvSpPr>
         <p:spPr>
           <a:xfrm>
-            <a:off x="566928" y="1188720"/>
-            <a:ext cx="6035040" cy="1060704"/>
+            <a:off x="548640" y="1188720"/>
+            <a:ext cx="5669280" cy="1005840"/>
           </a:xfrm>
         </p:spPr>
         <p:txBody>
@@ -5771,7 +5725,7 @@
               </a:spcAft>
             </a:pPr>
             <a:r>
-              <a:rPr sz="4600" b="1" i="0">
+              <a:rPr sz="4400" b="1" i="0">
                 <a:solidFill>
                   <a:srgbClr val="FFFFFF"/>
                 </a:solidFill>
@@ -5810,14 +5764,14 @@
       </p:sp>
       <p:sp>
         <p:nvSpPr>
-          <p:cNvPr id="40" name="TextBox 39"/>
+          <p:cNvPr id="39" name="TextBox 38"/>
           <p:cNvSpPr txBox="1"/>
           <p:nvPr/>
         </p:nvSpPr>
         <p:spPr>
           <a:xfrm>
-            <a:off x="566928" y="2377440"/>
-            <a:ext cx="6035040" cy="2286000"/>
+            <a:off x="548640" y="2231136"/>
+            <a:ext cx="5577840" cy="402336"/>
           </a:xfrm>
           <a:prstGeom prst="rect">
             <a:avLst/>
@@ -5835,20 +5789,80 @@
                 <a:spcPts val="0"/>
               </a:spcBef>
               <a:spcAft>
-                <a:spcPts val="500"/>
-              </a:spcAft>
-            </a:pPr>
-            <a:r>
-              <a:rPr sz="980" b="0">
+                <a:spcPts val="0"/>
+              </a:spcAft>
+            </a:pPr>
+            <a:r>
+              <a:rPr sz="1019" b="0">
                 <a:solidFill>
                   <a:srgbClr val="A9BEDF"/>
                 </a:solidFill>
                 <a:latin typeface="Calibri"/>
               </a:rPr>
+              <a:t>One document goes to many cleared recipients. Each decrypted copy carries an invisible, per-session fingerprint, so a leak resolves to </a:t>
+            </a:r>
+            <a:r>
+              <a:rPr sz="1019" b="1">
+                <a:solidFill>
+                  <a:srgbClr val="FFFFFF"/>
+                </a:solidFill>
+                <a:latin typeface="Calibri"/>
+              </a:rPr>
+              <a:t>one name</a:t>
+            </a:r>
+            <a:r>
+              <a:rPr sz="1019" b="0">
+                <a:solidFill>
+                  <a:srgbClr val="A9BEDF"/>
+                </a:solidFill>
+                <a:latin typeface="Calibri"/>
+              </a:rPr>
+              <a:t> — with a provable error bound.</a:t>
+            </a:r>
+          </a:p>
+        </p:txBody>
+      </p:sp>
+      <p:sp>
+        <p:nvSpPr>
+          <p:cNvPr id="40" name="TextBox 39"/>
+          <p:cNvSpPr txBox="1"/>
+          <p:nvPr/>
+        </p:nvSpPr>
+        <p:spPr>
+          <a:xfrm>
+            <a:off x="548640" y="2761488"/>
+            <a:ext cx="5577840" cy="1700784"/>
+          </a:xfrm>
+          <a:prstGeom prst="rect">
+            <a:avLst/>
+          </a:prstGeom>
+          <a:noFill/>
+        </p:spPr>
+        <p:txBody>
+          <a:bodyPr wrap="square" anchor="t" lIns="0" rIns="0" tIns="0" bIns="0">
+            <a:spAutoFit/>
+          </a:bodyPr>
+          <a:lstStyle/>
+          <a:p>
+            <a:pPr algn="l">
+              <a:spcBef>
+                <a:spcPts val="0"/>
+              </a:spcBef>
+              <a:spcAft>
+                <a:spcPts val="450"/>
+              </a:spcAft>
+            </a:pPr>
+            <a:r>
+              <a:rPr sz="960" b="0">
+                <a:solidFill>
+                  <a:srgbClr val="A9BEDF"/>
+                </a:solidFill>
+                <a:latin typeface="Calibri"/>
+              </a:rPr>
               <a:t>Problem Statement ID   </a:t>
             </a:r>
             <a:r>
-              <a:rPr sz="980" b="1">
+              <a:rPr sz="960" b="1">
                 <a:solidFill>
                   <a:srgbClr val="FFFFFF"/>
                 </a:solidFill>
@@ -5863,11 +5877,11 @@
                 <a:spcPts val="0"/>
               </a:spcBef>
               <a:spcAft>
-                <a:spcPts val="500"/>
-              </a:spcAft>
-            </a:pPr>
-            <a:r>
-              <a:rPr sz="980" b="0">
+                <a:spcPts val="450"/>
+              </a:spcAft>
+            </a:pPr>
+            <a:r>
+              <a:rPr sz="960" b="0">
                 <a:solidFill>
                   <a:srgbClr val="A9BEDF"/>
                 </a:solidFill>
@@ -5876,7 +5890,7 @@
               <a:t>Problem Statement Title   </a:t>
             </a:r>
             <a:r>
-              <a:rPr sz="980" b="1">
+              <a:rPr sz="960" b="1">
                 <a:solidFill>
                   <a:srgbClr val="FFFFFF"/>
                 </a:solidFill>
@@ -5891,11 +5905,11 @@
                 <a:spcPts val="0"/>
               </a:spcBef>
               <a:spcAft>
-                <a:spcPts val="500"/>
-              </a:spcAft>
-            </a:pPr>
-            <a:r>
-              <a:rPr sz="980" b="0">
+                <a:spcPts val="450"/>
+              </a:spcAft>
+            </a:pPr>
+            <a:r>
+              <a:rPr sz="960" b="0">
                 <a:solidFill>
                   <a:srgbClr val="A9BEDF"/>
                 </a:solidFill>
@@ -5904,7 +5918,7 @@
               <a:t>Organisation   </a:t>
             </a:r>
             <a:r>
-              <a:rPr sz="980" b="1">
+              <a:rPr sz="960" b="1">
                 <a:solidFill>
                   <a:srgbClr val="FFFFFF"/>
                 </a:solidFill>
@@ -5919,11 +5933,11 @@
                 <a:spcPts val="0"/>
               </a:spcBef>
               <a:spcAft>
-                <a:spcPts val="500"/>
-              </a:spcAft>
-            </a:pPr>
-            <a:r>
-              <a:rPr sz="980" b="0">
+                <a:spcPts val="450"/>
+              </a:spcAft>
+            </a:pPr>
+            <a:r>
+              <a:rPr sz="960" b="0">
                 <a:solidFill>
                   <a:srgbClr val="A9BEDF"/>
                 </a:solidFill>
@@ -5932,7 +5946,7 @@
               <a:t>Theme   </a:t>
             </a:r>
             <a:r>
-              <a:rPr sz="980" b="1">
+              <a:rPr sz="960" b="1">
                 <a:solidFill>
                   <a:srgbClr val="FFFFFF"/>
                 </a:solidFill>
@@ -5947,11 +5961,11 @@
                 <a:spcPts val="0"/>
               </a:spcBef>
               <a:spcAft>
-                <a:spcPts val="500"/>
-              </a:spcAft>
-            </a:pPr>
-            <a:r>
-              <a:rPr sz="980" b="0">
+                <a:spcPts val="450"/>
+              </a:spcAft>
+            </a:pPr>
+            <a:r>
+              <a:rPr sz="960" b="0">
                 <a:solidFill>
                   <a:srgbClr val="A9BEDF"/>
                 </a:solidFill>
@@ -5960,7 +5974,7 @@
               <a:t>PS Category   </a:t>
             </a:r>
             <a:r>
-              <a:rPr sz="980" b="1">
+              <a:rPr sz="960" b="1">
                 <a:solidFill>
                   <a:srgbClr val="FFFFFF"/>
                 </a:solidFill>
@@ -5975,11 +5989,11 @@
                 <a:spcPts val="0"/>
               </a:spcBef>
               <a:spcAft>
-                <a:spcPts val="500"/>
-              </a:spcAft>
-            </a:pPr>
-            <a:r>
-              <a:rPr sz="980" b="0">
+                <a:spcPts val="450"/>
+              </a:spcAft>
+            </a:pPr>
+            <a:r>
+              <a:rPr sz="960" b="0">
                 <a:solidFill>
                   <a:srgbClr val="A9BEDF"/>
                 </a:solidFill>
@@ -5988,7 +6002,7 @@
               <a:t>Team ID   </a:t>
             </a:r>
             <a:r>
-              <a:rPr sz="980" b="1">
+              <a:rPr sz="960" b="1">
                 <a:solidFill>
                   <a:srgbClr val="FFFFFF"/>
                 </a:solidFill>
@@ -6003,11 +6017,11 @@
                 <a:spcPts val="0"/>
               </a:spcBef>
               <a:spcAft>
-                <a:spcPts val="500"/>
-              </a:spcAft>
-            </a:pPr>
-            <a:r>
-              <a:rPr sz="980" b="0">
+                <a:spcPts val="450"/>
+              </a:spcAft>
+            </a:pPr>
+            <a:r>
+              <a:rPr sz="960" b="0">
                 <a:solidFill>
                   <a:srgbClr val="A9BEDF"/>
                 </a:solidFill>
@@ -6016,7 +6030,7 @@
               <a:t>Team Name   </a:t>
             </a:r>
             <a:r>
-              <a:rPr sz="980" b="1">
+              <a:rPr sz="960" b="1">
                 <a:solidFill>
                   <a:srgbClr val="FFFFFF"/>
                 </a:solidFill>
@@ -6035,8 +6049,8 @@
         </p:nvSpPr>
         <p:spPr>
           <a:xfrm>
-            <a:off x="566928" y="4809744"/>
-            <a:ext cx="6035040" cy="1133856"/>
+            <a:off x="548640" y="4590288"/>
+            <a:ext cx="5577840" cy="1115568"/>
           </a:xfrm>
           <a:prstGeom prst="roundRect">
             <a:avLst>
@@ -6091,7 +6105,7 @@
         </p:blipFill>
         <p:spPr>
           <a:xfrm>
-            <a:off x="713232" y="4956048"/>
+            <a:off x="685800" y="4727448"/>
             <a:ext cx="841248" cy="841248"/>
           </a:xfrm>
           <a:prstGeom prst="rect">
@@ -6107,8 +6121,8 @@
         </p:nvSpPr>
         <p:spPr>
           <a:xfrm>
-            <a:off x="1700784" y="4974336"/>
-            <a:ext cx="4773168" cy="841248"/>
+            <a:off x="1664208" y="4745736"/>
+            <a:ext cx="4315968" cy="822960"/>
           </a:xfrm>
           <a:prstGeom prst="rect">
             <a:avLst/>
@@ -6187,8 +6201,8 @@
         </p:nvSpPr>
         <p:spPr>
           <a:xfrm>
-            <a:off x="566928" y="6071616"/>
-            <a:ext cx="6035040" cy="457200"/>
+            <a:off x="548640" y="5961888"/>
+            <a:ext cx="5577840" cy="457200"/>
           </a:xfrm>
           <a:prstGeom prst="rect">
             <a:avLst/>
@@ -6631,7 +6645,7 @@
         <p:spPr>
           <a:xfrm>
             <a:off x="365760" y="1554480"/>
-            <a:ext cx="7223760" cy="1682496"/>
+            <a:ext cx="7223760" cy="2157984"/>
           </a:xfrm>
           <a:prstGeom prst="roundRect">
             <a:avLst>
@@ -6676,7 +6690,7 @@
         </p:nvSpPr>
         <p:spPr>
           <a:xfrm>
-            <a:off x="566928" y="1664208"/>
+            <a:off x="585216" y="1645920"/>
             <a:ext cx="4937760" cy="182880"/>
           </a:xfrm>
           <a:prstGeom prst="rect">
@@ -6718,8 +6732,8 @@
         </p:nvSpPr>
         <p:spPr>
           <a:xfrm>
-            <a:off x="566928" y="1920240"/>
-            <a:ext cx="1554480" cy="1170432"/>
+            <a:off x="585216" y="1883664"/>
+            <a:ext cx="1490472" cy="1188720"/>
           </a:xfrm>
           <a:prstGeom prst="roundRect">
             <a:avLst>
@@ -6758,16 +6772,40 @@
           </a:p>
         </p:txBody>
       </p:sp>
-      <p:sp>
-        <p:nvSpPr>
-          <p:cNvPr id="15367" name="TextBox 15366"/>
+      <p:pic>
+        <p:nvPicPr>
+          <p:cNvPr id="15367" name="Picture 15366" descr="document.png"/>
+          <p:cNvPicPr>
+            <a:picLocks noChangeAspect="1"/>
+          </p:cNvPicPr>
+          <p:nvPr/>
+        </p:nvPicPr>
+        <p:blipFill>
+          <a:blip r:embed="rId4"/>
+          <a:stretch>
+            <a:fillRect/>
+          </a:stretch>
+        </p:blipFill>
+        <p:spPr>
+          <a:xfrm>
+            <a:off x="1193292" y="2020824"/>
+            <a:ext cx="274320" cy="274320"/>
+          </a:xfrm>
+          <a:prstGeom prst="rect">
+            <a:avLst/>
+          </a:prstGeom>
+        </p:spPr>
+      </p:pic>
+      <p:sp>
+        <p:nvSpPr>
+          <p:cNvPr id="15368" name="TextBox 15367"/>
           <p:cNvSpPr txBox="1"/>
           <p:nvPr/>
         </p:nvSpPr>
         <p:spPr>
           <a:xfrm>
-            <a:off x="640080" y="1993392"/>
-            <a:ext cx="1408176" cy="1024128"/>
+            <a:off x="649224" y="2386584"/>
+            <a:ext cx="1362455" cy="585216"/>
           </a:xfrm>
           <a:prstGeom prst="rect">
             <a:avLst/>
@@ -6775,7 +6813,7 @@
           <a:noFill/>
         </p:spPr>
         <p:txBody>
-          <a:bodyPr wrap="square" anchor="ctr" lIns="0" rIns="0" tIns="0" bIns="0">
+          <a:bodyPr wrap="square" anchor="t" lIns="0" rIns="0" tIns="0" bIns="0">
             <a:spAutoFit/>
           </a:bodyPr>
           <a:lstStyle/>
@@ -6785,7 +6823,7 @@
                 <a:spcPts val="0"/>
               </a:spcBef>
               <a:spcAft>
-                <a:spcPts val="200"/>
+                <a:spcPts val="250"/>
               </a:spcAft>
             </a:pPr>
             <a:r>
@@ -6859,14 +6897,14 @@
       </p:sp>
       <p:cxnSp>
         <p:nvCxnSpPr>
-          <p:cNvPr id="15368" name="Connector 15367"/>
+          <p:cNvPr id="15369" name="Connector 15368"/>
           <p:cNvCxnSpPr/>
           <p:nvPr/>
         </p:nvCxnSpPr>
         <p:spPr>
           <a:xfrm>
-            <a:off x="2148839" y="2505456"/>
-            <a:ext cx="237744" cy="0"/>
+            <a:off x="2103120" y="2478024"/>
+            <a:ext cx="219456" cy="0"/>
           </a:xfrm>
           <a:prstGeom prst="line">
             <a:avLst/>
@@ -6895,14 +6933,14 @@
       </p:cxnSp>
       <p:sp>
         <p:nvSpPr>
-          <p:cNvPr id="15369" name="Rounded Rectangle 15368"/>
+          <p:cNvPr id="15370" name="Rounded Rectangle 15369"/>
           <p:cNvSpPr/>
           <p:nvPr/>
         </p:nvSpPr>
         <p:spPr>
           <a:xfrm>
-            <a:off x="2414016" y="1920240"/>
-            <a:ext cx="1554480" cy="1170432"/>
+            <a:off x="2350008" y="1883664"/>
+            <a:ext cx="1490472" cy="1188720"/>
           </a:xfrm>
           <a:prstGeom prst="roundRect">
             <a:avLst>
@@ -6941,16 +6979,40 @@
           </a:p>
         </p:txBody>
       </p:sp>
-      <p:sp>
-        <p:nvSpPr>
-          <p:cNvPr id="15370" name="TextBox 15369"/>
+      <p:pic>
+        <p:nvPicPr>
+          <p:cNvPr id="15371" name="Picture 15370" descr="twocopies.png"/>
+          <p:cNvPicPr>
+            <a:picLocks noChangeAspect="1"/>
+          </p:cNvPicPr>
+          <p:nvPr/>
+        </p:nvPicPr>
+        <p:blipFill>
+          <a:blip r:embed="rId5"/>
+          <a:stretch>
+            <a:fillRect/>
+          </a:stretch>
+        </p:blipFill>
+        <p:spPr>
+          <a:xfrm>
+            <a:off x="2958084" y="2020824"/>
+            <a:ext cx="274320" cy="274320"/>
+          </a:xfrm>
+          <a:prstGeom prst="rect">
+            <a:avLst/>
+          </a:prstGeom>
+        </p:spPr>
+      </p:pic>
+      <p:sp>
+        <p:nvSpPr>
+          <p:cNvPr id="15372" name="TextBox 15371"/>
           <p:cNvSpPr txBox="1"/>
           <p:nvPr/>
         </p:nvSpPr>
         <p:spPr>
           <a:xfrm>
-            <a:off x="2487168" y="1993392"/>
-            <a:ext cx="1408176" cy="1024128"/>
+            <a:off x="2414015" y="2386584"/>
+            <a:ext cx="1362455" cy="585216"/>
           </a:xfrm>
           <a:prstGeom prst="rect">
             <a:avLst/>
@@ -6958,7 +7020,7 @@
           <a:noFill/>
         </p:spPr>
         <p:txBody>
-          <a:bodyPr wrap="square" anchor="ctr" lIns="0" rIns="0" tIns="0" bIns="0">
+          <a:bodyPr wrap="square" anchor="t" lIns="0" rIns="0" tIns="0" bIns="0">
             <a:spAutoFit/>
           </a:bodyPr>
           <a:lstStyle/>
@@ -6968,7 +7030,7 @@
                 <a:spcPts val="0"/>
               </a:spcBef>
               <a:spcAft>
-                <a:spcPts val="200"/>
+                <a:spcPts val="250"/>
               </a:spcAft>
             </a:pPr>
             <a:r>
@@ -7042,14 +7104,14 @@
       </p:sp>
       <p:cxnSp>
         <p:nvCxnSpPr>
-          <p:cNvPr id="15371" name="Connector 15370"/>
+          <p:cNvPr id="15373" name="Connector 15372"/>
           <p:cNvCxnSpPr/>
           <p:nvPr/>
         </p:nvCxnSpPr>
         <p:spPr>
           <a:xfrm>
-            <a:off x="3995928" y="2505456"/>
-            <a:ext cx="237744" cy="0"/>
+            <a:off x="3867911" y="2478024"/>
+            <a:ext cx="219457" cy="0"/>
           </a:xfrm>
           <a:prstGeom prst="line">
             <a:avLst/>
@@ -7078,14 +7140,14 @@
       </p:cxnSp>
       <p:sp>
         <p:nvSpPr>
-          <p:cNvPr id="15372" name="Rounded Rectangle 15371"/>
+          <p:cNvPr id="15374" name="Rounded Rectangle 15373"/>
           <p:cNvSpPr/>
           <p:nvPr/>
         </p:nvSpPr>
         <p:spPr>
           <a:xfrm>
-            <a:off x="4261104" y="1920240"/>
-            <a:ext cx="1554480" cy="1170432"/>
+            <a:off x="4114800" y="1883664"/>
+            <a:ext cx="1490472" cy="1188720"/>
           </a:xfrm>
           <a:prstGeom prst="roundRect">
             <a:avLst>
@@ -7124,16 +7186,40 @@
           </a:p>
         </p:txBody>
       </p:sp>
-      <p:sp>
-        <p:nvSpPr>
-          <p:cNvPr id="15373" name="TextBox 15372"/>
+      <p:pic>
+        <p:nvPicPr>
+          <p:cNvPr id="15375" name="Picture 15374" descr="ciphertext.png"/>
+          <p:cNvPicPr>
+            <a:picLocks noChangeAspect="1"/>
+          </p:cNvPicPr>
+          <p:nvPr/>
+        </p:nvPicPr>
+        <p:blipFill>
+          <a:blip r:embed="rId6"/>
+          <a:stretch>
+            <a:fillRect/>
+          </a:stretch>
+        </p:blipFill>
+        <p:spPr>
+          <a:xfrm>
+            <a:off x="4722875" y="2020824"/>
+            <a:ext cx="274320" cy="274320"/>
+          </a:xfrm>
+          <a:prstGeom prst="rect">
+            <a:avLst/>
+          </a:prstGeom>
+        </p:spPr>
+      </p:pic>
+      <p:sp>
+        <p:nvSpPr>
+          <p:cNvPr id="15376" name="TextBox 15375"/>
           <p:cNvSpPr txBox="1"/>
           <p:nvPr/>
         </p:nvSpPr>
         <p:spPr>
           <a:xfrm>
-            <a:off x="4334256" y="1993392"/>
-            <a:ext cx="1408176" cy="1024128"/>
+            <a:off x="4178808" y="2386584"/>
+            <a:ext cx="1362455" cy="585216"/>
           </a:xfrm>
           <a:prstGeom prst="rect">
             <a:avLst/>
@@ -7141,7 +7227,7 @@
           <a:noFill/>
         </p:spPr>
         <p:txBody>
-          <a:bodyPr wrap="square" anchor="ctr" lIns="0" rIns="0" tIns="0" bIns="0">
+          <a:bodyPr wrap="square" anchor="t" lIns="0" rIns="0" tIns="0" bIns="0">
             <a:spAutoFit/>
           </a:bodyPr>
           <a:lstStyle/>
@@ -7151,7 +7237,7 @@
                 <a:spcPts val="0"/>
               </a:spcBef>
               <a:spcAft>
-                <a:spcPts val="200"/>
+                <a:spcPts val="250"/>
               </a:spcAft>
             </a:pPr>
             <a:r>
@@ -7225,14 +7311,14 @@
       </p:sp>
       <p:cxnSp>
         <p:nvCxnSpPr>
-          <p:cNvPr id="15374" name="Connector 15373"/>
+          <p:cNvPr id="15377" name="Connector 15376"/>
           <p:cNvCxnSpPr/>
           <p:nvPr/>
         </p:nvCxnSpPr>
         <p:spPr>
           <a:xfrm>
-            <a:off x="5843016" y="2505456"/>
-            <a:ext cx="237744" cy="0"/>
+            <a:off x="5632704" y="2478024"/>
+            <a:ext cx="219456" cy="0"/>
           </a:xfrm>
           <a:prstGeom prst="line">
             <a:avLst/>
@@ -7261,14 +7347,14 @@
       </p:cxnSp>
       <p:sp>
         <p:nvSpPr>
-          <p:cNvPr id="15375" name="Rounded Rectangle 15374"/>
+          <p:cNvPr id="15378" name="Rounded Rectangle 15377"/>
           <p:cNvSpPr/>
           <p:nvPr/>
         </p:nvSpPr>
         <p:spPr>
           <a:xfrm>
-            <a:off x="6108192" y="1920240"/>
-            <a:ext cx="1554480" cy="1170432"/>
+            <a:off x="5879592" y="1883664"/>
+            <a:ext cx="1490472" cy="1188720"/>
           </a:xfrm>
           <a:prstGeom prst="roundRect">
             <a:avLst>
@@ -7307,115 +7393,40 @@
           </a:p>
         </p:txBody>
       </p:sp>
-      <p:sp>
-        <p:nvSpPr>
-          <p:cNvPr id="15376" name="TextBox 15375"/>
+      <p:pic>
+        <p:nvPicPr>
+          <p:cNvPr id="15379" name="Picture 15378" descr="keys.png"/>
+          <p:cNvPicPr>
+            <a:picLocks noChangeAspect="1"/>
+          </p:cNvPicPr>
+          <p:nvPr/>
+        </p:nvPicPr>
+        <p:blipFill>
+          <a:blip r:embed="rId7"/>
+          <a:stretch>
+            <a:fillRect/>
+          </a:stretch>
+        </p:blipFill>
+        <p:spPr>
+          <a:xfrm>
+            <a:off x="6487667" y="2020824"/>
+            <a:ext cx="274320" cy="274320"/>
+          </a:xfrm>
+          <a:prstGeom prst="rect">
+            <a:avLst/>
+          </a:prstGeom>
+        </p:spPr>
+      </p:pic>
+      <p:sp>
+        <p:nvSpPr>
+          <p:cNvPr id="15380" name="TextBox 15379"/>
           <p:cNvSpPr txBox="1"/>
           <p:nvPr/>
         </p:nvSpPr>
         <p:spPr>
           <a:xfrm>
-            <a:off x="6181344" y="1993392"/>
-            <a:ext cx="1408176" cy="1024128"/>
-          </a:xfrm>
-          <a:prstGeom prst="rect">
-            <a:avLst/>
-          </a:prstGeom>
-          <a:noFill/>
-        </p:spPr>
-        <p:txBody>
-          <a:bodyPr wrap="square" anchor="ctr" lIns="0" rIns="0" tIns="0" bIns="0">
-            <a:spAutoFit/>
-          </a:bodyPr>
-          <a:lstStyle/>
-          <a:p>
-            <a:pPr algn="ctr">
-              <a:spcBef>
-                <a:spcPts val="0"/>
-              </a:spcBef>
-              <a:spcAft>
-                <a:spcPts val="200"/>
-              </a:spcAft>
-            </a:pPr>
-            <a:r>
-              <a:rPr sz="880" b="1" i="0">
-                <a:solidFill>
-                  <a:srgbClr val="FFFFFF"/>
-                </a:solidFill>
-                <a:latin typeface="Calibri"/>
-              </a:rPr>
-              <a:t>One key each</a:t>
-            </a:r>
-          </a:p>
-          <a:p>
-            <a:pPr algn="ctr">
-              <a:spcBef>
-                <a:spcPts val="0"/>
-              </a:spcBef>
-              <a:spcAft>
-                <a:spcPts val="50"/>
-              </a:spcAft>
-            </a:pPr>
-            <a:r>
-              <a:rPr sz="700" b="0" i="0">
-                <a:solidFill>
-                  <a:srgbClr val="CCF0DF"/>
-                </a:solidFill>
-                <a:latin typeface="Calibri"/>
-              </a:rPr>
-              <a:t>recipient holds</a:t>
-            </a:r>
-          </a:p>
-          <a:p>
-            <a:pPr algn="ctr">
-              <a:spcBef>
-                <a:spcPts val="0"/>
-              </a:spcBef>
-              <a:spcAft>
-                <a:spcPts val="50"/>
-              </a:spcAft>
-            </a:pPr>
-            <a:r>
-              <a:rPr sz="700" b="0" i="0">
-                <a:solidFill>
-                  <a:srgbClr val="CCF0DF"/>
-                </a:solidFill>
-                <a:latin typeface="Calibri"/>
-              </a:rPr>
-              <a:t>1 of the 2 keys</a:t>
-            </a:r>
-          </a:p>
-          <a:p>
-            <a:pPr algn="ctr">
-              <a:spcBef>
-                <a:spcPts val="0"/>
-              </a:spcBef>
-              <a:spcAft>
-                <a:spcPts val="50"/>
-              </a:spcAft>
-            </a:pPr>
-            <a:r>
-              <a:rPr sz="700" b="0" i="0">
-                <a:solidFill>
-                  <a:srgbClr val="CCF0DF"/>
-                </a:solidFill>
-                <a:latin typeface="Calibri"/>
-              </a:rPr>
-              <a:t>per slot</a:t>
-            </a:r>
-          </a:p>
-        </p:txBody>
-      </p:sp>
-      <p:sp>
-        <p:nvSpPr>
-          <p:cNvPr id="15377" name="TextBox 15376"/>
-          <p:cNvSpPr txBox="1"/>
-          <p:nvPr/>
-        </p:nvSpPr>
-        <p:spPr>
-          <a:xfrm>
-            <a:off x="365760" y="3328415"/>
-            <a:ext cx="7223760" cy="420624"/>
+            <a:off x="5943600" y="2386584"/>
+            <a:ext cx="1362455" cy="585216"/>
           </a:xfrm>
           <a:prstGeom prst="rect">
             <a:avLst/>
@@ -7428,6 +7439,105 @@
           </a:bodyPr>
           <a:lstStyle/>
           <a:p>
+            <a:pPr algn="ctr">
+              <a:spcBef>
+                <a:spcPts val="0"/>
+              </a:spcBef>
+              <a:spcAft>
+                <a:spcPts val="250"/>
+              </a:spcAft>
+            </a:pPr>
+            <a:r>
+              <a:rPr sz="880" b="1" i="0">
+                <a:solidFill>
+                  <a:srgbClr val="FFFFFF"/>
+                </a:solidFill>
+                <a:latin typeface="Calibri"/>
+              </a:rPr>
+              <a:t>One key each</a:t>
+            </a:r>
+          </a:p>
+          <a:p>
+            <a:pPr algn="ctr">
+              <a:spcBef>
+                <a:spcPts val="0"/>
+              </a:spcBef>
+              <a:spcAft>
+                <a:spcPts val="50"/>
+              </a:spcAft>
+            </a:pPr>
+            <a:r>
+              <a:rPr sz="700" b="0" i="0">
+                <a:solidFill>
+                  <a:srgbClr val="CCF0DF"/>
+                </a:solidFill>
+                <a:latin typeface="Calibri"/>
+              </a:rPr>
+              <a:t>recipient holds</a:t>
+            </a:r>
+          </a:p>
+          <a:p>
+            <a:pPr algn="ctr">
+              <a:spcBef>
+                <a:spcPts val="0"/>
+              </a:spcBef>
+              <a:spcAft>
+                <a:spcPts val="50"/>
+              </a:spcAft>
+            </a:pPr>
+            <a:r>
+              <a:rPr sz="700" b="0" i="0">
+                <a:solidFill>
+                  <a:srgbClr val="CCF0DF"/>
+                </a:solidFill>
+                <a:latin typeface="Calibri"/>
+              </a:rPr>
+              <a:t>1 of the 2 keys</a:t>
+            </a:r>
+          </a:p>
+          <a:p>
+            <a:pPr algn="ctr">
+              <a:spcBef>
+                <a:spcPts val="0"/>
+              </a:spcBef>
+              <a:spcAft>
+                <a:spcPts val="50"/>
+              </a:spcAft>
+            </a:pPr>
+            <a:r>
+              <a:rPr sz="700" b="0" i="0">
+                <a:solidFill>
+                  <a:srgbClr val="CCF0DF"/>
+                </a:solidFill>
+                <a:latin typeface="Calibri"/>
+              </a:rPr>
+              <a:t>per slot</a:t>
+            </a:r>
+          </a:p>
+        </p:txBody>
+      </p:sp>
+      <p:sp>
+        <p:nvSpPr>
+          <p:cNvPr id="15381" name="TextBox 15380"/>
+          <p:cNvSpPr txBox="1"/>
+          <p:nvPr/>
+        </p:nvSpPr>
+        <p:spPr>
+          <a:xfrm>
+            <a:off x="585216" y="3182112"/>
+            <a:ext cx="6784848" cy="402336"/>
+          </a:xfrm>
+          <a:prstGeom prst="rect">
+            <a:avLst/>
+          </a:prstGeom>
+          <a:noFill/>
+        </p:spPr>
+        <p:txBody>
+          <a:bodyPr wrap="square" anchor="t" lIns="0" rIns="0" tIns="0" bIns="0">
+            <a:spAutoFit/>
+          </a:bodyPr>
+          <a:lstStyle/>
+          <a:p>
             <a:pPr algn="l">
               <a:spcBef>
                 <a:spcPts val="0"/>
@@ -7437,45 +7547,45 @@
               </a:spcAft>
             </a:pPr>
             <a:r>
-              <a:rPr sz="940" b="0">
-                <a:solidFill>
-                  <a:srgbClr val="161D2B"/>
+              <a:rPr sz="900" b="0">
+                <a:solidFill>
+                  <a:srgbClr val="A9BEDF"/>
                 </a:solidFill>
                 <a:latin typeface="Calibri"/>
               </a:rPr>
               <a:t>The fingerprint is not something their software chose to add — it is a consequence of </a:t>
             </a:r>
             <a:r>
-              <a:rPr sz="940" b="1">
-                <a:solidFill>
-                  <a:srgbClr val="1B335E"/>
+              <a:rPr sz="900" b="1">
+                <a:solidFill>
+                  <a:srgbClr val="FFFFFF"/>
                 </a:solidFill>
                 <a:latin typeface="Calibri"/>
               </a:rPr>
               <a:t>which keys they hold</a:t>
             </a:r>
             <a:r>
-              <a:rPr sz="940" b="0">
-                <a:solidFill>
-                  <a:srgbClr val="161D2B"/>
+              <a:rPr sz="900" b="0">
+                <a:solidFill>
+                  <a:srgbClr val="A9BEDF"/>
                 </a:solidFill>
                 <a:latin typeface="Calibri"/>
               </a:rPr>
               <a:t>. The other rendering is an AES-GCM tag failure for them, and </a:t>
             </a:r>
             <a:r>
-              <a:rPr sz="940" b="1">
-                <a:solidFill>
-                  <a:srgbClr val="1B335E"/>
+              <a:rPr sz="900" b="1">
+                <a:solidFill>
+                  <a:srgbClr val="FFFFFF"/>
                 </a:solidFill>
                 <a:latin typeface="Calibri"/>
               </a:rPr>
               <a:t>no unmarked copy exists anywhere</a:t>
             </a:r>
             <a:r>
-              <a:rPr sz="940" b="0">
-                <a:solidFill>
-                  <a:srgbClr val="161D2B"/>
+              <a:rPr sz="900" b="0">
+                <a:solidFill>
+                  <a:srgbClr val="A9BEDF"/>
                 </a:solidFill>
                 <a:latin typeface="Calibri"/>
               </a:rPr>
@@ -7486,13 +7596,13 @@
       </p:sp>
       <p:sp>
         <p:nvSpPr>
-          <p:cNvPr id="15378" name="Hexagon 15377"/>
+          <p:cNvPr id="15382" name="Hexagon 15381"/>
           <p:cNvSpPr/>
           <p:nvPr/>
         </p:nvSpPr>
         <p:spPr>
           <a:xfrm rot="5400000">
-            <a:off x="365760" y="3813048"/>
+            <a:off x="365760" y="3849624"/>
             <a:ext cx="274320" cy="241401"/>
           </a:xfrm>
           <a:prstGeom prst="hexagon">
@@ -7539,13 +7649,13 @@
       </p:sp>
       <p:sp>
         <p:nvSpPr>
-          <p:cNvPr id="15379" name="TextBox 15378"/>
+          <p:cNvPr id="15383" name="TextBox 15382"/>
           <p:cNvSpPr txBox="1"/>
           <p:nvPr/>
         </p:nvSpPr>
         <p:spPr>
           <a:xfrm>
-            <a:off x="749808" y="3794759"/>
+            <a:off x="749808" y="3831335"/>
             <a:ext cx="6839712" cy="310896"/>
           </a:xfrm>
           <a:prstGeom prst="rect">
@@ -7581,13 +7691,13 @@
       </p:sp>
       <p:sp>
         <p:nvSpPr>
-          <p:cNvPr id="15380" name="TextBox 15379"/>
+          <p:cNvPr id="15384" name="TextBox 15383"/>
           <p:cNvSpPr txBox="1"/>
           <p:nvPr/>
         </p:nvSpPr>
         <p:spPr>
           <a:xfrm>
-            <a:off x="384048" y="4187952"/>
+            <a:off x="384048" y="4242816"/>
             <a:ext cx="7205472" cy="914400"/>
           </a:xfrm>
           <a:prstGeom prst="rect">
@@ -7661,13 +7771,13 @@
       </p:sp>
       <p:sp>
         <p:nvSpPr>
-          <p:cNvPr id="15381" name="Hexagon 15380"/>
+          <p:cNvPr id="15385" name="Hexagon 15384"/>
           <p:cNvSpPr/>
           <p:nvPr/>
         </p:nvSpPr>
         <p:spPr>
           <a:xfrm rot="5400000">
-            <a:off x="365760" y="4910328"/>
+            <a:off x="365760" y="4983480"/>
             <a:ext cx="274320" cy="241401"/>
           </a:xfrm>
           <a:prstGeom prst="hexagon">
@@ -7714,13 +7824,13 @@
       </p:sp>
       <p:sp>
         <p:nvSpPr>
-          <p:cNvPr id="15382" name="TextBox 15381"/>
+          <p:cNvPr id="15386" name="TextBox 15385"/>
           <p:cNvSpPr txBox="1"/>
           <p:nvPr/>
         </p:nvSpPr>
         <p:spPr>
           <a:xfrm>
-            <a:off x="749808" y="4892040"/>
+            <a:off x="749808" y="4965192"/>
             <a:ext cx="6839712" cy="310896"/>
           </a:xfrm>
           <a:prstGeom prst="rect">
@@ -7756,14 +7866,14 @@
       </p:sp>
       <p:sp>
         <p:nvSpPr>
-          <p:cNvPr id="15383" name="Rounded Rectangle 15382"/>
+          <p:cNvPr id="15387" name="Rounded Rectangle 15386"/>
           <p:cNvSpPr/>
           <p:nvPr/>
         </p:nvSpPr>
         <p:spPr>
           <a:xfrm>
-            <a:off x="365760" y="5285232"/>
-            <a:ext cx="7223760" cy="914400"/>
+            <a:off x="365760" y="5358384"/>
+            <a:ext cx="7223760" cy="841248"/>
           </a:xfrm>
           <a:prstGeom prst="roundRect">
             <a:avLst>
@@ -7802,16 +7912,40 @@
           </a:p>
         </p:txBody>
       </p:sp>
-      <p:sp>
-        <p:nvSpPr>
-          <p:cNvPr id="15384" name="TextBox 15383"/>
+      <p:pic>
+        <p:nvPicPr>
+          <p:cNvPr id="15388" name="Picture 15387" descr="verdict.png"/>
+          <p:cNvPicPr>
+            <a:picLocks noChangeAspect="1"/>
+          </p:cNvPicPr>
+          <p:nvPr/>
+        </p:nvPicPr>
+        <p:blipFill>
+          <a:blip r:embed="rId8"/>
+          <a:stretch>
+            <a:fillRect/>
+          </a:stretch>
+        </p:blipFill>
+        <p:spPr>
+          <a:xfrm>
+            <a:off x="603504" y="5541264"/>
+            <a:ext cx="384048" cy="384048"/>
+          </a:xfrm>
+          <a:prstGeom prst="rect">
+            <a:avLst/>
+          </a:prstGeom>
+        </p:spPr>
+      </p:pic>
+      <p:sp>
+        <p:nvSpPr>
+          <p:cNvPr id="15389" name="TextBox 15388"/>
           <p:cNvSpPr txBox="1"/>
           <p:nvPr/>
         </p:nvSpPr>
         <p:spPr>
           <a:xfrm>
-            <a:off x="585216" y="5413248"/>
-            <a:ext cx="4023360" cy="658368"/>
+            <a:off x="1115568" y="5468112"/>
+            <a:ext cx="3566160" cy="658368"/>
           </a:xfrm>
           <a:prstGeom prst="rect">
             <a:avLst/>
@@ -7893,13 +8027,13 @@
       </p:sp>
       <p:sp>
         <p:nvSpPr>
-          <p:cNvPr id="15385" name="TextBox 15384"/>
+          <p:cNvPr id="15390" name="TextBox 15389"/>
           <p:cNvSpPr txBox="1"/>
           <p:nvPr/>
         </p:nvSpPr>
         <p:spPr>
           <a:xfrm>
-            <a:off x="4864608" y="5394960"/>
+            <a:off x="4864608" y="5468112"/>
             <a:ext cx="3017520" cy="804672"/>
           </a:xfrm>
           <a:prstGeom prst="rect">
@@ -8056,7 +8190,7 @@
       </p:sp>
       <p:sp>
         <p:nvSpPr>
-          <p:cNvPr id="15386" name="Hexagon 15385"/>
+          <p:cNvPr id="15391" name="Hexagon 15390"/>
           <p:cNvSpPr/>
           <p:nvPr/>
         </p:nvSpPr>
@@ -8109,7 +8243,7 @@
       </p:sp>
       <p:sp>
         <p:nvSpPr>
-          <p:cNvPr id="15387" name="TextBox 15386"/>
+          <p:cNvPr id="15392" name="TextBox 15391"/>
           <p:cNvSpPr txBox="1"/>
           <p:nvPr/>
         </p:nvSpPr>
@@ -8151,7 +8285,7 @@
       </p:sp>
       <p:sp>
         <p:nvSpPr>
-          <p:cNvPr id="15388" name="Rounded Rectangle 15387"/>
+          <p:cNvPr id="15393" name="Rounded Rectangle 15392"/>
           <p:cNvSpPr/>
           <p:nvPr/>
         </p:nvSpPr>
@@ -8199,7 +8333,7 @@
       </p:sp>
       <p:sp>
         <p:nvSpPr>
-          <p:cNvPr id="15389" name="Hexagon 15388"/>
+          <p:cNvPr id="15394" name="Hexagon 15393"/>
           <p:cNvSpPr/>
           <p:nvPr/>
         </p:nvSpPr>
@@ -8252,7 +8386,7 @@
       </p:sp>
       <p:sp>
         <p:nvSpPr>
-          <p:cNvPr id="15390" name="TextBox 15389"/>
+          <p:cNvPr id="15395" name="TextBox 15394"/>
           <p:cNvSpPr txBox="1"/>
           <p:nvPr/>
         </p:nvSpPr>
@@ -8313,7 +8447,7 @@
       </p:sp>
       <p:sp>
         <p:nvSpPr>
-          <p:cNvPr id="15391" name="Rounded Rectangle 15390"/>
+          <p:cNvPr id="15396" name="Rounded Rectangle 15395"/>
           <p:cNvSpPr/>
           <p:nvPr/>
         </p:nvSpPr>
@@ -8361,7 +8495,7 @@
       </p:sp>
       <p:sp>
         <p:nvSpPr>
-          <p:cNvPr id="15392" name="Hexagon 15391"/>
+          <p:cNvPr id="15397" name="Hexagon 15396"/>
           <p:cNvSpPr/>
           <p:nvPr/>
         </p:nvSpPr>
@@ -8414,7 +8548,7 @@
       </p:sp>
       <p:sp>
         <p:nvSpPr>
-          <p:cNvPr id="15393" name="TextBox 15392"/>
+          <p:cNvPr id="15398" name="TextBox 15397"/>
           <p:cNvSpPr txBox="1"/>
           <p:nvPr/>
         </p:nvSpPr>
@@ -8475,7 +8609,7 @@
       </p:sp>
       <p:sp>
         <p:nvSpPr>
-          <p:cNvPr id="15394" name="Rounded Rectangle 15393"/>
+          <p:cNvPr id="15399" name="Rounded Rectangle 15398"/>
           <p:cNvSpPr/>
           <p:nvPr/>
         </p:nvSpPr>
@@ -8523,7 +8657,7 @@
       </p:sp>
       <p:sp>
         <p:nvSpPr>
-          <p:cNvPr id="15395" name="Hexagon 15394"/>
+          <p:cNvPr id="15400" name="Hexagon 15399"/>
           <p:cNvSpPr/>
           <p:nvPr/>
         </p:nvSpPr>
@@ -8576,7 +8710,7 @@
       </p:sp>
       <p:sp>
         <p:nvSpPr>
-          <p:cNvPr id="15396" name="TextBox 15395"/>
+          <p:cNvPr id="15401" name="TextBox 15400"/>
           <p:cNvSpPr txBox="1"/>
           <p:nvPr/>
         </p:nvSpPr>
@@ -8637,7 +8771,7 @@
       </p:sp>
       <p:sp>
         <p:nvSpPr>
-          <p:cNvPr id="15397" name="Rounded Rectangle 15396"/>
+          <p:cNvPr id="15402" name="Rounded Rectangle 15401"/>
           <p:cNvSpPr/>
           <p:nvPr/>
         </p:nvSpPr>
@@ -8685,7 +8819,7 @@
       </p:sp>
       <p:sp>
         <p:nvSpPr>
-          <p:cNvPr id="15398" name="Hexagon 15397"/>
+          <p:cNvPr id="15403" name="Hexagon 15402"/>
           <p:cNvSpPr/>
           <p:nvPr/>
         </p:nvSpPr>
@@ -8738,7 +8872,7 @@
       </p:sp>
       <p:sp>
         <p:nvSpPr>
-          <p:cNvPr id="15399" name="TextBox 15398"/>
+          <p:cNvPr id="15404" name="TextBox 15403"/>
           <p:cNvSpPr txBox="1"/>
           <p:nvPr/>
         </p:nvSpPr>
@@ -8799,7 +8933,7 @@
       </p:sp>
       <p:sp>
         <p:nvSpPr>
-          <p:cNvPr id="15400" name="Rounded Rectangle 15399"/>
+          <p:cNvPr id="15405" name="Rounded Rectangle 15404"/>
           <p:cNvSpPr/>
           <p:nvPr/>
         </p:nvSpPr>
@@ -8847,7 +8981,7 @@
       </p:sp>
       <p:sp>
         <p:nvSpPr>
-          <p:cNvPr id="15401" name="TextBox 15400"/>
+          <p:cNvPr id="15406" name="TextBox 15405"/>
           <p:cNvSpPr txBox="1"/>
           <p:nvPr/>
         </p:nvSpPr>
@@ -9205,7 +9339,7 @@
         <p:spPr>
           <a:xfrm>
             <a:off x="365760" y="1170432"/>
-            <a:ext cx="7918704" cy="4992624"/>
+            <a:ext cx="7918704" cy="5047488"/>
           </a:xfrm>
           <a:prstGeom prst="roundRect">
             <a:avLst>
@@ -9244,19 +9378,78 @@
       </p:sp>
       <p:sp>
         <p:nvSpPr>
-          <p:cNvPr id="17411" name="Rounded Rectangle 17410"/>
+          <p:cNvPr id="17411" name="TextBox 17410"/>
+          <p:cNvSpPr txBox="1"/>
+          <p:nvPr/>
+        </p:nvSpPr>
+        <p:spPr>
+          <a:xfrm>
+            <a:off x="640080" y="1298448"/>
+            <a:ext cx="5486400" cy="384048"/>
+          </a:xfrm>
+          <a:prstGeom prst="rect">
+            <a:avLst/>
+          </a:prstGeom>
+          <a:noFill/>
+        </p:spPr>
+        <p:txBody>
+          <a:bodyPr wrap="square" anchor="t" lIns="0" rIns="0" tIns="0" bIns="0">
+            <a:spAutoFit/>
+          </a:bodyPr>
+          <a:lstStyle/>
+          <a:p>
+            <a:pPr algn="l">
+              <a:spcBef>
+                <a:spcPts val="0"/>
+              </a:spcBef>
+              <a:spcAft>
+                <a:spcPts val="100"/>
+              </a:spcAft>
+            </a:pPr>
+            <a:r>
+              <a:rPr sz="1200" b="1" i="0">
+                <a:solidFill>
+                  <a:srgbClr val="FFFFFF"/>
+                </a:solidFill>
+                <a:latin typeface="Calibri"/>
+              </a:rPr>
+              <a:t>End-to-end flow</a:t>
+            </a:r>
+          </a:p>
+          <a:p>
+            <a:pPr algn="l">
+              <a:spcBef>
+                <a:spcPts val="0"/>
+              </a:spcBef>
+              <a:spcAft>
+                <a:spcPts val="0"/>
+              </a:spcAft>
+            </a:pPr>
+            <a:r>
+              <a:rPr sz="800" b="0" i="1">
+                <a:solidFill>
+                  <a:srgbClr val="A9BEDF"/>
+                </a:solidFill>
+                <a:latin typeface="Calibri"/>
+              </a:rPr>
+              <a:t>distribute · decrypt &amp; record · trace — every stage runs offline</a:t>
+            </a:r>
+          </a:p>
+        </p:txBody>
+      </p:sp>
+      <p:sp>
+        <p:nvSpPr>
+          <p:cNvPr id="17412" name="Hexagon 17411"/>
           <p:cNvSpPr/>
           <p:nvPr/>
         </p:nvSpPr>
         <p:spPr>
-          <a:xfrm>
-            <a:off x="365760" y="1170432"/>
-            <a:ext cx="7918704" cy="50292"/>
-          </a:xfrm>
-          <a:prstGeom prst="roundRect">
-            <a:avLst>
-              <a:gd name="adj" fmla="val 0"/>
-            </a:avLst>
+          <a:xfrm rot="5400000">
+            <a:off x="640080" y="1655064"/>
+            <a:ext cx="256032" cy="225308"/>
+          </a:xfrm>
+          <a:prstGeom prst="hexagon">
+            <a:avLst/>
           </a:prstGeom>
           <a:solidFill>
             <a:srgbClr val="F2790D"/>
@@ -9288,16 +9481,40 @@
           </a:p>
         </p:txBody>
       </p:sp>
-      <p:sp>
-        <p:nvSpPr>
-          <p:cNvPr id="17412" name="TextBox 17411"/>
+      <p:pic>
+        <p:nvPicPr>
+          <p:cNvPr id="17413" name="Picture 17412" descr="package.png"/>
+          <p:cNvPicPr>
+            <a:picLocks noChangeAspect="1"/>
+          </p:cNvPicPr>
+          <p:nvPr/>
+        </p:nvPicPr>
+        <p:blipFill>
+          <a:blip r:embed="rId4"/>
+          <a:stretch>
+            <a:fillRect/>
+          </a:stretch>
+        </p:blipFill>
+        <p:spPr>
+          <a:xfrm>
+            <a:off x="709208" y="1708830"/>
+            <a:ext cx="117774" cy="117774"/>
+          </a:xfrm>
+          <a:prstGeom prst="rect">
+            <a:avLst/>
+          </a:prstGeom>
+        </p:spPr>
+      </p:pic>
+      <p:sp>
+        <p:nvSpPr>
+          <p:cNvPr id="17414" name="TextBox 17413"/>
           <p:cNvSpPr txBox="1"/>
           <p:nvPr/>
         </p:nvSpPr>
         <p:spPr>
           <a:xfrm>
-            <a:off x="566928" y="1335024"/>
-            <a:ext cx="5486400" cy="384048"/>
+            <a:off x="987552" y="1673352"/>
+            <a:ext cx="4572000" cy="182880"/>
           </a:xfrm>
           <a:prstGeom prst="rect">
             <a:avLst/>
@@ -9315,125 +9532,11 @@
                 <a:spcPts val="0"/>
               </a:spcBef>
               <a:spcAft>
-                <a:spcPts val="100"/>
-              </a:spcAft>
-            </a:pPr>
-            <a:r>
-              <a:rPr sz="1200" b="1" i="0">
-                <a:solidFill>
-                  <a:srgbClr val="FFFFFF"/>
-                </a:solidFill>
-                <a:latin typeface="Calibri"/>
-              </a:rPr>
-              <a:t>End-to-end flow</a:t>
-            </a:r>
-          </a:p>
-          <a:p>
-            <a:pPr algn="l">
-              <a:spcBef>
-                <a:spcPts val="0"/>
-              </a:spcBef>
-              <a:spcAft>
-                <a:spcPts val="0"/>
-              </a:spcAft>
-            </a:pPr>
-            <a:r>
-              <a:rPr sz="800" b="0" i="1">
-                <a:solidFill>
-                  <a:srgbClr val="A9BEDF"/>
-                </a:solidFill>
-                <a:latin typeface="Calibri"/>
-              </a:rPr>
-              <a:t>distribute · decrypt &amp; record · trace — every stage runs offline</a:t>
-            </a:r>
-          </a:p>
-        </p:txBody>
-      </p:sp>
-      <p:sp>
-        <p:nvSpPr>
-          <p:cNvPr id="17413" name="Hexagon 17412"/>
-          <p:cNvSpPr/>
-          <p:nvPr/>
-        </p:nvSpPr>
-        <p:spPr>
-          <a:xfrm rot="5400000">
-            <a:off x="566928" y="1801368"/>
-            <a:ext cx="237744" cy="209214"/>
-          </a:xfrm>
-          <a:prstGeom prst="hexagon">
-            <a:avLst/>
-          </a:prstGeom>
-          <a:solidFill>
-            <a:srgbClr val="F2790D"/>
-          </a:solidFill>
-          <a:ln>
-            <a:noFill/>
-          </a:ln>
-          <a:effectLst/>
-        </p:spPr>
-        <p:style>
-          <a:lnRef idx="1">
-            <a:schemeClr val="accent1"/>
-          </a:lnRef>
-          <a:fillRef idx="3">
-            <a:schemeClr val="accent1"/>
-          </a:fillRef>
-          <a:effectRef idx="2">
-            <a:schemeClr val="accent1"/>
-          </a:effectRef>
-          <a:fontRef idx="minor">
-            <a:schemeClr val="lt1"/>
-          </a:fontRef>
-        </p:style>
-        <p:txBody>
-          <a:bodyPr rtlCol="0" anchor="ctr" lIns="0" rIns="0" tIns="0" bIns="0" rot="-5400000"/>
-          <a:lstStyle/>
-          <a:p>
-            <a:pPr algn="ctr"/>
-            <a:r>
-              <a:rPr sz="850" b="1">
-                <a:solidFill>
-                  <a:srgbClr val="FFFFFF"/>
-                </a:solidFill>
-                <a:latin typeface="Calibri"/>
-              </a:rPr>
-              <a:t>1</a:t>
-            </a:r>
-          </a:p>
-        </p:txBody>
-      </p:sp>
-      <p:sp>
-        <p:nvSpPr>
-          <p:cNvPr id="17414" name="TextBox 17413"/>
-          <p:cNvSpPr txBox="1"/>
-          <p:nvPr/>
-        </p:nvSpPr>
-        <p:spPr>
-          <a:xfrm>
-            <a:off x="914400" y="1810512"/>
-            <a:ext cx="4572000" cy="182880"/>
-          </a:xfrm>
-          <a:prstGeom prst="rect">
-            <a:avLst/>
-          </a:prstGeom>
-          <a:noFill/>
-        </p:spPr>
-        <p:txBody>
-          <a:bodyPr wrap="square" anchor="t" lIns="0" rIns="0" tIns="0" bIns="0">
-            <a:spAutoFit/>
-          </a:bodyPr>
-          <a:lstStyle/>
-          <a:p>
-            <a:pPr algn="l">
-              <a:spcBef>
-                <a:spcPts val="0"/>
-              </a:spcBef>
-              <a:spcAft>
-                <a:spcPts val="0"/>
-              </a:spcAft>
-            </a:pPr>
-            <a:r>
-              <a:rPr sz="760" b="1" i="0" spc="140">
+                <a:spcPts val="0"/>
+              </a:spcAft>
+            </a:pPr>
+            <a:r>
+              <a:rPr sz="780" b="1" i="0" spc="140">
                 <a:solidFill>
                   <a:srgbClr val="F2790D"/>
                 </a:solidFill>
@@ -9452,8 +9555,8 @@
         </p:nvSpPr>
         <p:spPr>
           <a:xfrm>
-            <a:off x="694944" y="2084832"/>
-            <a:ext cx="1719072" cy="841248"/>
+            <a:off x="640080" y="1956816"/>
+            <a:ext cx="1645920" cy="1005840"/>
           </a:xfrm>
           <a:prstGeom prst="roundRect">
             <a:avLst>
@@ -9492,16 +9595,40 @@
           </a:p>
         </p:txBody>
       </p:sp>
-      <p:sp>
-        <p:nvSpPr>
-          <p:cNvPr id="17416" name="TextBox 17415"/>
+      <p:pic>
+        <p:nvPicPr>
+          <p:cNvPr id="17416" name="Picture 17415" descr="document.png"/>
+          <p:cNvPicPr>
+            <a:picLocks noChangeAspect="1"/>
+          </p:cNvPicPr>
+          <p:nvPr/>
+        </p:nvPicPr>
+        <p:blipFill>
+          <a:blip r:embed="rId5"/>
+          <a:stretch>
+            <a:fillRect/>
+          </a:stretch>
+        </p:blipFill>
+        <p:spPr>
+          <a:xfrm>
+            <a:off x="1325880" y="2093976"/>
+            <a:ext cx="274320" cy="274320"/>
+          </a:xfrm>
+          <a:prstGeom prst="rect">
+            <a:avLst/>
+          </a:prstGeom>
+        </p:spPr>
+      </p:pic>
+      <p:sp>
+        <p:nvSpPr>
+          <p:cNvPr id="17417" name="TextBox 17416"/>
           <p:cNvSpPr txBox="1"/>
           <p:nvPr/>
         </p:nvSpPr>
         <p:spPr>
           <a:xfrm>
-            <a:off x="768096" y="2157984"/>
-            <a:ext cx="1572768" cy="694944"/>
+            <a:off x="704088" y="2459736"/>
+            <a:ext cx="1517904" cy="402336"/>
           </a:xfrm>
           <a:prstGeom prst="rect">
             <a:avLst/>
@@ -9509,7 +9636,7 @@
           <a:noFill/>
         </p:spPr>
         <p:txBody>
-          <a:bodyPr wrap="square" anchor="ctr" lIns="0" rIns="0" tIns="0" bIns="0">
+          <a:bodyPr wrap="square" anchor="t" lIns="0" rIns="0" tIns="0" bIns="0">
             <a:spAutoFit/>
           </a:bodyPr>
           <a:lstStyle/>
@@ -9519,7 +9646,7 @@
                 <a:spcPts val="0"/>
               </a:spcBef>
               <a:spcAft>
-                <a:spcPts val="200"/>
+                <a:spcPts val="250"/>
               </a:spcAft>
             </a:pPr>
             <a:r>
@@ -9574,21 +9701,21 @@
       </p:sp>
       <p:cxnSp>
         <p:nvCxnSpPr>
-          <p:cNvPr id="17417" name="Connector 17416"/>
+          <p:cNvPr id="17418" name="Connector 17417"/>
           <p:cNvCxnSpPr/>
           <p:nvPr/>
         </p:nvCxnSpPr>
         <p:spPr>
           <a:xfrm>
-            <a:off x="2432303" y="2505456"/>
-            <a:ext cx="219457" cy="0"/>
+            <a:off x="2304288" y="2459736"/>
+            <a:ext cx="228600" cy="0"/>
           </a:xfrm>
           <a:prstGeom prst="line">
             <a:avLst/>
           </a:prstGeom>
           <a:ln w="28575">
             <a:solidFill>
-              <a:srgbClr val="3D66AE"/>
+              <a:srgbClr val="F2790D"/>
             </a:solidFill>
             <a:tailEnd type="triangle" w="med" len="med"/>
           </a:ln>
@@ -9610,14 +9737,14 @@
       </p:cxnSp>
       <p:sp>
         <p:nvSpPr>
-          <p:cNvPr id="17418" name="Rounded Rectangle 17417"/>
+          <p:cNvPr id="17419" name="Rounded Rectangle 17418"/>
           <p:cNvSpPr/>
           <p:nvPr/>
         </p:nvSpPr>
         <p:spPr>
           <a:xfrm>
-            <a:off x="2670048" y="2084832"/>
-            <a:ext cx="1719072" cy="841248"/>
+            <a:off x="2551176" y="1956816"/>
+            <a:ext cx="1645920" cy="1005840"/>
           </a:xfrm>
           <a:prstGeom prst="roundRect">
             <a:avLst>
@@ -9656,16 +9783,40 @@
           </a:p>
         </p:txBody>
       </p:sp>
-      <p:sp>
-        <p:nvSpPr>
-          <p:cNvPr id="17419" name="TextBox 17418"/>
+      <p:pic>
+        <p:nvPicPr>
+          <p:cNvPr id="17420" name="Picture 17419" descr="lock.png"/>
+          <p:cNvPicPr>
+            <a:picLocks noChangeAspect="1"/>
+          </p:cNvPicPr>
+          <p:nvPr/>
+        </p:nvPicPr>
+        <p:blipFill>
+          <a:blip r:embed="rId6"/>
+          <a:stretch>
+            <a:fillRect/>
+          </a:stretch>
+        </p:blipFill>
+        <p:spPr>
+          <a:xfrm>
+            <a:off x="3236976" y="2093976"/>
+            <a:ext cx="274320" cy="274320"/>
+          </a:xfrm>
+          <a:prstGeom prst="rect">
+            <a:avLst/>
+          </a:prstGeom>
+        </p:spPr>
+      </p:pic>
+      <p:sp>
+        <p:nvSpPr>
+          <p:cNvPr id="17421" name="TextBox 17420"/>
           <p:cNvSpPr txBox="1"/>
           <p:nvPr/>
         </p:nvSpPr>
         <p:spPr>
           <a:xfrm>
-            <a:off x="2743200" y="2157984"/>
-            <a:ext cx="1572768" cy="694944"/>
+            <a:off x="2615184" y="2459736"/>
+            <a:ext cx="1517904" cy="402336"/>
           </a:xfrm>
           <a:prstGeom prst="rect">
             <a:avLst/>
@@ -9673,7 +9824,7 @@
           <a:noFill/>
         </p:spPr>
         <p:txBody>
-          <a:bodyPr wrap="square" anchor="ctr" lIns="0" rIns="0" tIns="0" bIns="0">
+          <a:bodyPr wrap="square" anchor="t" lIns="0" rIns="0" tIns="0" bIns="0">
             <a:spAutoFit/>
           </a:bodyPr>
           <a:lstStyle/>
@@ -9683,7 +9834,7 @@
                 <a:spcPts val="0"/>
               </a:spcBef>
               <a:spcAft>
-                <a:spcPts val="200"/>
+                <a:spcPts val="250"/>
               </a:spcAft>
             </a:pPr>
             <a:r>
@@ -9738,21 +9889,21 @@
       </p:sp>
       <p:cxnSp>
         <p:nvCxnSpPr>
-          <p:cNvPr id="17420" name="Connector 17419"/>
+          <p:cNvPr id="17422" name="Connector 17421"/>
           <p:cNvCxnSpPr/>
           <p:nvPr/>
         </p:nvCxnSpPr>
         <p:spPr>
           <a:xfrm>
-            <a:off x="4407407" y="2505456"/>
-            <a:ext cx="219457" cy="0"/>
+            <a:off x="4215383" y="2459736"/>
+            <a:ext cx="228600" cy="0"/>
           </a:xfrm>
           <a:prstGeom prst="line">
             <a:avLst/>
           </a:prstGeom>
           <a:ln w="28575">
             <a:solidFill>
-              <a:srgbClr val="3D66AE"/>
+              <a:srgbClr val="F2790D"/>
             </a:solidFill>
             <a:tailEnd type="triangle" w="med" len="med"/>
           </a:ln>
@@ -9774,14 +9925,14 @@
       </p:cxnSp>
       <p:sp>
         <p:nvSpPr>
-          <p:cNvPr id="17421" name="Rounded Rectangle 17420"/>
+          <p:cNvPr id="17423" name="Rounded Rectangle 17422"/>
           <p:cNvSpPr/>
           <p:nvPr/>
         </p:nvSpPr>
         <p:spPr>
           <a:xfrm>
-            <a:off x="4645152" y="2084832"/>
-            <a:ext cx="1719072" cy="841248"/>
+            <a:off x="4462272" y="1956816"/>
+            <a:ext cx="1645920" cy="1005840"/>
           </a:xfrm>
           <a:prstGeom prst="roundRect">
             <a:avLst>
@@ -9820,16 +9971,40 @@
           </a:p>
         </p:txBody>
       </p:sp>
-      <p:sp>
-        <p:nvSpPr>
-          <p:cNvPr id="17422" name="TextBox 17421"/>
+      <p:pic>
+        <p:nvPicPr>
+          <p:cNvPr id="17424" name="Picture 17423" descr="keys.png"/>
+          <p:cNvPicPr>
+            <a:picLocks noChangeAspect="1"/>
+          </p:cNvPicPr>
+          <p:nvPr/>
+        </p:nvPicPr>
+        <p:blipFill>
+          <a:blip r:embed="rId7"/>
+          <a:stretch>
+            <a:fillRect/>
+          </a:stretch>
+        </p:blipFill>
+        <p:spPr>
+          <a:xfrm>
+            <a:off x="5148072" y="2093976"/>
+            <a:ext cx="274320" cy="274320"/>
+          </a:xfrm>
+          <a:prstGeom prst="rect">
+            <a:avLst/>
+          </a:prstGeom>
+        </p:spPr>
+      </p:pic>
+      <p:sp>
+        <p:nvSpPr>
+          <p:cNvPr id="17425" name="TextBox 17424"/>
           <p:cNvSpPr txBox="1"/>
           <p:nvPr/>
         </p:nvSpPr>
         <p:spPr>
           <a:xfrm>
-            <a:off x="4718304" y="2157984"/>
-            <a:ext cx="1572768" cy="694944"/>
+            <a:off x="4526280" y="2459736"/>
+            <a:ext cx="1517904" cy="402336"/>
           </a:xfrm>
           <a:prstGeom prst="rect">
             <a:avLst/>
@@ -9837,7 +10012,7 @@
           <a:noFill/>
         </p:spPr>
         <p:txBody>
-          <a:bodyPr wrap="square" anchor="ctr" lIns="0" rIns="0" tIns="0" bIns="0">
+          <a:bodyPr wrap="square" anchor="t" lIns="0" rIns="0" tIns="0" bIns="0">
             <a:spAutoFit/>
           </a:bodyPr>
           <a:lstStyle/>
@@ -9847,7 +10022,7 @@
                 <a:spcPts val="0"/>
               </a:spcBef>
               <a:spcAft>
-                <a:spcPts val="200"/>
+                <a:spcPts val="250"/>
               </a:spcAft>
             </a:pPr>
             <a:r>
@@ -9902,21 +10077,21 @@
       </p:sp>
       <p:cxnSp>
         <p:nvCxnSpPr>
-          <p:cNvPr id="17423" name="Connector 17422"/>
+          <p:cNvPr id="17426" name="Connector 17425"/>
           <p:cNvCxnSpPr/>
           <p:nvPr/>
         </p:nvCxnSpPr>
         <p:spPr>
           <a:xfrm>
-            <a:off x="6382512" y="2505456"/>
-            <a:ext cx="219456" cy="0"/>
+            <a:off x="6126479" y="2459736"/>
+            <a:ext cx="228600" cy="0"/>
           </a:xfrm>
           <a:prstGeom prst="line">
             <a:avLst/>
           </a:prstGeom>
           <a:ln w="28575">
             <a:solidFill>
-              <a:srgbClr val="3D66AE"/>
+              <a:srgbClr val="F2790D"/>
             </a:solidFill>
             <a:tailEnd type="triangle" w="med" len="med"/>
           </a:ln>
@@ -9938,14 +10113,14 @@
       </p:cxnSp>
       <p:sp>
         <p:nvSpPr>
-          <p:cNvPr id="17424" name="Rounded Rectangle 17423"/>
+          <p:cNvPr id="17427" name="Rounded Rectangle 17426"/>
           <p:cNvSpPr/>
           <p:nvPr/>
         </p:nvSpPr>
         <p:spPr>
           <a:xfrm>
-            <a:off x="6620256" y="2084832"/>
-            <a:ext cx="1719072" cy="841248"/>
+            <a:off x="6373368" y="1956816"/>
+            <a:ext cx="1645920" cy="1005840"/>
           </a:xfrm>
           <a:prstGeom prst="roundRect">
             <a:avLst>
@@ -9984,16 +10159,40 @@
           </a:p>
         </p:txBody>
       </p:sp>
-      <p:sp>
-        <p:nvSpPr>
-          <p:cNvPr id="17425" name="TextBox 17424"/>
+      <p:pic>
+        <p:nvPicPr>
+          <p:cNvPr id="17428" name="Picture 17427" descr="package.png"/>
+          <p:cNvPicPr>
+            <a:picLocks noChangeAspect="1"/>
+          </p:cNvPicPr>
+          <p:nvPr/>
+        </p:nvPicPr>
+        <p:blipFill>
+          <a:blip r:embed="rId4"/>
+          <a:stretch>
+            <a:fillRect/>
+          </a:stretch>
+        </p:blipFill>
+        <p:spPr>
+          <a:xfrm>
+            <a:off x="7059168" y="2093976"/>
+            <a:ext cx="274320" cy="274320"/>
+          </a:xfrm>
+          <a:prstGeom prst="rect">
+            <a:avLst/>
+          </a:prstGeom>
+        </p:spPr>
+      </p:pic>
+      <p:sp>
+        <p:nvSpPr>
+          <p:cNvPr id="17429" name="TextBox 17428"/>
           <p:cNvSpPr txBox="1"/>
           <p:nvPr/>
         </p:nvSpPr>
         <p:spPr>
           <a:xfrm>
-            <a:off x="6693408" y="2157984"/>
-            <a:ext cx="1572768" cy="694944"/>
+            <a:off x="6437376" y="2459736"/>
+            <a:ext cx="1517904" cy="402336"/>
           </a:xfrm>
           <a:prstGeom prst="rect">
             <a:avLst/>
@@ -10001,7 +10200,7 @@
           <a:noFill/>
         </p:spPr>
         <p:txBody>
-          <a:bodyPr wrap="square" anchor="ctr" lIns="0" rIns="0" tIns="0" bIns="0">
+          <a:bodyPr wrap="square" anchor="t" lIns="0" rIns="0" tIns="0" bIns="0">
             <a:spAutoFit/>
           </a:bodyPr>
           <a:lstStyle/>
@@ -10011,7 +10210,7 @@
                 <a:spcPts val="0"/>
               </a:spcBef>
               <a:spcAft>
-                <a:spcPts val="200"/>
+                <a:spcPts val="250"/>
               </a:spcAft>
             </a:pPr>
             <a:r>
@@ -10040,7 +10239,7 @@
                 </a:solidFill>
                 <a:latin typeface="Calibri"/>
               </a:rPr>
-              <a:t>identical ciphertext</a:t>
+              <a:t>identical ciphertext for all N,</a:t>
             </a:r>
           </a:p>
           <a:p>
@@ -10059,57 +10258,21 @@
                 </a:solidFill>
                 <a:latin typeface="Calibri"/>
               </a:rPr>
-              <a:t>for all N recipients</a:t>
-            </a:r>
-          </a:p>
-        </p:txBody>
-      </p:sp>
-      <p:cxnSp>
-        <p:nvCxnSpPr>
-          <p:cNvPr id="17426" name="Connector 17425"/>
-          <p:cNvCxnSpPr/>
-          <p:nvPr/>
-        </p:nvCxnSpPr>
-        <p:spPr>
-          <a:xfrm>
-            <a:off x="4325112" y="2962656"/>
-            <a:ext cx="0" cy="274320"/>
-          </a:xfrm>
-          <a:prstGeom prst="line">
-            <a:avLst/>
-          </a:prstGeom>
-          <a:ln w="28575">
-            <a:solidFill>
-              <a:srgbClr val="3D66AE"/>
-            </a:solidFill>
-            <a:tailEnd type="triangle" w="med" len="med"/>
-          </a:ln>
-        </p:spPr>
-        <p:style>
-          <a:lnRef idx="2">
-            <a:schemeClr val="accent1"/>
-          </a:lnRef>
-          <a:fillRef idx="0">
-            <a:schemeClr val="accent1"/>
-          </a:fillRef>
-          <a:effectRef idx="1">
-            <a:schemeClr val="accent1"/>
-          </a:effectRef>
-          <a:fontRef idx="minor">
-            <a:schemeClr val="tx1"/>
-          </a:fontRef>
-        </p:style>
-      </p:cxnSp>
-      <p:sp>
-        <p:nvSpPr>
-          <p:cNvPr id="17427" name="Hexagon 17426"/>
+              <a:t>116 KB shared + 34 KB each</a:t>
+            </a:r>
+          </a:p>
+        </p:txBody>
+      </p:sp>
+      <p:sp>
+        <p:nvSpPr>
+          <p:cNvPr id="17430" name="Hexagon 17429"/>
           <p:cNvSpPr/>
           <p:nvPr/>
         </p:nvSpPr>
         <p:spPr>
           <a:xfrm rot="5400000">
-            <a:off x="566928" y="3191256"/>
-            <a:ext cx="237744" cy="209214"/>
+            <a:off x="640080" y="3081528"/>
+            <a:ext cx="256032" cy="225308"/>
           </a:xfrm>
           <a:prstGeom prst="hexagon">
             <a:avLst/>
@@ -10137,31 +10300,46 @@
           </a:fontRef>
         </p:style>
         <p:txBody>
-          <a:bodyPr rtlCol="0" anchor="ctr" lIns="0" rIns="0" tIns="0" bIns="0" rot="-5400000"/>
+          <a:bodyPr rtlCol="0" anchor="ctr"/>
           <a:lstStyle/>
           <a:p>
             <a:pPr algn="ctr"/>
-            <a:r>
-              <a:rPr sz="850" b="1">
-                <a:solidFill>
-                  <a:srgbClr val="FFFFFF"/>
-                </a:solidFill>
-                <a:latin typeface="Calibri"/>
-              </a:rPr>
-              <a:t>2</a:t>
-            </a:r>
-          </a:p>
-        </p:txBody>
-      </p:sp>
-      <p:sp>
-        <p:nvSpPr>
-          <p:cNvPr id="17428" name="TextBox 17427"/>
+          </a:p>
+        </p:txBody>
+      </p:sp>
+      <p:pic>
+        <p:nvPicPr>
+          <p:cNvPr id="17431" name="Picture 17430" descr="receipt.png"/>
+          <p:cNvPicPr>
+            <a:picLocks noChangeAspect="1"/>
+          </p:cNvPicPr>
+          <p:nvPr/>
+        </p:nvPicPr>
+        <p:blipFill>
+          <a:blip r:embed="rId8"/>
+          <a:stretch>
+            <a:fillRect/>
+          </a:stretch>
+        </p:blipFill>
+        <p:spPr>
+          <a:xfrm>
+            <a:off x="709208" y="3135294"/>
+            <a:ext cx="117774" cy="117774"/>
+          </a:xfrm>
+          <a:prstGeom prst="rect">
+            <a:avLst/>
+          </a:prstGeom>
+        </p:spPr>
+      </p:pic>
+      <p:sp>
+        <p:nvSpPr>
+          <p:cNvPr id="17432" name="TextBox 17431"/>
           <p:cNvSpPr txBox="1"/>
           <p:nvPr/>
         </p:nvSpPr>
         <p:spPr>
           <a:xfrm>
-            <a:off x="914400" y="3200400"/>
+            <a:off x="987552" y="3099816"/>
             <a:ext cx="4572000" cy="182880"/>
           </a:xfrm>
           <a:prstGeom prst="rect">
@@ -10184,7 +10362,7 @@
               </a:spcAft>
             </a:pPr>
             <a:r>
-              <a:rPr sz="760" b="1" i="0" spc="140">
+              <a:rPr sz="780" b="1" i="0" spc="140">
                 <a:solidFill>
                   <a:srgbClr val="22B173"/>
                 </a:solidFill>
@@ -10197,14 +10375,14 @@
       </p:sp>
       <p:sp>
         <p:nvSpPr>
-          <p:cNvPr id="17429" name="Rounded Rectangle 17428"/>
+          <p:cNvPr id="17433" name="Rounded Rectangle 17432"/>
           <p:cNvSpPr/>
           <p:nvPr/>
         </p:nvSpPr>
         <p:spPr>
           <a:xfrm>
-            <a:off x="694944" y="3474720"/>
-            <a:ext cx="1719072" cy="841248"/>
+            <a:off x="640080" y="3383280"/>
+            <a:ext cx="1645920" cy="1005840"/>
           </a:xfrm>
           <a:prstGeom prst="roundRect">
             <a:avLst>
@@ -10243,16 +10421,40 @@
           </a:p>
         </p:txBody>
       </p:sp>
-      <p:sp>
-        <p:nvSpPr>
-          <p:cNvPr id="17430" name="TextBox 17429"/>
+      <p:pic>
+        <p:nvPicPr>
+          <p:cNvPr id="17434" name="Picture 17433" descr="unlock.png"/>
+          <p:cNvPicPr>
+            <a:picLocks noChangeAspect="1"/>
+          </p:cNvPicPr>
+          <p:nvPr/>
+        </p:nvPicPr>
+        <p:blipFill>
+          <a:blip r:embed="rId9"/>
+          <a:stretch>
+            <a:fillRect/>
+          </a:stretch>
+        </p:blipFill>
+        <p:spPr>
+          <a:xfrm>
+            <a:off x="1325880" y="3520440"/>
+            <a:ext cx="274320" cy="274320"/>
+          </a:xfrm>
+          <a:prstGeom prst="rect">
+            <a:avLst/>
+          </a:prstGeom>
+        </p:spPr>
+      </p:pic>
+      <p:sp>
+        <p:nvSpPr>
+          <p:cNvPr id="17435" name="TextBox 17434"/>
           <p:cNvSpPr txBox="1"/>
           <p:nvPr/>
         </p:nvSpPr>
         <p:spPr>
           <a:xfrm>
-            <a:off x="768096" y="3547872"/>
-            <a:ext cx="1572768" cy="694944"/>
+            <a:off x="704088" y="3886200"/>
+            <a:ext cx="1517904" cy="402336"/>
           </a:xfrm>
           <a:prstGeom prst="rect">
             <a:avLst/>
@@ -10260,7 +10462,7 @@
           <a:noFill/>
         </p:spPr>
         <p:txBody>
-          <a:bodyPr wrap="square" anchor="ctr" lIns="0" rIns="0" tIns="0" bIns="0">
+          <a:bodyPr wrap="square" anchor="t" lIns="0" rIns="0" tIns="0" bIns="0">
             <a:spAutoFit/>
           </a:bodyPr>
           <a:lstStyle/>
@@ -10270,7 +10472,7 @@
                 <a:spcPts val="0"/>
               </a:spcBef>
               <a:spcAft>
-                <a:spcPts val="200"/>
+                <a:spcPts val="250"/>
               </a:spcAft>
             </a:pPr>
             <a:r>
@@ -10325,14 +10527,14 @@
       </p:sp>
       <p:cxnSp>
         <p:nvCxnSpPr>
-          <p:cNvPr id="17431" name="Connector 17430"/>
+          <p:cNvPr id="17436" name="Connector 17435"/>
           <p:cNvCxnSpPr/>
           <p:nvPr/>
         </p:nvCxnSpPr>
         <p:spPr>
           <a:xfrm>
-            <a:off x="2432303" y="3895344"/>
-            <a:ext cx="219457" cy="0"/>
+            <a:off x="2304288" y="3886200"/>
+            <a:ext cx="228600" cy="0"/>
           </a:xfrm>
           <a:prstGeom prst="line">
             <a:avLst/>
@@ -10361,14 +10563,14 @@
       </p:cxnSp>
       <p:sp>
         <p:nvSpPr>
-          <p:cNvPr id="17432" name="Rounded Rectangle 17431"/>
+          <p:cNvPr id="17437" name="Rounded Rectangle 17436"/>
           <p:cNvSpPr/>
           <p:nvPr/>
         </p:nvSpPr>
         <p:spPr>
           <a:xfrm>
-            <a:off x="2670048" y="3474720"/>
-            <a:ext cx="1719072" cy="841248"/>
+            <a:off x="2551176" y="3383280"/>
+            <a:ext cx="1645920" cy="1005840"/>
           </a:xfrm>
           <a:prstGeom prst="roundRect">
             <a:avLst>
@@ -10407,16 +10609,40 @@
           </a:p>
         </p:txBody>
       </p:sp>
-      <p:sp>
-        <p:nvSpPr>
-          <p:cNvPr id="17433" name="TextBox 17432"/>
+      <p:pic>
+        <p:nvPicPr>
+          <p:cNvPr id="17438" name="Picture 17437" descr="fingerprint.png"/>
+          <p:cNvPicPr>
+            <a:picLocks noChangeAspect="1"/>
+          </p:cNvPicPr>
+          <p:nvPr/>
+        </p:nvPicPr>
+        <p:blipFill>
+          <a:blip r:embed="rId10"/>
+          <a:stretch>
+            <a:fillRect/>
+          </a:stretch>
+        </p:blipFill>
+        <p:spPr>
+          <a:xfrm>
+            <a:off x="3236976" y="3520440"/>
+            <a:ext cx="274320" cy="274320"/>
+          </a:xfrm>
+          <a:prstGeom prst="rect">
+            <a:avLst/>
+          </a:prstGeom>
+        </p:spPr>
+      </p:pic>
+      <p:sp>
+        <p:nvSpPr>
+          <p:cNvPr id="17439" name="TextBox 17438"/>
           <p:cNvSpPr txBox="1"/>
           <p:nvPr/>
         </p:nvSpPr>
         <p:spPr>
           <a:xfrm>
-            <a:off x="2743200" y="3547872"/>
-            <a:ext cx="1572768" cy="694944"/>
+            <a:off x="2615184" y="3886200"/>
+            <a:ext cx="1517904" cy="402336"/>
           </a:xfrm>
           <a:prstGeom prst="rect">
             <a:avLst/>
@@ -10424,7 +10650,7 @@
           <a:noFill/>
         </p:spPr>
         <p:txBody>
-          <a:bodyPr wrap="square" anchor="ctr" lIns="0" rIns="0" tIns="0" bIns="0">
+          <a:bodyPr wrap="square" anchor="t" lIns="0" rIns="0" tIns="0" bIns="0">
             <a:spAutoFit/>
           </a:bodyPr>
           <a:lstStyle/>
@@ -10434,7 +10660,7 @@
                 <a:spcPts val="0"/>
               </a:spcBef>
               <a:spcAft>
-                <a:spcPts val="200"/>
+                <a:spcPts val="250"/>
               </a:spcAft>
             </a:pPr>
             <a:r>
@@ -10489,14 +10715,14 @@
       </p:sp>
       <p:cxnSp>
         <p:nvCxnSpPr>
-          <p:cNvPr id="17434" name="Connector 17433"/>
+          <p:cNvPr id="17440" name="Connector 17439"/>
           <p:cNvCxnSpPr/>
           <p:nvPr/>
         </p:nvCxnSpPr>
         <p:spPr>
           <a:xfrm>
-            <a:off x="4407407" y="3895344"/>
-            <a:ext cx="219457" cy="0"/>
+            <a:off x="4215383" y="3886200"/>
+            <a:ext cx="228600" cy="0"/>
           </a:xfrm>
           <a:prstGeom prst="line">
             <a:avLst/>
@@ -10525,14 +10751,14 @@
       </p:cxnSp>
       <p:sp>
         <p:nvSpPr>
-          <p:cNvPr id="17435" name="Rounded Rectangle 17434"/>
+          <p:cNvPr id="17441" name="Rounded Rectangle 17440"/>
           <p:cNvSpPr/>
           <p:nvPr/>
         </p:nvSpPr>
         <p:spPr>
           <a:xfrm>
-            <a:off x="4645152" y="3474720"/>
-            <a:ext cx="1719072" cy="841248"/>
+            <a:off x="4462272" y="3383280"/>
+            <a:ext cx="1645920" cy="1005840"/>
           </a:xfrm>
           <a:prstGeom prst="roundRect">
             <a:avLst>
@@ -10571,16 +10797,40 @@
           </a:p>
         </p:txBody>
       </p:sp>
-      <p:sp>
-        <p:nvSpPr>
-          <p:cNvPr id="17436" name="TextBox 17435"/>
+      <p:pic>
+        <p:nvPicPr>
+          <p:cNvPr id="17442" name="Picture 17441" descr="receipt.png"/>
+          <p:cNvPicPr>
+            <a:picLocks noChangeAspect="1"/>
+          </p:cNvPicPr>
+          <p:nvPr/>
+        </p:nvPicPr>
+        <p:blipFill>
+          <a:blip r:embed="rId8"/>
+          <a:stretch>
+            <a:fillRect/>
+          </a:stretch>
+        </p:blipFill>
+        <p:spPr>
+          <a:xfrm>
+            <a:off x="5148072" y="3520440"/>
+            <a:ext cx="274320" cy="274320"/>
+          </a:xfrm>
+          <a:prstGeom prst="rect">
+            <a:avLst/>
+          </a:prstGeom>
+        </p:spPr>
+      </p:pic>
+      <p:sp>
+        <p:nvSpPr>
+          <p:cNvPr id="17443" name="TextBox 17442"/>
           <p:cNvSpPr txBox="1"/>
           <p:nvPr/>
         </p:nvSpPr>
         <p:spPr>
           <a:xfrm>
-            <a:off x="4718304" y="3547872"/>
-            <a:ext cx="1572768" cy="694944"/>
+            <a:off x="4526280" y="3886200"/>
+            <a:ext cx="1517904" cy="402336"/>
           </a:xfrm>
           <a:prstGeom prst="rect">
             <a:avLst/>
@@ -10588,7 +10838,7 @@
           <a:noFill/>
         </p:spPr>
         <p:txBody>
-          <a:bodyPr wrap="square" anchor="ctr" lIns="0" rIns="0" tIns="0" bIns="0">
+          <a:bodyPr wrap="square" anchor="t" lIns="0" rIns="0" tIns="0" bIns="0">
             <a:spAutoFit/>
           </a:bodyPr>
           <a:lstStyle/>
@@ -10598,7 +10848,7 @@
                 <a:spcPts val="0"/>
               </a:spcBef>
               <a:spcAft>
-                <a:spcPts val="200"/>
+                <a:spcPts val="250"/>
               </a:spcAft>
             </a:pPr>
             <a:r>
@@ -10653,14 +10903,14 @@
       </p:sp>
       <p:cxnSp>
         <p:nvCxnSpPr>
-          <p:cNvPr id="17437" name="Connector 17436"/>
+          <p:cNvPr id="17444" name="Connector 17443"/>
           <p:cNvCxnSpPr/>
           <p:nvPr/>
         </p:nvCxnSpPr>
         <p:spPr>
           <a:xfrm>
-            <a:off x="6382512" y="3895344"/>
-            <a:ext cx="219456" cy="0"/>
+            <a:off x="6126479" y="3886200"/>
+            <a:ext cx="228600" cy="0"/>
           </a:xfrm>
           <a:prstGeom prst="line">
             <a:avLst/>
@@ -10689,14 +10939,14 @@
       </p:cxnSp>
       <p:sp>
         <p:nvSpPr>
-          <p:cNvPr id="17438" name="Rounded Rectangle 17437"/>
+          <p:cNvPr id="17445" name="Rounded Rectangle 17444"/>
           <p:cNvSpPr/>
           <p:nvPr/>
         </p:nvSpPr>
         <p:spPr>
           <a:xfrm>
-            <a:off x="6620256" y="3474720"/>
-            <a:ext cx="1719072" cy="841248"/>
+            <a:off x="6373368" y="3383280"/>
+            <a:ext cx="1645920" cy="1005840"/>
           </a:xfrm>
           <a:prstGeom prst="roundRect">
             <a:avLst>
@@ -10735,16 +10985,40 @@
           </a:p>
         </p:txBody>
       </p:sp>
-      <p:sp>
-        <p:nvSpPr>
-          <p:cNvPr id="17439" name="TextBox 17438"/>
+      <p:pic>
+        <p:nvPicPr>
+          <p:cNvPr id="17446" name="Picture 17445" descr="ledger.png"/>
+          <p:cNvPicPr>
+            <a:picLocks noChangeAspect="1"/>
+          </p:cNvPicPr>
+          <p:nvPr/>
+        </p:nvPicPr>
+        <p:blipFill>
+          <a:blip r:embed="rId11"/>
+          <a:stretch>
+            <a:fillRect/>
+          </a:stretch>
+        </p:blipFill>
+        <p:spPr>
+          <a:xfrm>
+            <a:off x="7059168" y="3520440"/>
+            <a:ext cx="274320" cy="274320"/>
+          </a:xfrm>
+          <a:prstGeom prst="rect">
+            <a:avLst/>
+          </a:prstGeom>
+        </p:spPr>
+      </p:pic>
+      <p:sp>
+        <p:nvSpPr>
+          <p:cNvPr id="17447" name="TextBox 17446"/>
           <p:cNvSpPr txBox="1"/>
           <p:nvPr/>
         </p:nvSpPr>
         <p:spPr>
           <a:xfrm>
-            <a:off x="6693408" y="3547872"/>
-            <a:ext cx="1572768" cy="694944"/>
+            <a:off x="6437376" y="3886200"/>
+            <a:ext cx="1517904" cy="402336"/>
           </a:xfrm>
           <a:prstGeom prst="rect">
             <a:avLst/>
@@ -10752,7 +11026,7 @@
           <a:noFill/>
         </p:spPr>
         <p:txBody>
-          <a:bodyPr wrap="square" anchor="ctr" lIns="0" rIns="0" tIns="0" bIns="0">
+          <a:bodyPr wrap="square" anchor="t" lIns="0" rIns="0" tIns="0" bIns="0">
             <a:spAutoFit/>
           </a:bodyPr>
           <a:lstStyle/>
@@ -10762,7 +11036,7 @@
                 <a:spcPts val="0"/>
               </a:spcBef>
               <a:spcAft>
-                <a:spcPts val="200"/>
+                <a:spcPts val="250"/>
               </a:spcAft>
             </a:pPr>
             <a:r>
@@ -10815,52 +11089,16 @@
           </a:p>
         </p:txBody>
       </p:sp>
-      <p:cxnSp>
-        <p:nvCxnSpPr>
-          <p:cNvPr id="17440" name="Connector 17439"/>
-          <p:cNvCxnSpPr/>
-          <p:nvPr/>
-        </p:nvCxnSpPr>
-        <p:spPr>
-          <a:xfrm>
-            <a:off x="4325112" y="4352544"/>
-            <a:ext cx="0" cy="274320"/>
-          </a:xfrm>
-          <a:prstGeom prst="line">
-            <a:avLst/>
-          </a:prstGeom>
-          <a:ln w="28575">
-            <a:solidFill>
-              <a:srgbClr val="3D66AE"/>
-            </a:solidFill>
-            <a:tailEnd type="triangle" w="med" len="med"/>
-          </a:ln>
-        </p:spPr>
-        <p:style>
-          <a:lnRef idx="2">
-            <a:schemeClr val="accent1"/>
-          </a:lnRef>
-          <a:fillRef idx="0">
-            <a:schemeClr val="accent1"/>
-          </a:fillRef>
-          <a:effectRef idx="1">
-            <a:schemeClr val="accent1"/>
-          </a:effectRef>
-          <a:fontRef idx="minor">
-            <a:schemeClr val="tx1"/>
-          </a:fontRef>
-        </p:style>
-      </p:cxnSp>
-      <p:sp>
-        <p:nvSpPr>
-          <p:cNvPr id="17441" name="Hexagon 17440"/>
+      <p:sp>
+        <p:nvSpPr>
+          <p:cNvPr id="17448" name="Hexagon 17447"/>
           <p:cNvSpPr/>
           <p:nvPr/>
         </p:nvSpPr>
         <p:spPr>
           <a:xfrm rot="5400000">
-            <a:off x="566928" y="4581144"/>
-            <a:ext cx="237744" cy="209214"/>
+            <a:off x="640080" y="4507992"/>
+            <a:ext cx="256032" cy="225308"/>
           </a:xfrm>
           <a:prstGeom prst="hexagon">
             <a:avLst/>
@@ -10888,31 +11126,46 @@
           </a:fontRef>
         </p:style>
         <p:txBody>
-          <a:bodyPr rtlCol="0" anchor="ctr" lIns="0" rIns="0" tIns="0" bIns="0" rot="-5400000"/>
+          <a:bodyPr rtlCol="0" anchor="ctr"/>
           <a:lstStyle/>
           <a:p>
             <a:pPr algn="ctr"/>
-            <a:r>
-              <a:rPr sz="850" b="1">
-                <a:solidFill>
-                  <a:srgbClr val="FFFFFF"/>
-                </a:solidFill>
-                <a:latin typeface="Calibri"/>
-              </a:rPr>
-              <a:t>3</a:t>
-            </a:r>
-          </a:p>
-        </p:txBody>
-      </p:sp>
-      <p:sp>
-        <p:nvSpPr>
-          <p:cNvPr id="17442" name="TextBox 17441"/>
+          </a:p>
+        </p:txBody>
+      </p:sp>
+      <p:pic>
+        <p:nvPicPr>
+          <p:cNvPr id="17449" name="Picture 17448" descr="lookup.png"/>
+          <p:cNvPicPr>
+            <a:picLocks noChangeAspect="1"/>
+          </p:cNvPicPr>
+          <p:nvPr/>
+        </p:nvPicPr>
+        <p:blipFill>
+          <a:blip r:embed="rId12"/>
+          <a:stretch>
+            <a:fillRect/>
+          </a:stretch>
+        </p:blipFill>
+        <p:spPr>
+          <a:xfrm>
+            <a:off x="709208" y="4561758"/>
+            <a:ext cx="117774" cy="117774"/>
+          </a:xfrm>
+          <a:prstGeom prst="rect">
+            <a:avLst/>
+          </a:prstGeom>
+        </p:spPr>
+      </p:pic>
+      <p:sp>
+        <p:nvSpPr>
+          <p:cNvPr id="17450" name="TextBox 17449"/>
           <p:cNvSpPr txBox="1"/>
           <p:nvPr/>
         </p:nvSpPr>
         <p:spPr>
           <a:xfrm>
-            <a:off x="914400" y="4590288"/>
+            <a:off x="987552" y="4526280"/>
             <a:ext cx="4572000" cy="182880"/>
           </a:xfrm>
           <a:prstGeom prst="rect">
@@ -10935,7 +11188,7 @@
               </a:spcAft>
             </a:pPr>
             <a:r>
-              <a:rPr sz="760" b="1" i="0" spc="140">
+              <a:rPr sz="780" b="1" i="0" spc="140">
                 <a:solidFill>
                   <a:srgbClr val="1C9EB8"/>
                 </a:solidFill>
@@ -10948,14 +11201,14 @@
       </p:sp>
       <p:sp>
         <p:nvSpPr>
-          <p:cNvPr id="17443" name="Rounded Rectangle 17442"/>
+          <p:cNvPr id="17451" name="Rounded Rectangle 17450"/>
           <p:cNvSpPr/>
           <p:nvPr/>
         </p:nvSpPr>
         <p:spPr>
           <a:xfrm>
-            <a:off x="694944" y="4864608"/>
-            <a:ext cx="1719072" cy="841248"/>
+            <a:off x="640080" y="4809744"/>
+            <a:ext cx="1645920" cy="1005840"/>
           </a:xfrm>
           <a:prstGeom prst="roundRect">
             <a:avLst>
@@ -10994,16 +11247,40 @@
           </a:p>
         </p:txBody>
       </p:sp>
-      <p:sp>
-        <p:nvSpPr>
-          <p:cNvPr id="17444" name="TextBox 17443"/>
+      <p:pic>
+        <p:nvPicPr>
+          <p:cNvPr id="17452" name="Picture 17451" descr="leak.png"/>
+          <p:cNvPicPr>
+            <a:picLocks noChangeAspect="1"/>
+          </p:cNvPicPr>
+          <p:nvPr/>
+        </p:nvPicPr>
+        <p:blipFill>
+          <a:blip r:embed="rId13"/>
+          <a:stretch>
+            <a:fillRect/>
+          </a:stretch>
+        </p:blipFill>
+        <p:spPr>
+          <a:xfrm>
+            <a:off x="1325880" y="4946904"/>
+            <a:ext cx="274320" cy="274320"/>
+          </a:xfrm>
+          <a:prstGeom prst="rect">
+            <a:avLst/>
+          </a:prstGeom>
+        </p:spPr>
+      </p:pic>
+      <p:sp>
+        <p:nvSpPr>
+          <p:cNvPr id="17453" name="TextBox 17452"/>
           <p:cNvSpPr txBox="1"/>
           <p:nvPr/>
         </p:nvSpPr>
         <p:spPr>
           <a:xfrm>
-            <a:off x="768096" y="4937760"/>
-            <a:ext cx="1572768" cy="694944"/>
+            <a:off x="704088" y="5312664"/>
+            <a:ext cx="1517904" cy="402336"/>
           </a:xfrm>
           <a:prstGeom prst="rect">
             <a:avLst/>
@@ -11011,7 +11288,7 @@
           <a:noFill/>
         </p:spPr>
         <p:txBody>
-          <a:bodyPr wrap="square" anchor="ctr" lIns="0" rIns="0" tIns="0" bIns="0">
+          <a:bodyPr wrap="square" anchor="t" lIns="0" rIns="0" tIns="0" bIns="0">
             <a:spAutoFit/>
           </a:bodyPr>
           <a:lstStyle/>
@@ -11021,7 +11298,7 @@
                 <a:spcPts val="0"/>
               </a:spcBef>
               <a:spcAft>
-                <a:spcPts val="200"/>
+                <a:spcPts val="250"/>
               </a:spcAft>
             </a:pPr>
             <a:r>
@@ -11057,14 +11334,14 @@
       </p:sp>
       <p:cxnSp>
         <p:nvCxnSpPr>
-          <p:cNvPr id="17445" name="Connector 17444"/>
+          <p:cNvPr id="17454" name="Connector 17453"/>
           <p:cNvCxnSpPr/>
           <p:nvPr/>
         </p:nvCxnSpPr>
         <p:spPr>
           <a:xfrm>
-            <a:off x="2432303" y="5285232"/>
-            <a:ext cx="219457" cy="0"/>
+            <a:off x="2304288" y="5312664"/>
+            <a:ext cx="228600" cy="0"/>
           </a:xfrm>
           <a:prstGeom prst="line">
             <a:avLst/>
@@ -11093,14 +11370,14 @@
       </p:cxnSp>
       <p:sp>
         <p:nvSpPr>
-          <p:cNvPr id="17446" name="Rounded Rectangle 17445"/>
+          <p:cNvPr id="17455" name="Rounded Rectangle 17454"/>
           <p:cNvSpPr/>
           <p:nvPr/>
         </p:nvSpPr>
         <p:spPr>
           <a:xfrm>
-            <a:off x="2670048" y="4864608"/>
-            <a:ext cx="1719072" cy="841248"/>
+            <a:off x="2551176" y="4809744"/>
+            <a:ext cx="1645920" cy="1005840"/>
           </a:xfrm>
           <a:prstGeom prst="roundRect">
             <a:avLst>
@@ -11139,16 +11416,40 @@
           </a:p>
         </p:txBody>
       </p:sp>
-      <p:sp>
-        <p:nvSpPr>
-          <p:cNvPr id="17447" name="TextBox 17446"/>
+      <p:pic>
+        <p:nvPicPr>
+          <p:cNvPr id="17456" name="Picture 17455" descr="score.png"/>
+          <p:cNvPicPr>
+            <a:picLocks noChangeAspect="1"/>
+          </p:cNvPicPr>
+          <p:nvPr/>
+        </p:nvPicPr>
+        <p:blipFill>
+          <a:blip r:embed="rId14"/>
+          <a:stretch>
+            <a:fillRect/>
+          </a:stretch>
+        </p:blipFill>
+        <p:spPr>
+          <a:xfrm>
+            <a:off x="3236976" y="4946904"/>
+            <a:ext cx="274320" cy="274320"/>
+          </a:xfrm>
+          <a:prstGeom prst="rect">
+            <a:avLst/>
+          </a:prstGeom>
+        </p:spPr>
+      </p:pic>
+      <p:sp>
+        <p:nvSpPr>
+          <p:cNvPr id="17457" name="TextBox 17456"/>
           <p:cNvSpPr txBox="1"/>
           <p:nvPr/>
         </p:nvSpPr>
         <p:spPr>
           <a:xfrm>
-            <a:off x="2743200" y="4937760"/>
-            <a:ext cx="1572768" cy="694944"/>
+            <a:off x="2615184" y="5312664"/>
+            <a:ext cx="1517904" cy="402336"/>
           </a:xfrm>
           <a:prstGeom prst="rect">
             <a:avLst/>
@@ -11156,7 +11457,7 @@
           <a:noFill/>
         </p:spPr>
         <p:txBody>
-          <a:bodyPr wrap="square" anchor="ctr" lIns="0" rIns="0" tIns="0" bIns="0">
+          <a:bodyPr wrap="square" anchor="t" lIns="0" rIns="0" tIns="0" bIns="0">
             <a:spAutoFit/>
           </a:bodyPr>
           <a:lstStyle/>
@@ -11166,7 +11467,7 @@
                 <a:spcPts val="0"/>
               </a:spcBef>
               <a:spcAft>
-                <a:spcPts val="200"/>
+                <a:spcPts val="250"/>
               </a:spcAft>
             </a:pPr>
             <a:r>
@@ -11221,14 +11522,14 @@
       </p:sp>
       <p:cxnSp>
         <p:nvCxnSpPr>
-          <p:cNvPr id="17448" name="Connector 17447"/>
+          <p:cNvPr id="17458" name="Connector 17457"/>
           <p:cNvCxnSpPr/>
           <p:nvPr/>
         </p:nvCxnSpPr>
         <p:spPr>
           <a:xfrm>
-            <a:off x="4407407" y="5285232"/>
-            <a:ext cx="219457" cy="0"/>
+            <a:off x="4215383" y="5312664"/>
+            <a:ext cx="228600" cy="0"/>
           </a:xfrm>
           <a:prstGeom prst="line">
             <a:avLst/>
@@ -11257,14 +11558,14 @@
       </p:cxnSp>
       <p:sp>
         <p:nvSpPr>
-          <p:cNvPr id="17449" name="Rounded Rectangle 17448"/>
+          <p:cNvPr id="17459" name="Rounded Rectangle 17458"/>
           <p:cNvSpPr/>
           <p:nvPr/>
         </p:nvSpPr>
         <p:spPr>
           <a:xfrm>
-            <a:off x="4645152" y="4864608"/>
-            <a:ext cx="1719072" cy="841248"/>
+            <a:off x="4462272" y="4809744"/>
+            <a:ext cx="1645920" cy="1005840"/>
           </a:xfrm>
           <a:prstGeom prst="roundRect">
             <a:avLst>
@@ -11303,16 +11604,40 @@
           </a:p>
         </p:txBody>
       </p:sp>
-      <p:sp>
-        <p:nvSpPr>
-          <p:cNvPr id="17450" name="TextBox 17449"/>
+      <p:pic>
+        <p:nvPicPr>
+          <p:cNvPr id="17460" name="Picture 17459" descr="lookup.png"/>
+          <p:cNvPicPr>
+            <a:picLocks noChangeAspect="1"/>
+          </p:cNvPicPr>
+          <p:nvPr/>
+        </p:nvPicPr>
+        <p:blipFill>
+          <a:blip r:embed="rId12"/>
+          <a:stretch>
+            <a:fillRect/>
+          </a:stretch>
+        </p:blipFill>
+        <p:spPr>
+          <a:xfrm>
+            <a:off x="5148072" y="4946904"/>
+            <a:ext cx="274320" cy="274320"/>
+          </a:xfrm>
+          <a:prstGeom prst="rect">
+            <a:avLst/>
+          </a:prstGeom>
+        </p:spPr>
+      </p:pic>
+      <p:sp>
+        <p:nvSpPr>
+          <p:cNvPr id="17461" name="TextBox 17460"/>
           <p:cNvSpPr txBox="1"/>
           <p:nvPr/>
         </p:nvSpPr>
         <p:spPr>
           <a:xfrm>
-            <a:off x="4718304" y="4937760"/>
-            <a:ext cx="1572768" cy="694944"/>
+            <a:off x="4526280" y="5312664"/>
+            <a:ext cx="1517904" cy="402336"/>
           </a:xfrm>
           <a:prstGeom prst="rect">
             <a:avLst/>
@@ -11320,7 +11645,7 @@
           <a:noFill/>
         </p:spPr>
         <p:txBody>
-          <a:bodyPr wrap="square" anchor="ctr" lIns="0" rIns="0" tIns="0" bIns="0">
+          <a:bodyPr wrap="square" anchor="t" lIns="0" rIns="0" tIns="0" bIns="0">
             <a:spAutoFit/>
           </a:bodyPr>
           <a:lstStyle/>
@@ -11330,7 +11655,7 @@
                 <a:spcPts val="0"/>
               </a:spcBef>
               <a:spcAft>
-                <a:spcPts val="200"/>
+                <a:spcPts val="250"/>
               </a:spcAft>
             </a:pPr>
             <a:r>
@@ -11385,14 +11710,14 @@
       </p:sp>
       <p:cxnSp>
         <p:nvCxnSpPr>
-          <p:cNvPr id="17451" name="Connector 17450"/>
+          <p:cNvPr id="17462" name="Connector 17461"/>
           <p:cNvCxnSpPr/>
           <p:nvPr/>
         </p:nvCxnSpPr>
         <p:spPr>
           <a:xfrm>
-            <a:off x="6382512" y="5285232"/>
-            <a:ext cx="219456" cy="0"/>
+            <a:off x="6126479" y="5312664"/>
+            <a:ext cx="228600" cy="0"/>
           </a:xfrm>
           <a:prstGeom prst="line">
             <a:avLst/>
@@ -11421,14 +11746,14 @@
       </p:cxnSp>
       <p:sp>
         <p:nvSpPr>
-          <p:cNvPr id="17452" name="Rounded Rectangle 17451"/>
+          <p:cNvPr id="17463" name="Rounded Rectangle 17462"/>
           <p:cNvSpPr/>
           <p:nvPr/>
         </p:nvSpPr>
         <p:spPr>
           <a:xfrm>
-            <a:off x="6620256" y="4864608"/>
-            <a:ext cx="1719072" cy="841248"/>
+            <a:off x="6373368" y="4809744"/>
+            <a:ext cx="1645920" cy="1005840"/>
           </a:xfrm>
           <a:prstGeom prst="roundRect">
             <a:avLst>
@@ -11467,96 +11792,40 @@
           </a:p>
         </p:txBody>
       </p:sp>
-      <p:sp>
-        <p:nvSpPr>
-          <p:cNvPr id="17453" name="TextBox 17452"/>
+      <p:pic>
+        <p:nvPicPr>
+          <p:cNvPr id="17464" name="Picture 17463" descr="verdict.png"/>
+          <p:cNvPicPr>
+            <a:picLocks noChangeAspect="1"/>
+          </p:cNvPicPr>
+          <p:nvPr/>
+        </p:nvPicPr>
+        <p:blipFill>
+          <a:blip r:embed="rId15"/>
+          <a:stretch>
+            <a:fillRect/>
+          </a:stretch>
+        </p:blipFill>
+        <p:spPr>
+          <a:xfrm>
+            <a:off x="7059168" y="4946904"/>
+            <a:ext cx="274320" cy="274320"/>
+          </a:xfrm>
+          <a:prstGeom prst="rect">
+            <a:avLst/>
+          </a:prstGeom>
+        </p:spPr>
+      </p:pic>
+      <p:sp>
+        <p:nvSpPr>
+          <p:cNvPr id="17465" name="TextBox 17464"/>
           <p:cNvSpPr txBox="1"/>
           <p:nvPr/>
         </p:nvSpPr>
         <p:spPr>
           <a:xfrm>
-            <a:off x="6693408" y="4937760"/>
-            <a:ext cx="1572768" cy="694944"/>
-          </a:xfrm>
-          <a:prstGeom prst="rect">
-            <a:avLst/>
-          </a:prstGeom>
-          <a:noFill/>
-        </p:spPr>
-        <p:txBody>
-          <a:bodyPr wrap="square" anchor="ctr" lIns="0" rIns="0" tIns="0" bIns="0">
-            <a:spAutoFit/>
-          </a:bodyPr>
-          <a:lstStyle/>
-          <a:p>
-            <a:pPr algn="ctr">
-              <a:spcBef>
-                <a:spcPts val="0"/>
-              </a:spcBef>
-              <a:spcAft>
-                <a:spcPts val="200"/>
-              </a:spcAft>
-            </a:pPr>
-            <a:r>
-              <a:rPr sz="880" b="1" i="0">
-                <a:solidFill>
-                  <a:srgbClr val="FFFFFF"/>
-                </a:solidFill>
-                <a:latin typeface="Calibri"/>
-              </a:rPr>
-              <a:t>Verifiable verdict</a:t>
-            </a:r>
-          </a:p>
-          <a:p>
-            <a:pPr algn="ctr">
-              <a:spcBef>
-                <a:spcPts val="0"/>
-              </a:spcBef>
-              <a:spcAft>
-                <a:spcPts val="50"/>
-              </a:spcAft>
-            </a:pPr>
-            <a:r>
-              <a:rPr sz="700" b="0" i="0">
-                <a:solidFill>
-                  <a:srgbClr val="FFE1C2"/>
-                </a:solidFill>
-                <a:latin typeface="Calibri"/>
-              </a:rPr>
-              <a:t>recipient + session</a:t>
-            </a:r>
-          </a:p>
-          <a:p>
-            <a:pPr algn="ctr">
-              <a:spcBef>
-                <a:spcPts val="0"/>
-              </a:spcBef>
-              <a:spcAft>
-                <a:spcPts val="50"/>
-              </a:spcAft>
-            </a:pPr>
-            <a:r>
-              <a:rPr sz="700" b="0" i="0">
-                <a:solidFill>
-                  <a:srgbClr val="FFE1C2"/>
-                </a:solidFill>
-                <a:latin typeface="Calibri"/>
-              </a:rPr>
-              <a:t>+ provable error bound</a:t>
-            </a:r>
-          </a:p>
-        </p:txBody>
-      </p:sp>
-      <p:sp>
-        <p:nvSpPr>
-          <p:cNvPr id="17454" name="TextBox 17453"/>
-          <p:cNvSpPr txBox="1"/>
-          <p:nvPr/>
-        </p:nvSpPr>
-        <p:spPr>
-          <a:xfrm>
-            <a:off x="566928" y="5852160"/>
-            <a:ext cx="7516368" cy="201168"/>
+            <a:off x="6437376" y="5312664"/>
+            <a:ext cx="1517904" cy="402336"/>
           </a:xfrm>
           <a:prstGeom prst="rect">
             <a:avLst/>
@@ -11569,6 +11838,110 @@
           </a:bodyPr>
           <a:lstStyle/>
           <a:p>
+            <a:pPr algn="ctr">
+              <a:spcBef>
+                <a:spcPts val="0"/>
+              </a:spcBef>
+              <a:spcAft>
+                <a:spcPts val="250"/>
+              </a:spcAft>
+            </a:pPr>
+            <a:r>
+              <a:rPr sz="880" b="1" i="0">
+                <a:solidFill>
+                  <a:srgbClr val="FFFFFF"/>
+                </a:solidFill>
+                <a:latin typeface="Calibri"/>
+              </a:rPr>
+              <a:t>Verifiable verdict</a:t>
+            </a:r>
+          </a:p>
+          <a:p>
+            <a:pPr algn="ctr">
+              <a:spcBef>
+                <a:spcPts val="0"/>
+              </a:spcBef>
+              <a:spcAft>
+                <a:spcPts val="50"/>
+              </a:spcAft>
+            </a:pPr>
+            <a:r>
+              <a:rPr sz="700" b="0" i="0">
+                <a:solidFill>
+                  <a:srgbClr val="FFE1C2"/>
+                </a:solidFill>
+                <a:latin typeface="Calibri"/>
+              </a:rPr>
+              <a:t>recipient + session</a:t>
+            </a:r>
+          </a:p>
+          <a:p>
+            <a:pPr algn="ctr">
+              <a:spcBef>
+                <a:spcPts val="0"/>
+              </a:spcBef>
+              <a:spcAft>
+                <a:spcPts val="50"/>
+              </a:spcAft>
+            </a:pPr>
+            <a:r>
+              <a:rPr sz="700" b="0" i="0">
+                <a:solidFill>
+                  <a:srgbClr val="FFE1C2"/>
+                </a:solidFill>
+                <a:latin typeface="Calibri"/>
+              </a:rPr>
+              <a:t>+ provable error bound</a:t>
+            </a:r>
+          </a:p>
+        </p:txBody>
+      </p:sp>
+      <p:pic>
+        <p:nvPicPr>
+          <p:cNvPr id="17466" name="Picture 17465" descr="offline.png"/>
+          <p:cNvPicPr>
+            <a:picLocks noChangeAspect="1"/>
+          </p:cNvPicPr>
+          <p:nvPr/>
+        </p:nvPicPr>
+        <p:blipFill>
+          <a:blip r:embed="rId16"/>
+          <a:stretch>
+            <a:fillRect/>
+          </a:stretch>
+        </p:blipFill>
+        <p:spPr>
+          <a:xfrm>
+            <a:off x="640080" y="5952744"/>
+            <a:ext cx="182880" cy="182880"/>
+          </a:xfrm>
+          <a:prstGeom prst="rect">
+            <a:avLst/>
+          </a:prstGeom>
+        </p:spPr>
+      </p:pic>
+      <p:sp>
+        <p:nvSpPr>
+          <p:cNvPr id="17467" name="TextBox 17466"/>
+          <p:cNvSpPr txBox="1"/>
+          <p:nvPr/>
+        </p:nvSpPr>
+        <p:spPr>
+          <a:xfrm>
+            <a:off x="896112" y="5952744"/>
+            <a:ext cx="7095744" cy="201168"/>
+          </a:xfrm>
+          <a:prstGeom prst="rect">
+            <a:avLst/>
+          </a:prstGeom>
+          <a:noFill/>
+        </p:spPr>
+        <p:txBody>
+          <a:bodyPr wrap="square" anchor="t" lIns="0" rIns="0" tIns="0" bIns="0">
+            <a:spAutoFit/>
+          </a:bodyPr>
+          <a:lstStyle/>
+          <a:p>
             <a:pPr algn="l">
               <a:spcBef>
                 <a:spcPts val="0"/>
@@ -11600,7 +11973,7 @@
       </p:sp>
       <p:sp>
         <p:nvSpPr>
-          <p:cNvPr id="17455" name="Hexagon 17454"/>
+          <p:cNvPr id="17468" name="Hexagon 17467"/>
           <p:cNvSpPr/>
           <p:nvPr/>
         </p:nvSpPr>
@@ -11646,14 +12019,14 @@
                 </a:solidFill>
                 <a:latin typeface="Calibri"/>
               </a:rPr>
-              <a:t>T</a:t>
-            </a:r>
-          </a:p>
-        </p:txBody>
-      </p:sp>
-      <p:sp>
-        <p:nvSpPr>
-          <p:cNvPr id="17456" name="TextBox 17455"/>
+              <a:t>1</a:t>
+            </a:r>
+          </a:p>
+        </p:txBody>
+      </p:sp>
+      <p:sp>
+        <p:nvSpPr>
+          <p:cNvPr id="17469" name="TextBox 17468"/>
           <p:cNvSpPr txBox="1"/>
           <p:nvPr/>
         </p:nvSpPr>
@@ -11693,24 +12066,72 @@
           </a:p>
         </p:txBody>
       </p:sp>
+      <p:sp>
+        <p:nvSpPr>
+          <p:cNvPr id="17470" name="Rounded Rectangle 17469"/>
+          <p:cNvSpPr/>
+          <p:nvPr/>
+        </p:nvSpPr>
+        <p:spPr>
+          <a:xfrm>
+            <a:off x="8522208" y="1572768"/>
+            <a:ext cx="3300984" cy="2999232"/>
+          </a:xfrm>
+          <a:prstGeom prst="roundRect">
+            <a:avLst>
+              <a:gd name="adj" fmla="val 6000"/>
+            </a:avLst>
+          </a:prstGeom>
+          <a:solidFill>
+            <a:srgbClr val="F3F6FC"/>
+          </a:solidFill>
+          <a:ln w="15875">
+            <a:solidFill>
+              <a:srgbClr val="B6C8E4"/>
+            </a:solidFill>
+          </a:ln>
+          <a:effectLst/>
+        </p:spPr>
+        <p:style>
+          <a:lnRef idx="1">
+            <a:schemeClr val="accent1"/>
+          </a:lnRef>
+          <a:fillRef idx="3">
+            <a:schemeClr val="accent1"/>
+          </a:fillRef>
+          <a:effectRef idx="2">
+            <a:schemeClr val="accent1"/>
+          </a:effectRef>
+          <a:fontRef idx="minor">
+            <a:schemeClr val="lt1"/>
+          </a:fontRef>
+        </p:style>
+        <p:txBody>
+          <a:bodyPr rtlCol="0" anchor="ctr"/>
+          <a:lstStyle/>
+          <a:p>
+            <a:pPr algn="ctr"/>
+          </a:p>
+        </p:txBody>
+      </p:sp>
       <p:pic>
         <p:nvPicPr>
-          <p:cNvPr id="17457" name="Picture 17456" descr="python.png"/>
+          <p:cNvPr id="17471" name="Picture 17470" descr="python.png"/>
           <p:cNvPicPr>
             <a:picLocks noChangeAspect="1"/>
           </p:cNvPicPr>
           <p:nvPr/>
         </p:nvPicPr>
         <p:blipFill>
-          <a:blip r:embed="rId4"/>
+          <a:blip r:embed="rId17"/>
           <a:stretch>
             <a:fillRect/>
           </a:stretch>
         </p:blipFill>
         <p:spPr>
           <a:xfrm>
-            <a:off x="8613648" y="1609344"/>
-            <a:ext cx="365760" cy="365760"/>
+            <a:off x="8759952" y="1700784"/>
+            <a:ext cx="347472" cy="347472"/>
           </a:xfrm>
           <a:prstGeom prst="rect">
             <a:avLst/>
@@ -11719,14 +12140,14 @@
       </p:pic>
       <p:sp>
         <p:nvSpPr>
-          <p:cNvPr id="17458" name="TextBox 17457"/>
+          <p:cNvPr id="17472" name="TextBox 17471"/>
           <p:cNvSpPr txBox="1"/>
           <p:nvPr/>
         </p:nvSpPr>
         <p:spPr>
           <a:xfrm>
-            <a:off x="8476488" y="2020824"/>
-            <a:ext cx="640080" cy="164592"/>
+            <a:off x="8622792" y="2093975"/>
+            <a:ext cx="621792" cy="164592"/>
           </a:xfrm>
           <a:prstGeom prst="rect">
             <a:avLst/>
@@ -11761,22 +12182,22 @@
       </p:sp>
       <p:pic>
         <p:nvPicPr>
-          <p:cNvPr id="17459" name="Picture 17458" descr="fastapi.png"/>
+          <p:cNvPr id="17473" name="Picture 17472" descr="fastapi.png"/>
           <p:cNvPicPr>
             <a:picLocks noChangeAspect="1"/>
           </p:cNvPicPr>
           <p:nvPr/>
         </p:nvPicPr>
         <p:blipFill>
-          <a:blip r:embed="rId5"/>
+          <a:blip r:embed="rId18"/>
           <a:stretch>
             <a:fillRect/>
           </a:stretch>
         </p:blipFill>
         <p:spPr>
           <a:xfrm>
-            <a:off x="9244584" y="1609344"/>
-            <a:ext cx="365760" cy="365760"/>
+            <a:off x="9381744" y="1700784"/>
+            <a:ext cx="347472" cy="347472"/>
           </a:xfrm>
           <a:prstGeom prst="rect">
             <a:avLst/>
@@ -11785,14 +12206,14 @@
       </p:pic>
       <p:sp>
         <p:nvSpPr>
-          <p:cNvPr id="17460" name="TextBox 17459"/>
+          <p:cNvPr id="17474" name="TextBox 17473"/>
           <p:cNvSpPr txBox="1"/>
           <p:nvPr/>
         </p:nvSpPr>
         <p:spPr>
           <a:xfrm>
-            <a:off x="9107424" y="2020824"/>
-            <a:ext cx="640080" cy="164592"/>
+            <a:off x="9244584" y="2093975"/>
+            <a:ext cx="621792" cy="164592"/>
           </a:xfrm>
           <a:prstGeom prst="rect">
             <a:avLst/>
@@ -11827,22 +12248,22 @@
       </p:sp>
       <p:pic>
         <p:nvPicPr>
-          <p:cNvPr id="17461" name="Picture 17460" descr="numpy.png"/>
+          <p:cNvPr id="17475" name="Picture 17474" descr="numpy.png"/>
           <p:cNvPicPr>
             <a:picLocks noChangeAspect="1"/>
           </p:cNvPicPr>
           <p:nvPr/>
         </p:nvPicPr>
         <p:blipFill>
-          <a:blip r:embed="rId6"/>
+          <a:blip r:embed="rId19"/>
           <a:stretch>
             <a:fillRect/>
           </a:stretch>
         </p:blipFill>
         <p:spPr>
           <a:xfrm>
-            <a:off x="9875519" y="1609344"/>
-            <a:ext cx="365760" cy="365760"/>
+            <a:off x="10003536" y="1700784"/>
+            <a:ext cx="347472" cy="347472"/>
           </a:xfrm>
           <a:prstGeom prst="rect">
             <a:avLst/>
@@ -11851,14 +12272,14 @@
       </p:pic>
       <p:sp>
         <p:nvSpPr>
-          <p:cNvPr id="17462" name="TextBox 17461"/>
+          <p:cNvPr id="17476" name="TextBox 17475"/>
           <p:cNvSpPr txBox="1"/>
           <p:nvPr/>
         </p:nvSpPr>
         <p:spPr>
           <a:xfrm>
-            <a:off x="9738359" y="2020824"/>
-            <a:ext cx="640080" cy="164592"/>
+            <a:off x="9866376" y="2093975"/>
+            <a:ext cx="621792" cy="164592"/>
           </a:xfrm>
           <a:prstGeom prst="rect">
             <a:avLst/>
@@ -11893,22 +12314,22 @@
       </p:sp>
       <p:pic>
         <p:nvPicPr>
-          <p:cNvPr id="17463" name="Picture 17462" descr="docker.png"/>
+          <p:cNvPr id="17477" name="Picture 17476" descr="docker.png"/>
           <p:cNvPicPr>
             <a:picLocks noChangeAspect="1"/>
           </p:cNvPicPr>
           <p:nvPr/>
         </p:nvPicPr>
         <p:blipFill>
-          <a:blip r:embed="rId7"/>
+          <a:blip r:embed="rId20"/>
           <a:stretch>
             <a:fillRect/>
           </a:stretch>
         </p:blipFill>
         <p:spPr>
           <a:xfrm>
-            <a:off x="10506455" y="1609344"/>
-            <a:ext cx="365760" cy="365760"/>
+            <a:off x="10625328" y="1700784"/>
+            <a:ext cx="347472" cy="347472"/>
           </a:xfrm>
           <a:prstGeom prst="rect">
             <a:avLst/>
@@ -11917,14 +12338,14 @@
       </p:pic>
       <p:sp>
         <p:nvSpPr>
-          <p:cNvPr id="17464" name="TextBox 17463"/>
+          <p:cNvPr id="17478" name="TextBox 17477"/>
           <p:cNvSpPr txBox="1"/>
           <p:nvPr/>
         </p:nvSpPr>
         <p:spPr>
           <a:xfrm>
-            <a:off x="10369295" y="2020824"/>
-            <a:ext cx="640080" cy="164592"/>
+            <a:off x="10488167" y="2093975"/>
+            <a:ext cx="621792" cy="164592"/>
           </a:xfrm>
           <a:prstGeom prst="rect">
             <a:avLst/>
@@ -11959,22 +12380,22 @@
       </p:sp>
       <p:pic>
         <p:nvPicPr>
-          <p:cNvPr id="17465" name="Picture 17464" descr="linux.png"/>
+          <p:cNvPr id="17479" name="Picture 17478" descr="linux.png"/>
           <p:cNvPicPr>
             <a:picLocks noChangeAspect="1"/>
           </p:cNvPicPr>
           <p:nvPr/>
         </p:nvPicPr>
         <p:blipFill>
-          <a:blip r:embed="rId8"/>
+          <a:blip r:embed="rId21"/>
           <a:stretch>
             <a:fillRect/>
           </a:stretch>
         </p:blipFill>
         <p:spPr>
           <a:xfrm>
-            <a:off x="11137391" y="1609344"/>
-            <a:ext cx="365760" cy="365760"/>
+            <a:off x="11247119" y="1700784"/>
+            <a:ext cx="347472" cy="347472"/>
           </a:xfrm>
           <a:prstGeom prst="rect">
             <a:avLst/>
@@ -11983,14 +12404,14 @@
       </p:pic>
       <p:sp>
         <p:nvSpPr>
-          <p:cNvPr id="17466" name="TextBox 17465"/>
+          <p:cNvPr id="17480" name="TextBox 17479"/>
           <p:cNvSpPr txBox="1"/>
           <p:nvPr/>
         </p:nvSpPr>
         <p:spPr>
           <a:xfrm>
-            <a:off x="11000231" y="2020824"/>
-            <a:ext cx="640080" cy="164592"/>
+            <a:off x="11109959" y="2093975"/>
+            <a:ext cx="621792" cy="164592"/>
           </a:xfrm>
           <a:prstGeom prst="rect">
             <a:avLst/>
@@ -12025,22 +12446,22 @@
       </p:sp>
       <p:pic>
         <p:nvPicPr>
-          <p:cNvPr id="17467" name="Picture 17466" descr="pytest.png"/>
+          <p:cNvPr id="17481" name="Picture 17480" descr="pytest.png"/>
           <p:cNvPicPr>
             <a:picLocks noChangeAspect="1"/>
           </p:cNvPicPr>
           <p:nvPr/>
         </p:nvPicPr>
         <p:blipFill>
-          <a:blip r:embed="rId9"/>
+          <a:blip r:embed="rId22"/>
           <a:stretch>
             <a:fillRect/>
           </a:stretch>
         </p:blipFill>
         <p:spPr>
           <a:xfrm>
-            <a:off x="8613648" y="2212848"/>
-            <a:ext cx="365760" cy="365760"/>
+            <a:off x="8759952" y="2340864"/>
+            <a:ext cx="347472" cy="347472"/>
           </a:xfrm>
           <a:prstGeom prst="rect">
             <a:avLst/>
@@ -12049,14 +12470,14 @@
       </p:pic>
       <p:sp>
         <p:nvSpPr>
-          <p:cNvPr id="17468" name="TextBox 17467"/>
+          <p:cNvPr id="17482" name="TextBox 17481"/>
           <p:cNvSpPr txBox="1"/>
           <p:nvPr/>
         </p:nvSpPr>
         <p:spPr>
           <a:xfrm>
-            <a:off x="8476488" y="2624327"/>
-            <a:ext cx="640080" cy="164592"/>
+            <a:off x="8622792" y="2734056"/>
+            <a:ext cx="621792" cy="164592"/>
           </a:xfrm>
           <a:prstGeom prst="rect">
             <a:avLst/>
@@ -12091,22 +12512,22 @@
       </p:sp>
       <p:pic>
         <p:nvPicPr>
-          <p:cNvPr id="17469" name="Picture 17468" descr="github.png"/>
+          <p:cNvPr id="17483" name="Picture 17482" descr="github.png"/>
           <p:cNvPicPr>
             <a:picLocks noChangeAspect="1"/>
           </p:cNvPicPr>
           <p:nvPr/>
         </p:nvPicPr>
         <p:blipFill>
-          <a:blip r:embed="rId10"/>
+          <a:blip r:embed="rId23"/>
           <a:stretch>
             <a:fillRect/>
           </a:stretch>
         </p:blipFill>
         <p:spPr>
           <a:xfrm>
-            <a:off x="9244584" y="2212848"/>
-            <a:ext cx="365760" cy="365760"/>
+            <a:off x="9381744" y="2340864"/>
+            <a:ext cx="347472" cy="347472"/>
           </a:xfrm>
           <a:prstGeom prst="rect">
             <a:avLst/>
@@ -12115,14 +12536,14 @@
       </p:pic>
       <p:sp>
         <p:nvSpPr>
-          <p:cNvPr id="17470" name="TextBox 17469"/>
+          <p:cNvPr id="17484" name="TextBox 17483"/>
           <p:cNvSpPr txBox="1"/>
           <p:nvPr/>
         </p:nvSpPr>
         <p:spPr>
           <a:xfrm>
-            <a:off x="9107424" y="2624327"/>
-            <a:ext cx="640080" cy="164592"/>
+            <a:off x="9244584" y="2734056"/>
+            <a:ext cx="621792" cy="164592"/>
           </a:xfrm>
           <a:prstGeom prst="rect">
             <a:avLst/>
@@ -12157,22 +12578,22 @@
       </p:sp>
       <p:pic>
         <p:nvPicPr>
-          <p:cNvPr id="17471" name="Picture 17470" descr="render.png"/>
+          <p:cNvPr id="17485" name="Picture 17484" descr="render.png"/>
           <p:cNvPicPr>
             <a:picLocks noChangeAspect="1"/>
           </p:cNvPicPr>
           <p:nvPr/>
         </p:nvPicPr>
         <p:blipFill>
-          <a:blip r:embed="rId11"/>
+          <a:blip r:embed="rId24"/>
           <a:stretch>
             <a:fillRect/>
           </a:stretch>
         </p:blipFill>
         <p:spPr>
           <a:xfrm>
-            <a:off x="9875519" y="2212848"/>
-            <a:ext cx="365760" cy="365760"/>
+            <a:off x="10003536" y="2340864"/>
+            <a:ext cx="347472" cy="347472"/>
           </a:xfrm>
           <a:prstGeom prst="rect">
             <a:avLst/>
@@ -12181,14 +12602,14 @@
       </p:pic>
       <p:sp>
         <p:nvSpPr>
-          <p:cNvPr id="17472" name="TextBox 17471"/>
+          <p:cNvPr id="17486" name="TextBox 17485"/>
           <p:cNvSpPr txBox="1"/>
           <p:nvPr/>
         </p:nvSpPr>
         <p:spPr>
           <a:xfrm>
-            <a:off x="9738359" y="2624327"/>
-            <a:ext cx="640080" cy="164592"/>
+            <a:off x="9866376" y="2734056"/>
+            <a:ext cx="621792" cy="164592"/>
           </a:xfrm>
           <a:prstGeom prst="rect">
             <a:avLst/>
@@ -12223,22 +12644,22 @@
       </p:sp>
       <p:pic>
         <p:nvPicPr>
-          <p:cNvPr id="17473" name="Picture 17472" descr="huggingface.png"/>
+          <p:cNvPr id="17487" name="Picture 17486" descr="huggingface.png"/>
           <p:cNvPicPr>
             <a:picLocks noChangeAspect="1"/>
           </p:cNvPicPr>
           <p:nvPr/>
         </p:nvPicPr>
         <p:blipFill>
-          <a:blip r:embed="rId12"/>
+          <a:blip r:embed="rId25"/>
           <a:stretch>
             <a:fillRect/>
           </a:stretch>
         </p:blipFill>
         <p:spPr>
           <a:xfrm>
-            <a:off x="10506455" y="2212848"/>
-            <a:ext cx="365760" cy="365760"/>
+            <a:off x="10625328" y="2340864"/>
+            <a:ext cx="347472" cy="347472"/>
           </a:xfrm>
           <a:prstGeom prst="rect">
             <a:avLst/>
@@ -12247,14 +12668,14 @@
       </p:pic>
       <p:sp>
         <p:nvSpPr>
-          <p:cNvPr id="17474" name="TextBox 17473"/>
+          <p:cNvPr id="17488" name="TextBox 17487"/>
           <p:cNvSpPr txBox="1"/>
           <p:nvPr/>
         </p:nvSpPr>
         <p:spPr>
           <a:xfrm>
-            <a:off x="10369295" y="2624327"/>
-            <a:ext cx="640080" cy="164592"/>
+            <a:off x="10488167" y="2734056"/>
+            <a:ext cx="621792" cy="164592"/>
           </a:xfrm>
           <a:prstGeom prst="rect">
             <a:avLst/>
@@ -12289,22 +12710,22 @@
       </p:sp>
       <p:pic>
         <p:nvPicPr>
-          <p:cNvPr id="17475" name="Picture 17474" descr="bash.png"/>
+          <p:cNvPr id="17489" name="Picture 17488" descr="bash.png"/>
           <p:cNvPicPr>
             <a:picLocks noChangeAspect="1"/>
           </p:cNvPicPr>
           <p:nvPr/>
         </p:nvPicPr>
         <p:blipFill>
-          <a:blip r:embed="rId13"/>
+          <a:blip r:embed="rId26"/>
           <a:stretch>
             <a:fillRect/>
           </a:stretch>
         </p:blipFill>
         <p:spPr>
           <a:xfrm>
-            <a:off x="11137391" y="2212848"/>
-            <a:ext cx="365760" cy="365760"/>
+            <a:off x="11247119" y="2340864"/>
+            <a:ext cx="347472" cy="347472"/>
           </a:xfrm>
           <a:prstGeom prst="rect">
             <a:avLst/>
@@ -12313,14 +12734,14 @@
       </p:pic>
       <p:sp>
         <p:nvSpPr>
-          <p:cNvPr id="17476" name="TextBox 17475"/>
+          <p:cNvPr id="17490" name="TextBox 17489"/>
           <p:cNvSpPr txBox="1"/>
           <p:nvPr/>
         </p:nvSpPr>
         <p:spPr>
           <a:xfrm>
-            <a:off x="11000231" y="2624327"/>
-            <a:ext cx="640080" cy="164592"/>
+            <a:off x="11109959" y="2734056"/>
+            <a:ext cx="621792" cy="164592"/>
           </a:xfrm>
           <a:prstGeom prst="rect">
             <a:avLst/>
@@ -12355,14 +12776,14 @@
       </p:sp>
       <p:sp>
         <p:nvSpPr>
-          <p:cNvPr id="17477" name="TextBox 17476"/>
+          <p:cNvPr id="17491" name="TextBox 17490"/>
           <p:cNvSpPr txBox="1"/>
           <p:nvPr/>
         </p:nvSpPr>
         <p:spPr>
           <a:xfrm>
-            <a:off x="8522208" y="2871216"/>
-            <a:ext cx="3300984" cy="1371600"/>
+            <a:off x="8686800" y="3054096"/>
+            <a:ext cx="2971800" cy="1316736"/>
           </a:xfrm>
           <a:prstGeom prst="rect">
             <a:avLst/>
@@ -12380,11 +12801,11 @@
                 <a:spcPts val="0"/>
               </a:spcBef>
               <a:spcAft>
-                <a:spcPts val="250"/>
-              </a:spcAft>
-            </a:pPr>
-            <a:r>
-              <a:rPr sz="819" b="1">
+                <a:spcPts val="360"/>
+              </a:spcAft>
+            </a:pPr>
+            <a:r>
+              <a:rPr sz="860" b="1">
                 <a:solidFill>
                   <a:srgbClr val="1B335E"/>
                 </a:solidFill>
@@ -12393,7 +12814,7 @@
               <a:t>Key exchange   </a:t>
             </a:r>
             <a:r>
-              <a:rPr sz="819" b="0">
+              <a:rPr sz="860" b="0">
                 <a:solidFill>
                   <a:srgbClr val="161D2B"/>
                 </a:solidFill>
@@ -12408,11 +12829,11 @@
                 <a:spcPts val="0"/>
               </a:spcBef>
               <a:spcAft>
-                <a:spcPts val="250"/>
-              </a:spcAft>
-            </a:pPr>
-            <a:r>
-              <a:rPr sz="819" b="1">
+                <a:spcPts val="360"/>
+              </a:spcAft>
+            </a:pPr>
+            <a:r>
+              <a:rPr sz="860" b="1">
                 <a:solidFill>
                   <a:srgbClr val="1B335E"/>
                 </a:solidFill>
@@ -12421,7 +12842,7 @@
               <a:t>Signatures   </a:t>
             </a:r>
             <a:r>
-              <a:rPr sz="819" b="0">
+              <a:rPr sz="860" b="0">
                 <a:solidFill>
                   <a:srgbClr val="161D2B"/>
                 </a:solidFill>
@@ -12436,11 +12857,11 @@
                 <a:spcPts val="0"/>
               </a:spcBef>
               <a:spcAft>
-                <a:spcPts val="250"/>
-              </a:spcAft>
-            </a:pPr>
-            <a:r>
-              <a:rPr sz="819" b="1">
+                <a:spcPts val="360"/>
+              </a:spcAft>
+            </a:pPr>
+            <a:r>
+              <a:rPr sz="860" b="1">
                 <a:solidFill>
                   <a:srgbClr val="1B335E"/>
                 </a:solidFill>
@@ -12449,7 +12870,7 @@
               <a:t>PQC library   </a:t>
             </a:r>
             <a:r>
-              <a:rPr sz="819" b="0">
+              <a:rPr sz="860" b="0">
                 <a:solidFill>
                   <a:srgbClr val="161D2B"/>
                 </a:solidFill>
@@ -12464,11 +12885,11 @@
                 <a:spcPts val="0"/>
               </a:spcBef>
               <a:spcAft>
-                <a:spcPts val="250"/>
-              </a:spcAft>
-            </a:pPr>
-            <a:r>
-              <a:rPr sz="819" b="1">
+                <a:spcPts val="360"/>
+              </a:spcAft>
+            </a:pPr>
+            <a:r>
+              <a:rPr sz="860" b="1">
                 <a:solidFill>
                   <a:srgbClr val="1B335E"/>
                 </a:solidFill>
@@ -12477,7 +12898,7 @@
               <a:t>Content   </a:t>
             </a:r>
             <a:r>
-              <a:rPr sz="819" b="0">
+              <a:rPr sz="860" b="0">
                 <a:solidFill>
                   <a:srgbClr val="161D2B"/>
                 </a:solidFill>
@@ -12492,11 +12913,11 @@
                 <a:spcPts val="0"/>
               </a:spcBef>
               <a:spcAft>
-                <a:spcPts val="250"/>
-              </a:spcAft>
-            </a:pPr>
-            <a:r>
-              <a:rPr sz="819" b="1">
+                <a:spcPts val="360"/>
+              </a:spcAft>
+            </a:pPr>
+            <a:r>
+              <a:rPr sz="860" b="1">
                 <a:solidFill>
                   <a:srgbClr val="1B335E"/>
                 </a:solidFill>
@@ -12505,7 +12926,7 @@
               <a:t>Fingerprint   </a:t>
             </a:r>
             <a:r>
-              <a:rPr sz="819" b="0">
+              <a:rPr sz="860" b="0">
                 <a:solidFill>
                   <a:srgbClr val="161D2B"/>
                 </a:solidFill>
@@ -12520,11 +12941,11 @@
                 <a:spcPts val="0"/>
               </a:spcBef>
               <a:spcAft>
-                <a:spcPts val="250"/>
-              </a:spcAft>
-            </a:pPr>
-            <a:r>
-              <a:rPr sz="819" b="1">
+                <a:spcPts val="360"/>
+              </a:spcAft>
+            </a:pPr>
+            <a:r>
+              <a:rPr sz="860" b="1">
                 <a:solidFill>
                   <a:srgbClr val="1B335E"/>
                 </a:solidFill>
@@ -12533,7 +12954,7 @@
               <a:t>Ledger   </a:t>
             </a:r>
             <a:r>
-              <a:rPr sz="819" b="0">
+              <a:rPr sz="860" b="0">
                 <a:solidFill>
                   <a:srgbClr val="161D2B"/>
                 </a:solidFill>
@@ -12548,11 +12969,11 @@
                 <a:spcPts val="0"/>
               </a:spcBef>
               <a:spcAft>
-                <a:spcPts val="250"/>
-              </a:spcAft>
-            </a:pPr>
-            <a:r>
-              <a:rPr sz="819" b="1">
+                <a:spcPts val="360"/>
+              </a:spcAft>
+            </a:pPr>
+            <a:r>
+              <a:rPr sz="860" b="1">
                 <a:solidFill>
                   <a:srgbClr val="1B335E"/>
                 </a:solidFill>
@@ -12561,7 +12982,7 @@
               <a:t>Carriers   </a:t>
             </a:r>
             <a:r>
-              <a:rPr sz="819" b="0">
+              <a:rPr sz="860" b="0">
                 <a:solidFill>
                   <a:srgbClr val="161D2B"/>
                 </a:solidFill>
@@ -12574,13 +12995,13 @@
       </p:sp>
       <p:sp>
         <p:nvSpPr>
-          <p:cNvPr id="17478" name="Hexagon 17477"/>
+          <p:cNvPr id="17492" name="Hexagon 17491"/>
           <p:cNvSpPr/>
           <p:nvPr/>
         </p:nvSpPr>
         <p:spPr>
           <a:xfrm rot="5400000">
-            <a:off x="8522208" y="4343400"/>
+            <a:off x="8522208" y="4709160"/>
             <a:ext cx="274320" cy="241401"/>
           </a:xfrm>
           <a:prstGeom prst="hexagon">
@@ -12620,20 +13041,20 @@
                 </a:solidFill>
                 <a:latin typeface="Calibri"/>
               </a:rPr>
-              <a:t>M</a:t>
-            </a:r>
-          </a:p>
-        </p:txBody>
-      </p:sp>
-      <p:sp>
-        <p:nvSpPr>
-          <p:cNvPr id="17479" name="TextBox 17478"/>
+              <a:t>2</a:t>
+            </a:r>
+          </a:p>
+        </p:txBody>
+      </p:sp>
+      <p:sp>
+        <p:nvSpPr>
+          <p:cNvPr id="17493" name="TextBox 17492"/>
           <p:cNvSpPr txBox="1"/>
           <p:nvPr/>
         </p:nvSpPr>
         <p:spPr>
           <a:xfrm>
-            <a:off x="8906256" y="4325112"/>
+            <a:off x="8906256" y="4690872"/>
             <a:ext cx="2916936" cy="310896"/>
           </a:xfrm>
           <a:prstGeom prst="rect">
@@ -12669,14 +13090,14 @@
       </p:sp>
       <p:sp>
         <p:nvSpPr>
-          <p:cNvPr id="17480" name="TextBox 17479"/>
+          <p:cNvPr id="17494" name="TextBox 17493"/>
           <p:cNvSpPr txBox="1"/>
           <p:nvPr/>
         </p:nvSpPr>
         <p:spPr>
           <a:xfrm>
-            <a:off x="8522208" y="4736592"/>
-            <a:ext cx="3300984" cy="1188720"/>
+            <a:off x="8522208" y="5102352"/>
+            <a:ext cx="3300984" cy="1371600"/>
           </a:xfrm>
           <a:prstGeom prst="rect">
             <a:avLst/>
@@ -12694,11 +13115,11 @@
                 <a:spcPts val="0"/>
               </a:spcBef>
               <a:spcAft>
-                <a:spcPts val="340"/>
-              </a:spcAft>
-            </a:pPr>
-            <a:r>
-              <a:rPr sz="819" b="0" i="0">
+                <a:spcPts val="400"/>
+              </a:spcAft>
+            </a:pPr>
+            <a:r>
+              <a:rPr sz="840" b="0" i="0">
                 <a:solidFill>
                   <a:srgbClr val="161D2B"/>
                 </a:solidFill>
@@ -12713,11 +13134,11 @@
                 <a:spcPts val="0"/>
               </a:spcBef>
               <a:spcAft>
-                <a:spcPts val="340"/>
-              </a:spcAft>
-            </a:pPr>
-            <a:r>
-              <a:rPr sz="819" b="0" i="0">
+                <a:spcPts val="400"/>
+              </a:spcAft>
+            </a:pPr>
+            <a:r>
+              <a:rPr sz="840" b="0" i="0">
                 <a:solidFill>
                   <a:srgbClr val="161D2B"/>
                 </a:solidFill>
@@ -12732,11 +13153,11 @@
                 <a:spcPts val="0"/>
               </a:spcBef>
               <a:spcAft>
-                <a:spcPts val="340"/>
-              </a:spcAft>
-            </a:pPr>
-            <a:r>
-              <a:rPr sz="819" b="0" i="0">
+                <a:spcPts val="400"/>
+              </a:spcAft>
+            </a:pPr>
+            <a:r>
+              <a:rPr sz="840" b="0" i="0">
                 <a:solidFill>
                   <a:srgbClr val="161D2B"/>
                 </a:solidFill>
@@ -12745,94 +13166,23 @@
               <a:t>▪  Every attack on the carrier measured and published — including the four that defeat it.</a:t>
             </a:r>
           </a:p>
-        </p:txBody>
-      </p:sp>
-      <p:sp>
-        <p:nvSpPr>
-          <p:cNvPr id="17481" name="Rounded Rectangle 17480"/>
-          <p:cNvSpPr/>
-          <p:nvPr/>
-        </p:nvSpPr>
-        <p:spPr>
-          <a:xfrm>
-            <a:off x="8522208" y="5742432"/>
-            <a:ext cx="3300984" cy="329184"/>
-          </a:xfrm>
-          <a:prstGeom prst="roundRect">
-            <a:avLst>
-              <a:gd name="adj" fmla="val 7000"/>
-            </a:avLst>
-          </a:prstGeom>
-          <a:solidFill>
-            <a:srgbClr val="E7F6EE"/>
-          </a:solidFill>
-          <a:ln w="15875">
-            <a:solidFill>
-              <a:srgbClr val="94CEB2"/>
-            </a:solidFill>
-          </a:ln>
-          <a:effectLst/>
-        </p:spPr>
-        <p:style>
-          <a:lnRef idx="1">
-            <a:schemeClr val="accent1"/>
-          </a:lnRef>
-          <a:fillRef idx="3">
-            <a:schemeClr val="accent1"/>
-          </a:fillRef>
-          <a:effectRef idx="2">
-            <a:schemeClr val="accent1"/>
-          </a:effectRef>
-          <a:fontRef idx="minor">
-            <a:schemeClr val="lt1"/>
-          </a:fontRef>
-        </p:style>
-        <p:txBody>
-          <a:bodyPr rtlCol="0" anchor="ctr"/>
-          <a:lstStyle/>
-          <a:p>
-            <a:pPr algn="ctr"/>
-          </a:p>
-        </p:txBody>
-      </p:sp>
-      <p:sp>
-        <p:nvSpPr>
-          <p:cNvPr id="17482" name="TextBox 17481"/>
-          <p:cNvSpPr txBox="1"/>
-          <p:nvPr/>
-        </p:nvSpPr>
-        <p:spPr>
-          <a:xfrm>
-            <a:off x="8650224" y="5815584"/>
-            <a:ext cx="3044952" cy="219456"/>
-          </a:xfrm>
-          <a:prstGeom prst="rect">
-            <a:avLst/>
-          </a:prstGeom>
-          <a:noFill/>
-        </p:spPr>
-        <p:txBody>
-          <a:bodyPr wrap="square" anchor="t" lIns="0" rIns="0" tIns="0" bIns="0">
-            <a:spAutoFit/>
-          </a:bodyPr>
-          <a:lstStyle/>
           <a:p>
             <a:pPr algn="l">
               <a:spcBef>
                 <a:spcPts val="0"/>
               </a:spcBef>
               <a:spcAft>
-                <a:spcPts val="0"/>
-              </a:spcAft>
-            </a:pPr>
-            <a:r>
-              <a:rPr sz="800" b="1" i="0">
-                <a:solidFill>
-                  <a:srgbClr val="158A5A"/>
-                </a:solidFill>
-                <a:latin typeface="Calibri"/>
-              </a:rPr>
-              <a:t>Shared ciphertext + a 14 KB bundle each, flat in N.</a:t>
+                <a:spcPts val="400"/>
+              </a:spcAft>
+            </a:pPr>
+            <a:r>
+              <a:rPr sz="840" b="0" i="0">
+                <a:solidFill>
+                  <a:srgbClr val="161D2B"/>
+                </a:solidFill>
+                <a:latin typeface="Calibri"/>
+              </a:rPr>
+              <a:t>▪  Shipped, not staged: one container on a free tier, no GPU and no HSM.</a:t>
             </a:r>
           </a:p>
         </p:txBody>

--- a/ppt/NOX_SIH2026_PQFW.pptx
+++ b/ppt/NOX_SIH2026_PQFW.pptx
@@ -872,7 +872,7 @@
           <a:lstStyle/>
           <a:p>
             <a:r>
-              <a:t>We are honest about what breaks it. Retyping, OCR and stripping invisible characters defeat the text carrier, and inserting a word desynchronises the slots — all four are measured and published rather than hidden. The point is the failure mode: when an attack wins the system fails to identify anybody. Misidentification stayed at zero across the whole erasure sweep. The bottom row is the actual next four steps, not an aspiration.</a:t>
+              <a:t>We are honest about what breaks it. Retyping, OCR and stripping invisible characters defeat the text carrier, and inserting a word desynchronises the slots — all four are measured and published rather than hidden. The point is the failure mode: when an attack wins the system fails to identify anybody. Both curves are drawn straight from the evaluation CSVs. The left one is the whole argument in one picture: as you destroy the marks the green line falls, and the orange line — naming the wrong person — stays flat on zero the entire way. The bottom row is the actual next four steps, not an aspiration.</a:t>
             </a:r>
           </a:p>
         </p:txBody>
@@ -5708,8 +5708,8 @@
         </p:nvSpPr>
         <p:spPr>
           <a:xfrm>
-            <a:off x="548640" y="1188720"/>
-            <a:ext cx="5669280" cy="1005840"/>
+            <a:off x="530352" y="1133856"/>
+            <a:ext cx="5486400" cy="932688"/>
           </a:xfrm>
         </p:spPr>
         <p:txBody>
@@ -5725,7 +5725,7 @@
               </a:spcAft>
             </a:pPr>
             <a:r>
-              <a:rPr sz="4400" b="1" i="0">
+              <a:rPr sz="4200" b="1" i="0">
                 <a:solidFill>
                   <a:srgbClr val="FFFFFF"/>
                 </a:solidFill>
@@ -5764,14 +5764,86 @@
       </p:sp>
       <p:sp>
         <p:nvSpPr>
-          <p:cNvPr id="39" name="TextBox 38"/>
+          <p:cNvPr id="39" name="Rounded Rectangle 38"/>
+          <p:cNvSpPr/>
+          <p:nvPr/>
+        </p:nvSpPr>
+        <p:spPr>
+          <a:xfrm>
+            <a:off x="530352" y="2304288"/>
+            <a:ext cx="1645920" cy="841248"/>
+          </a:xfrm>
+          <a:prstGeom prst="roundRect">
+            <a:avLst>
+              <a:gd name="adj" fmla="val 8000"/>
+            </a:avLst>
+          </a:prstGeom>
+          <a:solidFill>
+            <a:srgbClr val="234276"/>
+          </a:solidFill>
+          <a:ln w="15875">
+            <a:solidFill>
+              <a:srgbClr val="3D66AE"/>
+            </a:solidFill>
+          </a:ln>
+          <a:effectLst/>
+        </p:spPr>
+        <p:style>
+          <a:lnRef idx="1">
+            <a:schemeClr val="accent1"/>
+          </a:lnRef>
+          <a:fillRef idx="3">
+            <a:schemeClr val="accent1"/>
+          </a:fillRef>
+          <a:effectRef idx="2">
+            <a:schemeClr val="accent1"/>
+          </a:effectRef>
+          <a:fontRef idx="minor">
+            <a:schemeClr val="lt1"/>
+          </a:fontRef>
+        </p:style>
+        <p:txBody>
+          <a:bodyPr rtlCol="0" anchor="ctr"/>
+          <a:lstStyle/>
+          <a:p>
+            <a:pPr algn="ctr"/>
+          </a:p>
+        </p:txBody>
+      </p:sp>
+      <p:pic>
+        <p:nvPicPr>
+          <p:cNvPr id="40" name="Picture 39" descr="package.png"/>
+          <p:cNvPicPr>
+            <a:picLocks noChangeAspect="1"/>
+          </p:cNvPicPr>
+          <p:nvPr/>
+        </p:nvPicPr>
+        <p:blipFill>
+          <a:blip r:embed="rId4"/>
+          <a:stretch>
+            <a:fillRect/>
+          </a:stretch>
+        </p:blipFill>
+        <p:spPr>
+          <a:xfrm>
+            <a:off x="649224" y="2596896"/>
+            <a:ext cx="256032" cy="256032"/>
+          </a:xfrm>
+          <a:prstGeom prst="rect">
+            <a:avLst/>
+          </a:prstGeom>
+        </p:spPr>
+      </p:pic>
+      <p:sp>
+        <p:nvSpPr>
+          <p:cNvPr id="41" name="TextBox 40"/>
           <p:cNvSpPr txBox="1"/>
           <p:nvPr/>
         </p:nvSpPr>
         <p:spPr>
           <a:xfrm>
-            <a:off x="548640" y="2231136"/>
-            <a:ext cx="5577840" cy="402336"/>
+            <a:off x="987552" y="2423160"/>
+            <a:ext cx="1078992" cy="640080"/>
           </a:xfrm>
           <a:prstGeom prst="rect">
             <a:avLst/>
@@ -5789,49 +5861,158 @@
                 <a:spcPts val="0"/>
               </a:spcBef>
               <a:spcAft>
-                <a:spcPts val="0"/>
-              </a:spcAft>
-            </a:pPr>
-            <a:r>
-              <a:rPr sz="1019" b="0">
+                <a:spcPts val="250"/>
+              </a:spcAft>
+            </a:pPr>
+            <a:r>
+              <a:rPr sz="919" b="1" i="0">
+                <a:solidFill>
+                  <a:srgbClr val="FFFFFF"/>
+                </a:solidFill>
+                <a:latin typeface="Calibri"/>
+              </a:rPr>
+              <a:t>One ciphertext</a:t>
+            </a:r>
+          </a:p>
+          <a:p>
+            <a:pPr algn="l">
+              <a:spcBef>
+                <a:spcPts val="0"/>
+              </a:spcBef>
+              <a:spcAft>
+                <a:spcPts val="0"/>
+              </a:spcAft>
+            </a:pPr>
+            <a:r>
+              <a:rPr sz="720" b="0" i="0">
                 <a:solidFill>
                   <a:srgbClr val="A9BEDF"/>
                 </a:solidFill>
                 <a:latin typeface="Calibri"/>
               </a:rPr>
-              <a:t>One document goes to many cleared recipients. Each decrypted copy carries an invisible, per-session fingerprint, so a leak resolves to </a:t>
-            </a:r>
-            <a:r>
-              <a:rPr sz="1019" b="1">
-                <a:solidFill>
-                  <a:srgbClr val="FFFFFF"/>
-                </a:solidFill>
-                <a:latin typeface="Calibri"/>
-              </a:rPr>
-              <a:t>one name</a:t>
-            </a:r>
-            <a:r>
-              <a:rPr sz="1019" b="0">
-                <a:solidFill>
-                  <a:srgbClr val="A9BEDF"/>
-                </a:solidFill>
-                <a:latin typeface="Calibri"/>
-              </a:rPr>
-              <a:t> — with a provable error bound.</a:t>
-            </a:r>
-          </a:p>
-        </p:txBody>
-      </p:sp>
-      <p:sp>
-        <p:nvSpPr>
-          <p:cNvPr id="40" name="TextBox 39"/>
+              <a:t>broadcast to every cleared recipient</a:t>
+            </a:r>
+          </a:p>
+        </p:txBody>
+      </p:sp>
+      <p:cxnSp>
+        <p:nvCxnSpPr>
+          <p:cNvPr id="42" name="Connector 41"/>
+          <p:cNvCxnSpPr/>
+          <p:nvPr/>
+        </p:nvCxnSpPr>
+        <p:spPr>
+          <a:xfrm>
+            <a:off x="2221991" y="2724912"/>
+            <a:ext cx="182881" cy="0"/>
+          </a:xfrm>
+          <a:prstGeom prst="line">
+            <a:avLst/>
+          </a:prstGeom>
+          <a:ln w="28575">
+            <a:solidFill>
+              <a:srgbClr val="F2790D"/>
+            </a:solidFill>
+            <a:tailEnd type="triangle" w="med" len="med"/>
+          </a:ln>
+        </p:spPr>
+        <p:style>
+          <a:lnRef idx="2">
+            <a:schemeClr val="accent1"/>
+          </a:lnRef>
+          <a:fillRef idx="0">
+            <a:schemeClr val="accent1"/>
+          </a:fillRef>
+          <a:effectRef idx="1">
+            <a:schemeClr val="accent1"/>
+          </a:effectRef>
+          <a:fontRef idx="minor">
+            <a:schemeClr val="tx1"/>
+          </a:fontRef>
+        </p:style>
+      </p:cxnSp>
+      <p:sp>
+        <p:nvSpPr>
+          <p:cNvPr id="43" name="Rounded Rectangle 42"/>
+          <p:cNvSpPr/>
+          <p:nvPr/>
+        </p:nvSpPr>
+        <p:spPr>
+          <a:xfrm>
+            <a:off x="2450592" y="2304288"/>
+            <a:ext cx="1645920" cy="841248"/>
+          </a:xfrm>
+          <a:prstGeom prst="roundRect">
+            <a:avLst>
+              <a:gd name="adj" fmla="val 8000"/>
+            </a:avLst>
+          </a:prstGeom>
+          <a:solidFill>
+            <a:srgbClr val="234276"/>
+          </a:solidFill>
+          <a:ln w="15875">
+            <a:solidFill>
+              <a:srgbClr val="3D66AE"/>
+            </a:solidFill>
+          </a:ln>
+          <a:effectLst/>
+        </p:spPr>
+        <p:style>
+          <a:lnRef idx="1">
+            <a:schemeClr val="accent1"/>
+          </a:lnRef>
+          <a:fillRef idx="3">
+            <a:schemeClr val="accent1"/>
+          </a:fillRef>
+          <a:effectRef idx="2">
+            <a:schemeClr val="accent1"/>
+          </a:effectRef>
+          <a:fontRef idx="minor">
+            <a:schemeClr val="lt1"/>
+          </a:fontRef>
+        </p:style>
+        <p:txBody>
+          <a:bodyPr rtlCol="0" anchor="ctr"/>
+          <a:lstStyle/>
+          <a:p>
+            <a:pPr algn="ctr"/>
+          </a:p>
+        </p:txBody>
+      </p:sp>
+      <p:pic>
+        <p:nvPicPr>
+          <p:cNvPr id="44" name="Picture 43" descr="fingerprint.png"/>
+          <p:cNvPicPr>
+            <a:picLocks noChangeAspect="1"/>
+          </p:cNvPicPr>
+          <p:nvPr/>
+        </p:nvPicPr>
+        <p:blipFill>
+          <a:blip r:embed="rId5"/>
+          <a:stretch>
+            <a:fillRect/>
+          </a:stretch>
+        </p:blipFill>
+        <p:spPr>
+          <a:xfrm>
+            <a:off x="2569464" y="2596896"/>
+            <a:ext cx="256032" cy="256032"/>
+          </a:xfrm>
+          <a:prstGeom prst="rect">
+            <a:avLst/>
+          </a:prstGeom>
+        </p:spPr>
+      </p:pic>
+      <p:sp>
+        <p:nvSpPr>
+          <p:cNvPr id="45" name="TextBox 44"/>
           <p:cNvSpPr txBox="1"/>
           <p:nvPr/>
         </p:nvSpPr>
         <p:spPr>
           <a:xfrm>
-            <a:off x="548640" y="2761488"/>
-            <a:ext cx="5577840" cy="1700784"/>
+            <a:off x="2907792" y="2423160"/>
+            <a:ext cx="1078992" cy="640080"/>
           </a:xfrm>
           <a:prstGeom prst="rect">
             <a:avLst/>
@@ -5849,11 +6030,241 @@
                 <a:spcPts val="0"/>
               </a:spcBef>
               <a:spcAft>
+                <a:spcPts val="250"/>
+              </a:spcAft>
+            </a:pPr>
+            <a:r>
+              <a:rPr sz="919" b="1" i="0">
+                <a:solidFill>
+                  <a:srgbClr val="FFFFFF"/>
+                </a:solidFill>
+                <a:latin typeface="Calibri"/>
+              </a:rPr>
+              <a:t>N distinct copies</a:t>
+            </a:r>
+          </a:p>
+          <a:p>
+            <a:pPr algn="l">
+              <a:spcBef>
+                <a:spcPts val="0"/>
+              </a:spcBef>
+              <a:spcAft>
+                <a:spcPts val="0"/>
+              </a:spcAft>
+            </a:pPr>
+            <a:r>
+              <a:rPr sz="720" b="0" i="0">
+                <a:solidFill>
+                  <a:srgbClr val="A9BEDF"/>
+                </a:solidFill>
+                <a:latin typeface="Calibri"/>
+              </a:rPr>
+              <a:t>each keyed to one person and one session</a:t>
+            </a:r>
+          </a:p>
+        </p:txBody>
+      </p:sp>
+      <p:cxnSp>
+        <p:nvCxnSpPr>
+          <p:cNvPr id="46" name="Connector 45"/>
+          <p:cNvCxnSpPr/>
+          <p:nvPr/>
+        </p:nvCxnSpPr>
+        <p:spPr>
+          <a:xfrm>
+            <a:off x="4142232" y="2724912"/>
+            <a:ext cx="182880" cy="0"/>
+          </a:xfrm>
+          <a:prstGeom prst="line">
+            <a:avLst/>
+          </a:prstGeom>
+          <a:ln w="28575">
+            <a:solidFill>
+              <a:srgbClr val="F2790D"/>
+            </a:solidFill>
+            <a:tailEnd type="triangle" w="med" len="med"/>
+          </a:ln>
+        </p:spPr>
+        <p:style>
+          <a:lnRef idx="2">
+            <a:schemeClr val="accent1"/>
+          </a:lnRef>
+          <a:fillRef idx="0">
+            <a:schemeClr val="accent1"/>
+          </a:fillRef>
+          <a:effectRef idx="1">
+            <a:schemeClr val="accent1"/>
+          </a:effectRef>
+          <a:fontRef idx="minor">
+            <a:schemeClr val="tx1"/>
+          </a:fontRef>
+        </p:style>
+      </p:cxnSp>
+      <p:sp>
+        <p:nvSpPr>
+          <p:cNvPr id="47" name="Rounded Rectangle 46"/>
+          <p:cNvSpPr/>
+          <p:nvPr/>
+        </p:nvSpPr>
+        <p:spPr>
+          <a:xfrm>
+            <a:off x="4370832" y="2304288"/>
+            <a:ext cx="1645920" cy="841248"/>
+          </a:xfrm>
+          <a:prstGeom prst="roundRect">
+            <a:avLst>
+              <a:gd name="adj" fmla="val 8000"/>
+            </a:avLst>
+          </a:prstGeom>
+          <a:solidFill>
+            <a:srgbClr val="234276"/>
+          </a:solidFill>
+          <a:ln w="15875">
+            <a:solidFill>
+              <a:srgbClr val="3D66AE"/>
+            </a:solidFill>
+          </a:ln>
+          <a:effectLst/>
+        </p:spPr>
+        <p:style>
+          <a:lnRef idx="1">
+            <a:schemeClr val="accent1"/>
+          </a:lnRef>
+          <a:fillRef idx="3">
+            <a:schemeClr val="accent1"/>
+          </a:fillRef>
+          <a:effectRef idx="2">
+            <a:schemeClr val="accent1"/>
+          </a:effectRef>
+          <a:fontRef idx="minor">
+            <a:schemeClr val="lt1"/>
+          </a:fontRef>
+        </p:style>
+        <p:txBody>
+          <a:bodyPr rtlCol="0" anchor="ctr"/>
+          <a:lstStyle/>
+          <a:p>
+            <a:pPr algn="ctr"/>
+          </a:p>
+        </p:txBody>
+      </p:sp>
+      <p:pic>
+        <p:nvPicPr>
+          <p:cNvPr id="48" name="Picture 47" descr="verdict.png"/>
+          <p:cNvPicPr>
+            <a:picLocks noChangeAspect="1"/>
+          </p:cNvPicPr>
+          <p:nvPr/>
+        </p:nvPicPr>
+        <p:blipFill>
+          <a:blip r:embed="rId6"/>
+          <a:stretch>
+            <a:fillRect/>
+          </a:stretch>
+        </p:blipFill>
+        <p:spPr>
+          <a:xfrm>
+            <a:off x="4489704" y="2596896"/>
+            <a:ext cx="256032" cy="256032"/>
+          </a:xfrm>
+          <a:prstGeom prst="rect">
+            <a:avLst/>
+          </a:prstGeom>
+        </p:spPr>
+      </p:pic>
+      <p:sp>
+        <p:nvSpPr>
+          <p:cNvPr id="49" name="TextBox 48"/>
+          <p:cNvSpPr txBox="1"/>
+          <p:nvPr/>
+        </p:nvSpPr>
+        <p:spPr>
+          <a:xfrm>
+            <a:off x="4828032" y="2423160"/>
+            <a:ext cx="1078992" cy="640080"/>
+          </a:xfrm>
+          <a:prstGeom prst="rect">
+            <a:avLst/>
+          </a:prstGeom>
+          <a:noFill/>
+        </p:spPr>
+        <p:txBody>
+          <a:bodyPr wrap="square" anchor="t" lIns="0" rIns="0" tIns="0" bIns="0">
+            <a:spAutoFit/>
+          </a:bodyPr>
+          <a:lstStyle/>
+          <a:p>
+            <a:pPr algn="l">
+              <a:spcBef>
+                <a:spcPts val="0"/>
+              </a:spcBef>
+              <a:spcAft>
+                <a:spcPts val="250"/>
+              </a:spcAft>
+            </a:pPr>
+            <a:r>
+              <a:rPr sz="919" b="1" i="0">
+                <a:solidFill>
+                  <a:srgbClr val="FFFFFF"/>
+                </a:solidFill>
+                <a:latin typeface="Calibri"/>
+              </a:rPr>
+              <a:t>One name</a:t>
+            </a:r>
+          </a:p>
+          <a:p>
+            <a:pPr algn="l">
+              <a:spcBef>
+                <a:spcPts val="0"/>
+              </a:spcBef>
+              <a:spcAft>
+                <a:spcPts val="0"/>
+              </a:spcAft>
+            </a:pPr>
+            <a:r>
+              <a:rPr sz="720" b="0" i="0">
+                <a:solidFill>
+                  <a:srgbClr val="A9BEDF"/>
+                </a:solidFill>
+                <a:latin typeface="Calibri"/>
+              </a:rPr>
+              <a:t>a leak traced, with a provable error bound</a:t>
+            </a:r>
+          </a:p>
+        </p:txBody>
+      </p:sp>
+      <p:sp>
+        <p:nvSpPr>
+          <p:cNvPr id="50" name="TextBox 49"/>
+          <p:cNvSpPr txBox="1"/>
+          <p:nvPr/>
+        </p:nvSpPr>
+        <p:spPr>
+          <a:xfrm>
+            <a:off x="530352" y="3401568"/>
+            <a:ext cx="2395728" cy="603504"/>
+          </a:xfrm>
+          <a:prstGeom prst="rect">
+            <a:avLst/>
+          </a:prstGeom>
+          <a:noFill/>
+        </p:spPr>
+        <p:txBody>
+          <a:bodyPr wrap="square" anchor="t" lIns="0" rIns="0" tIns="0" bIns="0">
+            <a:spAutoFit/>
+          </a:bodyPr>
+          <a:lstStyle/>
+          <a:p>
+            <a:pPr algn="l">
+              <a:spcBef>
+                <a:spcPts val="0"/>
+              </a:spcBef>
+              <a:spcAft>
                 <a:spcPts val="450"/>
               </a:spcAft>
             </a:pPr>
             <a:r>
-              <a:rPr sz="960" b="0">
+              <a:rPr sz="860" b="0">
                 <a:solidFill>
                   <a:srgbClr val="A9BEDF"/>
                 </a:solidFill>
@@ -5862,7 +6273,7 @@
               <a:t>Problem Statement ID   </a:t>
             </a:r>
             <a:r>
-              <a:rPr sz="960" b="1">
+              <a:rPr sz="860" b="1">
                 <a:solidFill>
                   <a:srgbClr val="FFFFFF"/>
                 </a:solidFill>
@@ -5881,176 +6292,232 @@
               </a:spcAft>
             </a:pPr>
             <a:r>
-              <a:rPr sz="960" b="0">
+              <a:rPr sz="860" b="0">
                 <a:solidFill>
                   <a:srgbClr val="A9BEDF"/>
                 </a:solidFill>
                 <a:latin typeface="Calibri"/>
               </a:rPr>
-              <a:t>Problem Statement Title   </a:t>
-            </a:r>
-            <a:r>
-              <a:rPr sz="960" b="1">
+              <a:t>Organisation   </a:t>
+            </a:r>
+            <a:r>
+              <a:rPr sz="860" b="1">
                 <a:solidFill>
                   <a:srgbClr val="FFFFFF"/>
                 </a:solidFill>
                 <a:latin typeface="Calibri"/>
               </a:rPr>
+              <a:t>Ministry of Defence</a:t>
+            </a:r>
+          </a:p>
+          <a:p>
+            <a:pPr algn="l">
+              <a:spcBef>
+                <a:spcPts val="0"/>
+              </a:spcBef>
+              <a:spcAft>
+                <a:spcPts val="450"/>
+              </a:spcAft>
+            </a:pPr>
+            <a:r>
+              <a:rPr sz="860" b="0">
+                <a:solidFill>
+                  <a:srgbClr val="A9BEDF"/>
+                </a:solidFill>
+                <a:latin typeface="Calibri"/>
+              </a:rPr>
+              <a:t>Team ID   </a:t>
+            </a:r>
+            <a:r>
+              <a:rPr sz="860" b="1">
+                <a:solidFill>
+                  <a:srgbClr val="FFFFFF"/>
+                </a:solidFill>
+                <a:latin typeface="Calibri"/>
+              </a:rPr>
+              <a:t>—  (to be assigned on the portal)</a:t>
+            </a:r>
+          </a:p>
+        </p:txBody>
+      </p:sp>
+      <p:sp>
+        <p:nvSpPr>
+          <p:cNvPr id="51" name="TextBox 50"/>
+          <p:cNvSpPr txBox="1"/>
+          <p:nvPr/>
+        </p:nvSpPr>
+        <p:spPr>
+          <a:xfrm>
+            <a:off x="3054096" y="3401568"/>
+            <a:ext cx="2395728" cy="603504"/>
+          </a:xfrm>
+          <a:prstGeom prst="rect">
+            <a:avLst/>
+          </a:prstGeom>
+          <a:noFill/>
+        </p:spPr>
+        <p:txBody>
+          <a:bodyPr wrap="square" anchor="t" lIns="0" rIns="0" tIns="0" bIns="0">
+            <a:spAutoFit/>
+          </a:bodyPr>
+          <a:lstStyle/>
+          <a:p>
+            <a:pPr algn="l">
+              <a:spcBef>
+                <a:spcPts val="0"/>
+              </a:spcBef>
+              <a:spcAft>
+                <a:spcPts val="450"/>
+              </a:spcAft>
+            </a:pPr>
+            <a:r>
+              <a:rPr sz="860" b="0">
+                <a:solidFill>
+                  <a:srgbClr val="A9BEDF"/>
+                </a:solidFill>
+                <a:latin typeface="Calibri"/>
+              </a:rPr>
+              <a:t>PS Category   </a:t>
+            </a:r>
+            <a:r>
+              <a:rPr sz="860" b="1">
+                <a:solidFill>
+                  <a:srgbClr val="FFFFFF"/>
+                </a:solidFill>
+                <a:latin typeface="Calibri"/>
+              </a:rPr>
+              <a:t>Software</a:t>
+            </a:r>
+          </a:p>
+          <a:p>
+            <a:pPr algn="l">
+              <a:spcBef>
+                <a:spcPts val="0"/>
+              </a:spcBef>
+              <a:spcAft>
+                <a:spcPts val="450"/>
+              </a:spcAft>
+            </a:pPr>
+            <a:r>
+              <a:rPr sz="860" b="0">
+                <a:solidFill>
+                  <a:srgbClr val="A9BEDF"/>
+                </a:solidFill>
+                <a:latin typeface="Calibri"/>
+              </a:rPr>
+              <a:t>Theme   </a:t>
+            </a:r>
+            <a:r>
+              <a:rPr sz="860" b="1">
+                <a:solidFill>
+                  <a:srgbClr val="FFFFFF"/>
+                </a:solidFill>
+                <a:latin typeface="Calibri"/>
+              </a:rPr>
+              <a:t>Blockchain &amp; Cybersecurity</a:t>
+            </a:r>
+          </a:p>
+          <a:p>
+            <a:pPr algn="l">
+              <a:spcBef>
+                <a:spcPts val="0"/>
+              </a:spcBef>
+              <a:spcAft>
+                <a:spcPts val="450"/>
+              </a:spcAft>
+            </a:pPr>
+            <a:r>
+              <a:rPr sz="860" b="0">
+                <a:solidFill>
+                  <a:srgbClr val="A9BEDF"/>
+                </a:solidFill>
+                <a:latin typeface="Calibri"/>
+              </a:rPr>
+              <a:t>Team Name   </a:t>
+            </a:r>
+            <a:r>
+              <a:rPr sz="860" b="1">
+                <a:solidFill>
+                  <a:srgbClr val="FFFFFF"/>
+                </a:solidFill>
+                <a:latin typeface="Calibri"/>
+              </a:rPr>
+              <a:t>NOX</a:t>
+            </a:r>
+          </a:p>
+        </p:txBody>
+      </p:sp>
+      <p:sp>
+        <p:nvSpPr>
+          <p:cNvPr id="52" name="TextBox 51"/>
+          <p:cNvSpPr txBox="1"/>
+          <p:nvPr/>
+        </p:nvSpPr>
+        <p:spPr>
+          <a:xfrm>
+            <a:off x="530352" y="4114800"/>
+            <a:ext cx="5486400" cy="493776"/>
+          </a:xfrm>
+          <a:prstGeom prst="rect">
+            <a:avLst/>
+          </a:prstGeom>
+          <a:noFill/>
+        </p:spPr>
+        <p:txBody>
+          <a:bodyPr wrap="square" anchor="t" lIns="0" rIns="0" tIns="0" bIns="0">
+            <a:spAutoFit/>
+          </a:bodyPr>
+          <a:lstStyle/>
+          <a:p>
+            <a:pPr algn="l">
+              <a:spcBef>
+                <a:spcPts val="0"/>
+              </a:spcBef>
+              <a:spcAft>
+                <a:spcPts val="250"/>
+              </a:spcAft>
+            </a:pPr>
+            <a:r>
+              <a:rPr sz="700" b="1" i="0" spc="140">
+                <a:solidFill>
+                  <a:srgbClr val="A9BEDF"/>
+                </a:solidFill>
+                <a:latin typeface="Calibri"/>
+              </a:rPr>
+              <a:t>PROBLEM STATEMENT TITLE</a:t>
+            </a:r>
+          </a:p>
+          <a:p>
+            <a:pPr algn="l">
+              <a:spcBef>
+                <a:spcPts val="0"/>
+              </a:spcBef>
+              <a:spcAft>
+                <a:spcPts val="0"/>
+              </a:spcAft>
+            </a:pPr>
+            <a:r>
+              <a:rPr sz="980" b="1" i="0">
+                <a:solidFill>
+                  <a:srgbClr val="FFFFFF"/>
+                </a:solidFill>
+                <a:latin typeface="Calibri"/>
+              </a:rPr>
               <a:t>Cryptographic Attribution and Immutable Decryption Provenance for Multi-Recipient Encrypted Document Distribution</a:t>
             </a:r>
           </a:p>
-          <a:p>
-            <a:pPr algn="l">
-              <a:spcBef>
-                <a:spcPts val="0"/>
-              </a:spcBef>
-              <a:spcAft>
-                <a:spcPts val="450"/>
-              </a:spcAft>
-            </a:pPr>
-            <a:r>
-              <a:rPr sz="960" b="0">
-                <a:solidFill>
-                  <a:srgbClr val="A9BEDF"/>
-                </a:solidFill>
-                <a:latin typeface="Calibri"/>
-              </a:rPr>
-              <a:t>Organisation   </a:t>
-            </a:r>
-            <a:r>
-              <a:rPr sz="960" b="1">
-                <a:solidFill>
-                  <a:srgbClr val="FFFFFF"/>
-                </a:solidFill>
-                <a:latin typeface="Calibri"/>
-              </a:rPr>
-              <a:t>Ministry of Defence</a:t>
-            </a:r>
-          </a:p>
-          <a:p>
-            <a:pPr algn="l">
-              <a:spcBef>
-                <a:spcPts val="0"/>
-              </a:spcBef>
-              <a:spcAft>
-                <a:spcPts val="450"/>
-              </a:spcAft>
-            </a:pPr>
-            <a:r>
-              <a:rPr sz="960" b="0">
-                <a:solidFill>
-                  <a:srgbClr val="A9BEDF"/>
-                </a:solidFill>
-                <a:latin typeface="Calibri"/>
-              </a:rPr>
-              <a:t>Theme   </a:t>
-            </a:r>
-            <a:r>
-              <a:rPr sz="960" b="1">
-                <a:solidFill>
-                  <a:srgbClr val="FFFFFF"/>
-                </a:solidFill>
-                <a:latin typeface="Calibri"/>
-              </a:rPr>
-              <a:t>Blockchain &amp; Cybersecurity</a:t>
-            </a:r>
-          </a:p>
-          <a:p>
-            <a:pPr algn="l">
-              <a:spcBef>
-                <a:spcPts val="0"/>
-              </a:spcBef>
-              <a:spcAft>
-                <a:spcPts val="450"/>
-              </a:spcAft>
-            </a:pPr>
-            <a:r>
-              <a:rPr sz="960" b="0">
-                <a:solidFill>
-                  <a:srgbClr val="A9BEDF"/>
-                </a:solidFill>
-                <a:latin typeface="Calibri"/>
-              </a:rPr>
-              <a:t>PS Category   </a:t>
-            </a:r>
-            <a:r>
-              <a:rPr sz="960" b="1">
-                <a:solidFill>
-                  <a:srgbClr val="FFFFFF"/>
-                </a:solidFill>
-                <a:latin typeface="Calibri"/>
-              </a:rPr>
-              <a:t>Software</a:t>
-            </a:r>
-          </a:p>
-          <a:p>
-            <a:pPr algn="l">
-              <a:spcBef>
-                <a:spcPts val="0"/>
-              </a:spcBef>
-              <a:spcAft>
-                <a:spcPts val="450"/>
-              </a:spcAft>
-            </a:pPr>
-            <a:r>
-              <a:rPr sz="960" b="0">
-                <a:solidFill>
-                  <a:srgbClr val="A9BEDF"/>
-                </a:solidFill>
-                <a:latin typeface="Calibri"/>
-              </a:rPr>
-              <a:t>Team ID   </a:t>
-            </a:r>
-            <a:r>
-              <a:rPr sz="960" b="1">
-                <a:solidFill>
-                  <a:srgbClr val="FFFFFF"/>
-                </a:solidFill>
-                <a:latin typeface="Calibri"/>
-              </a:rPr>
-              <a:t>—  (to be assigned on the portal)</a:t>
-            </a:r>
-          </a:p>
-          <a:p>
-            <a:pPr algn="l">
-              <a:spcBef>
-                <a:spcPts val="0"/>
-              </a:spcBef>
-              <a:spcAft>
-                <a:spcPts val="450"/>
-              </a:spcAft>
-            </a:pPr>
-            <a:r>
-              <a:rPr sz="960" b="0">
-                <a:solidFill>
-                  <a:srgbClr val="A9BEDF"/>
-                </a:solidFill>
-                <a:latin typeface="Calibri"/>
-              </a:rPr>
-              <a:t>Team Name   </a:t>
-            </a:r>
-            <a:r>
-              <a:rPr sz="960" b="1">
-                <a:solidFill>
-                  <a:srgbClr val="FFFFFF"/>
-                </a:solidFill>
-                <a:latin typeface="Calibri"/>
-              </a:rPr>
-              <a:t>NOX  ·  International Institute of Information Technology, Bhubaneswar</a:t>
-            </a:r>
-          </a:p>
-        </p:txBody>
-      </p:sp>
-      <p:sp>
-        <p:nvSpPr>
-          <p:cNvPr id="41" name="Rounded Rectangle 40"/>
+        </p:txBody>
+      </p:sp>
+      <p:sp>
+        <p:nvSpPr>
+          <p:cNvPr id="53" name="Rounded Rectangle 52"/>
           <p:cNvSpPr/>
           <p:nvPr/>
         </p:nvSpPr>
         <p:spPr>
           <a:xfrm>
-            <a:off x="548640" y="4590288"/>
-            <a:ext cx="5577840" cy="1115568"/>
+            <a:off x="530352" y="4809744"/>
+            <a:ext cx="5486400" cy="1188720"/>
           </a:xfrm>
           <a:prstGeom prst="roundRect">
             <a:avLst>
@@ -6091,22 +6558,22 @@
       </p:sp>
       <p:pic>
         <p:nvPicPr>
-          <p:cNvPr id="42" name="Picture 41" descr="qr_live.png"/>
+          <p:cNvPr id="54" name="Picture 53" descr="qr_live.png"/>
           <p:cNvPicPr>
             <a:picLocks noChangeAspect="1"/>
           </p:cNvPicPr>
           <p:nvPr/>
         </p:nvPicPr>
         <p:blipFill>
-          <a:blip r:embed="rId4"/>
+          <a:blip r:embed="rId7"/>
           <a:stretch>
             <a:fillRect/>
           </a:stretch>
         </p:blipFill>
         <p:spPr>
           <a:xfrm>
-            <a:off x="685800" y="4727448"/>
-            <a:ext cx="841248" cy="841248"/>
+            <a:off x="667512" y="4983480"/>
+            <a:ext cx="877824" cy="877824"/>
           </a:xfrm>
           <a:prstGeom prst="rect">
             <a:avLst/>
@@ -6115,14 +6582,14 @@
       </p:pic>
       <p:sp>
         <p:nvSpPr>
-          <p:cNvPr id="43" name="TextBox 42"/>
+          <p:cNvPr id="55" name="TextBox 54"/>
           <p:cNvSpPr txBox="1"/>
           <p:nvPr/>
         </p:nvSpPr>
         <p:spPr>
           <a:xfrm>
-            <a:off x="1664208" y="4745736"/>
-            <a:ext cx="4315968" cy="822960"/>
+            <a:off x="1682496" y="4992624"/>
+            <a:ext cx="4206240" cy="859536"/>
           </a:xfrm>
           <a:prstGeom prst="rect">
             <a:avLst/>
@@ -6195,14 +6662,14 @@
       </p:sp>
       <p:sp>
         <p:nvSpPr>
-          <p:cNvPr id="44" name="TextBox 43"/>
+          <p:cNvPr id="56" name="TextBox 55"/>
           <p:cNvSpPr txBox="1"/>
           <p:nvPr/>
         </p:nvSpPr>
         <p:spPr>
           <a:xfrm>
-            <a:off x="548640" y="5961888"/>
-            <a:ext cx="5577840" cy="457200"/>
+            <a:off x="530352" y="6181344"/>
+            <a:ext cx="5486400" cy="457200"/>
           </a:xfrm>
           <a:prstGeom prst="rect">
             <a:avLst/>
@@ -6230,7 +6697,7 @@
                 </a:solidFill>
                 <a:latin typeface="Calibri"/>
               </a:rPr>
-              <a:t>TEAM MEMBERS</a:t>
+              <a:t>TEAM NOX  ·  INTERNATIONAL INSTITUTE OF INFORMATION TECHNOLOGY, BHUBANESWAR</a:t>
             </a:r>
           </a:p>
           <a:p>
@@ -13670,7 +14137,7 @@
         <p:spPr>
           <a:xfrm>
             <a:off x="365760" y="1572768"/>
-            <a:ext cx="3685032" cy="1975104"/>
+            <a:ext cx="3685032" cy="1645920"/>
           </a:xfrm>
           <a:prstGeom prst="roundRect">
             <a:avLst>
@@ -13718,7 +14185,7 @@
         <p:spPr>
           <a:xfrm>
             <a:off x="512064" y="1682496"/>
-            <a:ext cx="3392424" cy="1783080"/>
+            <a:ext cx="3392424" cy="1481328"/>
           </a:xfrm>
           <a:prstGeom prst="rect">
             <a:avLst/>
@@ -13736,11 +14203,11 @@
                 <a:spcPts val="0"/>
               </a:spcBef>
               <a:spcAft>
-                <a:spcPts val="550"/>
-              </a:spcAft>
-            </a:pPr>
-            <a:r>
-              <a:rPr sz="860" b="1">
+                <a:spcPts val="459"/>
+              </a:spcAft>
+            </a:pPr>
+            <a:r>
+              <a:rPr sz="840" b="1">
                 <a:solidFill>
                   <a:srgbClr val="1B335E"/>
                 </a:solidFill>
@@ -13749,7 +14216,7 @@
               <a:t>Already built and running. </a:t>
             </a:r>
             <a:r>
-              <a:rPr sz="860" b="0">
+              <a:rPr sz="840" b="0">
                 <a:solidFill>
                   <a:srgbClr val="54627A"/>
                 </a:solidFill>
@@ -13764,11 +14231,11 @@
                 <a:spcPts val="0"/>
               </a:spcBef>
               <a:spcAft>
-                <a:spcPts val="550"/>
-              </a:spcAft>
-            </a:pPr>
-            <a:r>
-              <a:rPr sz="860" b="1">
+                <a:spcPts val="459"/>
+              </a:spcAft>
+            </a:pPr>
+            <a:r>
+              <a:rPr sz="840" b="1">
                 <a:solidFill>
                   <a:srgbClr val="1B335E"/>
                 </a:solidFill>
@@ -13777,7 +14244,7 @@
               <a:t>Runs on commodity CPU. </a:t>
             </a:r>
             <a:r>
-              <a:rPr sz="860" b="0">
+              <a:rPr sz="840" b="0">
                 <a:solidFill>
                   <a:srgbClr val="54627A"/>
                 </a:solidFill>
@@ -13792,11 +14259,11 @@
                 <a:spcPts val="0"/>
               </a:spcBef>
               <a:spcAft>
-                <a:spcPts val="550"/>
-              </a:spcAft>
-            </a:pPr>
-            <a:r>
-              <a:rPr sz="860" b="1">
+                <a:spcPts val="459"/>
+              </a:spcAft>
+            </a:pPr>
+            <a:r>
+              <a:rPr sz="840" b="1">
                 <a:solidFill>
                   <a:srgbClr val="1B335E"/>
                 </a:solidFill>
@@ -13805,7 +14272,7 @@
               <a:t>Zero licensing cost. </a:t>
             </a:r>
             <a:r>
-              <a:rPr sz="860" b="0">
+              <a:rPr sz="840" b="0">
                 <a:solidFill>
                   <a:srgbClr val="54627A"/>
                 </a:solidFill>
@@ -13820,11 +14287,11 @@
                 <a:spcPts val="0"/>
               </a:spcBef>
               <a:spcAft>
-                <a:spcPts val="550"/>
-              </a:spcAft>
-            </a:pPr>
-            <a:r>
-              <a:rPr sz="860" b="1">
+                <a:spcPts val="459"/>
+              </a:spcAft>
+            </a:pPr>
+            <a:r>
+              <a:rPr sz="840" b="1">
                 <a:solidFill>
                   <a:srgbClr val="1B335E"/>
                 </a:solidFill>
@@ -13833,7 +14300,7 @@
               <a:t>Deploys air-gapped. </a:t>
             </a:r>
             <a:r>
-              <a:rPr sz="860" b="0">
+              <a:rPr sz="840" b="0">
                 <a:solidFill>
                   <a:srgbClr val="54627A"/>
                 </a:solidFill>
@@ -13848,11 +14315,11 @@
                 <a:spcPts val="0"/>
               </a:spcBef>
               <a:spcAft>
-                <a:spcPts val="550"/>
-              </a:spcAft>
-            </a:pPr>
-            <a:r>
-              <a:rPr sz="860" b="1">
+                <a:spcPts val="459"/>
+              </a:spcAft>
+            </a:pPr>
+            <a:r>
+              <a:rPr sz="840" b="1">
                 <a:solidFill>
                   <a:srgbClr val="1B335E"/>
                 </a:solidFill>
@@ -13861,7 +14328,7 @@
               <a:t>Drops in beside existing flows. </a:t>
             </a:r>
             <a:r>
-              <a:rPr sz="860" b="0">
+              <a:rPr sz="840" b="0">
                 <a:solidFill>
                   <a:srgbClr val="54627A"/>
                 </a:solidFill>
@@ -13976,7 +14443,7 @@
         <p:spPr>
           <a:xfrm>
             <a:off x="4251960" y="1572768"/>
-            <a:ext cx="3685032" cy="1975104"/>
+            <a:ext cx="3685032" cy="1645920"/>
           </a:xfrm>
           <a:prstGeom prst="roundRect">
             <a:avLst>
@@ -14024,7 +14491,7 @@
         <p:spPr>
           <a:xfrm>
             <a:off x="4398264" y="1682496"/>
-            <a:ext cx="3392424" cy="1783080"/>
+            <a:ext cx="3392424" cy="1481328"/>
           </a:xfrm>
           <a:prstGeom prst="rect">
             <a:avLst/>
@@ -14042,11 +14509,11 @@
                 <a:spcPts val="0"/>
               </a:spcBef>
               <a:spcAft>
-                <a:spcPts val="550"/>
-              </a:spcAft>
-            </a:pPr>
-            <a:r>
-              <a:rPr sz="860" b="1">
+                <a:spcPts val="459"/>
+              </a:spcAft>
+            </a:pPr>
+            <a:r>
+              <a:rPr sz="840" b="1">
                 <a:solidFill>
                   <a:srgbClr val="A86A08"/>
                 </a:solidFill>
@@ -14055,7 +14522,7 @@
               <a:t>Carrier fragility. </a:t>
             </a:r>
             <a:r>
-              <a:rPr sz="860" b="0">
+              <a:rPr sz="840" b="0">
                 <a:solidFill>
                   <a:srgbClr val="54627A"/>
                 </a:solidFill>
@@ -14070,11 +14537,11 @@
                 <a:spcPts val="0"/>
               </a:spcBef>
               <a:spcAft>
-                <a:spcPts val="550"/>
-              </a:spcAft>
-            </a:pPr>
-            <a:r>
-              <a:rPr sz="860" b="1">
+                <a:spcPts val="459"/>
+              </a:spcAft>
+            </a:pPr>
+            <a:r>
+              <a:rPr sz="840" b="1">
                 <a:solidFill>
                   <a:srgbClr val="A86A08"/>
                 </a:solidFill>
@@ -14083,7 +14550,7 @@
               <a:t>Word insertion desynchronises. </a:t>
             </a:r>
             <a:r>
-              <a:rPr sz="860" b="0">
+              <a:rPr sz="840" b="0">
                 <a:solidFill>
                   <a:srgbClr val="54627A"/>
                 </a:solidFill>
@@ -14098,11 +14565,11 @@
                 <a:spcPts val="0"/>
               </a:spcBef>
               <a:spcAft>
-                <a:spcPts val="550"/>
-              </a:spcAft>
-            </a:pPr>
-            <a:r>
-              <a:rPr sz="860" b="1">
+                <a:spcPts val="459"/>
+              </a:spcAft>
+            </a:pPr>
+            <a:r>
+              <a:rPr sz="840" b="1">
                 <a:solidFill>
                   <a:srgbClr val="A86A08"/>
                 </a:solidFill>
@@ -14111,7 +14578,7 @@
               <a:t>Short documents, weaker codes. </a:t>
             </a:r>
             <a:r>
-              <a:rPr sz="860" b="0">
+              <a:rPr sz="840" b="0">
                 <a:solidFill>
                   <a:srgbClr val="54627A"/>
                 </a:solidFill>
@@ -14126,11 +14593,11 @@
                 <a:spcPts val="0"/>
               </a:spcBef>
               <a:spcAft>
-                <a:spcPts val="550"/>
-              </a:spcAft>
-            </a:pPr>
-            <a:r>
-              <a:rPr sz="860" b="1">
+                <a:spcPts val="459"/>
+              </a:spcAft>
+            </a:pPr>
+            <a:r>
+              <a:rPr sz="840" b="1">
                 <a:solidFill>
                   <a:srgbClr val="A86A08"/>
                 </a:solidFill>
@@ -14139,7 +14606,7 @@
               <a:t>Unframeability. </a:t>
             </a:r>
             <a:r>
-              <a:rPr sz="860" b="0">
+              <a:rPr sz="840" b="0">
                 <a:solidFill>
                   <a:srgbClr val="54627A"/>
                 </a:solidFill>
@@ -14154,11 +14621,11 @@
                 <a:spcPts val="0"/>
               </a:spcBef>
               <a:spcAft>
-                <a:spcPts val="550"/>
-              </a:spcAft>
-            </a:pPr>
-            <a:r>
-              <a:rPr sz="860" b="1">
+                <a:spcPts val="459"/>
+              </a:spcAft>
+            </a:pPr>
+            <a:r>
+              <a:rPr sz="840" b="1">
                 <a:solidFill>
                   <a:srgbClr val="A86A08"/>
                 </a:solidFill>
@@ -14167,7 +14634,7 @@
               <a:t>Collusion. </a:t>
             </a:r>
             <a:r>
-              <a:rPr sz="860" b="0">
+              <a:rPr sz="840" b="0">
                 <a:solidFill>
                   <a:srgbClr val="54627A"/>
                 </a:solidFill>
@@ -14282,7 +14749,7 @@
         <p:spPr>
           <a:xfrm>
             <a:off x="8138160" y="1572768"/>
-            <a:ext cx="3685032" cy="1975104"/>
+            <a:ext cx="3685032" cy="1645920"/>
           </a:xfrm>
           <a:prstGeom prst="roundRect">
             <a:avLst>
@@ -14330,7 +14797,7 @@
         <p:spPr>
           <a:xfrm>
             <a:off x="8284464" y="1682496"/>
-            <a:ext cx="3392424" cy="1783080"/>
+            <a:ext cx="3392424" cy="1481328"/>
           </a:xfrm>
           <a:prstGeom prst="rect">
             <a:avLst/>
@@ -14348,11 +14815,11 @@
                 <a:spcPts val="0"/>
               </a:spcBef>
               <a:spcAft>
-                <a:spcPts val="550"/>
-              </a:spcAft>
-            </a:pPr>
-            <a:r>
-              <a:rPr sz="860" b="1">
+                <a:spcPts val="459"/>
+              </a:spcAft>
+            </a:pPr>
+            <a:r>
+              <a:rPr sz="840" b="1">
                 <a:solidFill>
                   <a:srgbClr val="158A5A"/>
                 </a:solidFill>
@@ -14361,7 +14828,7 @@
               <a:t>Publish the attacks that win. </a:t>
             </a:r>
             <a:r>
-              <a:rPr sz="860" b="0">
+              <a:rPr sz="840" b="0">
                 <a:solidFill>
                   <a:srgbClr val="54627A"/>
                 </a:solidFill>
@@ -14376,11 +14843,11 @@
                 <a:spcPts val="0"/>
               </a:spcBef>
               <a:spcAft>
-                <a:spcPts val="550"/>
-              </a:spcAft>
-            </a:pPr>
-            <a:r>
-              <a:rPr sz="860" b="1">
+                <a:spcPts val="459"/>
+              </a:spcAft>
+            </a:pPr>
+            <a:r>
+              <a:rPr sz="840" b="1">
                 <a:solidFill>
                   <a:srgbClr val="158A5A"/>
                 </a:solidFill>
@@ -14389,7 +14856,7 @@
               <a:t>Fail safe, not loud. </a:t>
             </a:r>
             <a:r>
-              <a:rPr sz="860" b="0">
+              <a:rPr sz="840" b="0">
                 <a:solidFill>
                   <a:srgbClr val="54627A"/>
                 </a:solidFill>
@@ -14404,11 +14871,11 @@
                 <a:spcPts val="0"/>
               </a:spcBef>
               <a:spcAft>
-                <a:spcPts val="550"/>
-              </a:spcAft>
-            </a:pPr>
-            <a:r>
-              <a:rPr sz="860" b="1">
+                <a:spcPts val="459"/>
+              </a:spcAft>
+            </a:pPr>
+            <a:r>
+              <a:rPr sz="840" b="1">
                 <a:solidFill>
                   <a:srgbClr val="158A5A"/>
                 </a:solidFill>
@@ -14417,7 +14884,7 @@
               <a:t>Report the reachable bound. </a:t>
             </a:r>
             <a:r>
-              <a:rPr sz="860" b="0">
+              <a:rPr sz="840" b="0">
                 <a:solidFill>
                   <a:srgbClr val="54627A"/>
                 </a:solidFill>
@@ -14432,11 +14899,11 @@
                 <a:spcPts val="0"/>
               </a:spcBef>
               <a:spcAft>
-                <a:spcPts val="550"/>
-              </a:spcAft>
-            </a:pPr>
-            <a:r>
-              <a:rPr sz="860" b="1">
+                <a:spcPts val="459"/>
+              </a:spcAft>
+            </a:pPr>
+            <a:r>
+              <a:rPr sz="840" b="1">
                 <a:solidFill>
                   <a:srgbClr val="158A5A"/>
                 </a:solidFill>
@@ -14445,7 +14912,7 @@
               <a:t>Tardos codes for collusion. </a:t>
             </a:r>
             <a:r>
-              <a:rPr sz="860" b="0">
+              <a:rPr sz="840" b="0">
                 <a:solidFill>
                   <a:srgbClr val="54627A"/>
                 </a:solidFill>
@@ -14460,11 +14927,11 @@
                 <a:spcPts val="0"/>
               </a:spcBef>
               <a:spcAft>
-                <a:spcPts val="550"/>
-              </a:spcAft>
-            </a:pPr>
-            <a:r>
-              <a:rPr sz="860" b="1">
+                <a:spcPts val="459"/>
+              </a:spcAft>
+            </a:pPr>
+            <a:r>
+              <a:rPr sz="840" b="1">
                 <a:solidFill>
                   <a:srgbClr val="158A5A"/>
                 </a:solidFill>
@@ -14473,7 +14940,7 @@
               <a:t>Content-anchored slots. </a:t>
             </a:r>
             <a:r>
-              <a:rPr sz="860" b="0">
+              <a:rPr sz="840" b="0">
                 <a:solidFill>
                   <a:srgbClr val="54627A"/>
                 </a:solidFill>
@@ -14492,8 +14959,8 @@
         </p:nvSpPr>
         <p:spPr>
           <a:xfrm>
-            <a:off x="365760" y="3730752"/>
-            <a:ext cx="11457432" cy="1170432"/>
+            <a:off x="365760" y="3383280"/>
+            <a:ext cx="11457432" cy="1700784"/>
           </a:xfrm>
           <a:prstGeom prst="roundRect">
             <a:avLst>
@@ -14538,8 +15005,8 @@
         </p:nvSpPr>
         <p:spPr>
           <a:xfrm>
-            <a:off x="566928" y="3840480"/>
-            <a:ext cx="3657600" cy="182880"/>
+            <a:off x="566928" y="3474720"/>
+            <a:ext cx="3950208" cy="182880"/>
           </a:xfrm>
           <a:prstGeom prst="rect">
             <a:avLst/>
@@ -14561,27 +15028,51 @@
               </a:spcAft>
             </a:pPr>
             <a:r>
-              <a:rPr sz="780" b="1" i="0" spc="120">
+              <a:rPr sz="780" b="1" i="0">
                 <a:solidFill>
                   <a:srgbClr val="F2790D"/>
                 </a:solidFill>
                 <a:latin typeface="Calibri"/>
               </a:rPr>
-              <a:t>MEASURED, NOT ASSERTED</a:t>
-            </a:r>
-          </a:p>
-        </p:txBody>
-      </p:sp>
-      <p:sp>
-        <p:nvSpPr>
-          <p:cNvPr id="17424" name="TextBox 17423"/>
+              <a:t>Destroy the marks and it goes quiet, never wrong</a:t>
+            </a:r>
+          </a:p>
+        </p:txBody>
+      </p:sp>
+      <p:pic>
+        <p:nvPicPr>
+          <p:cNvPr id="17424" name="Picture 17423" descr="erasure.png"/>
+          <p:cNvPicPr>
+            <a:picLocks noChangeAspect="1"/>
+          </p:cNvPicPr>
+          <p:nvPr/>
+        </p:nvPicPr>
+        <p:blipFill>
+          <a:blip r:embed="rId4"/>
+          <a:stretch>
+            <a:fillRect/>
+          </a:stretch>
+        </p:blipFill>
+        <p:spPr>
+          <a:xfrm>
+            <a:off x="566928" y="3639312"/>
+            <a:ext cx="3950208" cy="1298448"/>
+          </a:xfrm>
+          <a:prstGeom prst="rect">
+            <a:avLst/>
+          </a:prstGeom>
+        </p:spPr>
+      </p:pic>
+      <p:sp>
+        <p:nvSpPr>
+          <p:cNvPr id="17425" name="TextBox 17424"/>
           <p:cNvSpPr txBox="1"/>
           <p:nvPr/>
         </p:nvSpPr>
         <p:spPr>
           <a:xfrm>
-            <a:off x="566928" y="4114800"/>
-            <a:ext cx="1842516" cy="713232"/>
+            <a:off x="4663440" y="3474720"/>
+            <a:ext cx="3950208" cy="182880"/>
           </a:xfrm>
           <a:prstGeom prst="rect">
             <a:avLst/>
@@ -14594,56 +15085,60 @@
           </a:bodyPr>
           <a:lstStyle/>
           <a:p>
-            <a:pPr algn="ctr">
-              <a:spcBef>
-                <a:spcPts val="0"/>
-              </a:spcBef>
-              <a:spcAft>
-                <a:spcPts val="100"/>
-              </a:spcAft>
-            </a:pPr>
-            <a:r>
-              <a:rPr sz="1800" b="1" i="0">
-                <a:solidFill>
-                  <a:srgbClr val="22B173"/>
-                </a:solidFill>
-                <a:latin typeface="Calibri"/>
-              </a:rPr>
-              <a:t>100%</a:t>
-            </a:r>
-          </a:p>
-          <a:p>
-            <a:pPr algn="ctr">
-              <a:spcBef>
-                <a:spcPts val="0"/>
-              </a:spcBef>
-              <a:spcAft>
-                <a:spcPts val="0"/>
-              </a:spcAft>
-            </a:pPr>
-            <a:r>
-              <a:rPr sz="700" b="0" i="0">
-                <a:solidFill>
-                  <a:srgbClr val="A9BEDF"/>
-                </a:solidFill>
-                <a:latin typeface="Calibri"/>
-              </a:rPr>
-              <a:t>coalition of 8 traced at the
-prescribed code length</a:t>
-            </a:r>
-          </a:p>
-        </p:txBody>
-      </p:sp>
-      <p:sp>
-        <p:nvSpPr>
-          <p:cNvPr id="17425" name="TextBox 17424"/>
+            <a:pPr algn="l">
+              <a:spcBef>
+                <a:spcPts val="0"/>
+              </a:spcBef>
+              <a:spcAft>
+                <a:spcPts val="0"/>
+              </a:spcAft>
+            </a:pPr>
+            <a:r>
+              <a:rPr sz="780" b="1" i="0">
+                <a:solidFill>
+                  <a:srgbClr val="F2790D"/>
+                </a:solidFill>
+                <a:latin typeface="Calibri"/>
+              </a:rPr>
+              <a:t>Colluders splicing copies, against the theory's own bound</a:t>
+            </a:r>
+          </a:p>
+        </p:txBody>
+      </p:sp>
+      <p:pic>
+        <p:nvPicPr>
+          <p:cNvPr id="17426" name="Picture 17425" descr="collusion.png"/>
+          <p:cNvPicPr>
+            <a:picLocks noChangeAspect="1"/>
+          </p:cNvPicPr>
+          <p:nvPr/>
+        </p:nvPicPr>
+        <p:blipFill>
+          <a:blip r:embed="rId5"/>
+          <a:stretch>
+            <a:fillRect/>
+          </a:stretch>
+        </p:blipFill>
+        <p:spPr>
+          <a:xfrm>
+            <a:off x="4663440" y="3639312"/>
+            <a:ext cx="3950208" cy="1298448"/>
+          </a:xfrm>
+          <a:prstGeom prst="rect">
+            <a:avLst/>
+          </a:prstGeom>
+        </p:spPr>
+      </p:pic>
+      <p:sp>
+        <p:nvSpPr>
+          <p:cNvPr id="17427" name="TextBox 17426"/>
           <p:cNvSpPr txBox="1"/>
           <p:nvPr/>
         </p:nvSpPr>
         <p:spPr>
           <a:xfrm>
-            <a:off x="2409444" y="4114800"/>
-            <a:ext cx="1842516" cy="713232"/>
+            <a:off x="8869680" y="3474720"/>
+            <a:ext cx="2834640" cy="182880"/>
           </a:xfrm>
           <a:prstGeom prst="rect">
             <a:avLst/>
@@ -14656,56 +15151,36 @@
           </a:bodyPr>
           <a:lstStyle/>
           <a:p>
-            <a:pPr algn="ctr">
-              <a:spcBef>
-                <a:spcPts val="0"/>
-              </a:spcBef>
-              <a:spcAft>
-                <a:spcPts val="100"/>
-              </a:spcAft>
-            </a:pPr>
-            <a:r>
-              <a:rPr sz="1800" b="1" i="0">
-                <a:solidFill>
-                  <a:srgbClr val="22B173"/>
-                </a:solidFill>
-                <a:latin typeface="Calibri"/>
-              </a:rPr>
-              <a:t>0.0%</a:t>
-            </a:r>
-          </a:p>
-          <a:p>
-            <a:pPr algn="ctr">
-              <a:spcBef>
-                <a:spcPts val="0"/>
-              </a:spcBef>
-              <a:spcAft>
-                <a:spcPts val="0"/>
-              </a:spcAft>
-            </a:pPr>
-            <a:r>
-              <a:rPr sz="700" b="0" i="0">
-                <a:solidFill>
-                  <a:srgbClr val="A9BEDF"/>
-                </a:solidFill>
-                <a:latin typeface="Calibri"/>
-              </a:rPr>
-              <a:t>misidentification across a
-0–95% erasure sweep</a:t>
-            </a:r>
-          </a:p>
-        </p:txBody>
-      </p:sp>
-      <p:sp>
-        <p:nvSpPr>
-          <p:cNvPr id="17426" name="TextBox 17425"/>
+            <a:pPr algn="l">
+              <a:spcBef>
+                <a:spcPts val="0"/>
+              </a:spcBef>
+              <a:spcAft>
+                <a:spcPts val="0"/>
+              </a:spcAft>
+            </a:pPr>
+            <a:r>
+              <a:rPr sz="780" b="1" i="0" spc="120">
+                <a:solidFill>
+                  <a:srgbClr val="F2790D"/>
+                </a:solidFill>
+                <a:latin typeface="Calibri"/>
+              </a:rPr>
+              <a:t>MEASURED, NOT ASSERTED</a:t>
+            </a:r>
+          </a:p>
+        </p:txBody>
+      </p:sp>
+      <p:sp>
+        <p:nvSpPr>
+          <p:cNvPr id="17428" name="TextBox 17427"/>
           <p:cNvSpPr txBox="1"/>
           <p:nvPr/>
         </p:nvSpPr>
         <p:spPr>
           <a:xfrm>
-            <a:off x="4251960" y="4114800"/>
-            <a:ext cx="1842516" cy="713232"/>
+            <a:off x="8869680" y="3694176"/>
+            <a:ext cx="2834640" cy="402336"/>
           </a:xfrm>
           <a:prstGeom prst="rect">
             <a:avLst/>
@@ -14718,56 +15193,55 @@
           </a:bodyPr>
           <a:lstStyle/>
           <a:p>
-            <a:pPr algn="ctr">
-              <a:spcBef>
-                <a:spcPts val="0"/>
-              </a:spcBef>
-              <a:spcAft>
-                <a:spcPts val="100"/>
-              </a:spcAft>
-            </a:pPr>
-            <a:r>
-              <a:rPr sz="1800" b="1" i="0">
+            <a:pPr algn="l">
+              <a:spcBef>
+                <a:spcPts val="0"/>
+              </a:spcBef>
+              <a:spcAft>
+                <a:spcPts val="0"/>
+              </a:spcAft>
+            </a:pPr>
+            <a:r>
+              <a:rPr sz="1500" b="1" i="0">
                 <a:solidFill>
                   <a:srgbClr val="FFFFFF"/>
                 </a:solidFill>
                 <a:latin typeface="Calibri"/>
               </a:rPr>
-              <a:t>2.8e-59</a:t>
-            </a:r>
-          </a:p>
-          <a:p>
-            <a:pPr algn="ctr">
-              <a:spcBef>
-                <a:spcPts val="0"/>
-              </a:spcBef>
-              <a:spcAft>
-                <a:spcPts val="0"/>
-              </a:spcAft>
-            </a:pPr>
-            <a:r>
-              <a:rPr sz="700" b="0" i="0">
+              <a:t>2.8 × 10⁻⁵⁹</a:t>
+            </a:r>
+          </a:p>
+          <a:p>
+            <a:pPr algn="l">
+              <a:spcBef>
+                <a:spcPts val="0"/>
+              </a:spcBef>
+              <a:spcAft>
+                <a:spcPts val="0"/>
+              </a:spcAft>
+            </a:pPr>
+            <a:r>
+              <a:rPr sz="690" b="0" i="0">
                 <a:solidFill>
                   <a:srgbClr val="A9BEDF"/>
                 </a:solidFill>
                 <a:latin typeface="Calibri"/>
               </a:rPr>
-              <a:t>provable false-accusation
-bound on the live demo</a:t>
-            </a:r>
-          </a:p>
-        </p:txBody>
-      </p:sp>
-      <p:sp>
-        <p:nvSpPr>
-          <p:cNvPr id="17427" name="TextBox 17426"/>
+              <a:t>provable false-accusation bound on the live demo</a:t>
+            </a:r>
+          </a:p>
+        </p:txBody>
+      </p:sp>
+      <p:sp>
+        <p:nvSpPr>
+          <p:cNvPr id="17429" name="TextBox 17428"/>
           <p:cNvSpPr txBox="1"/>
           <p:nvPr/>
         </p:nvSpPr>
         <p:spPr>
           <a:xfrm>
-            <a:off x="6094476" y="4114800"/>
-            <a:ext cx="1842516" cy="713232"/>
+            <a:off x="8869680" y="4114800"/>
+            <a:ext cx="2834640" cy="402336"/>
           </a:xfrm>
           <a:prstGeom prst="rect">
             <a:avLst/>
@@ -14780,56 +15254,55 @@
           </a:bodyPr>
           <a:lstStyle/>
           <a:p>
-            <a:pPr algn="ctr">
-              <a:spcBef>
-                <a:spcPts val="0"/>
-              </a:spcBef>
-              <a:spcAft>
-                <a:spcPts val="100"/>
-              </a:spcAft>
-            </a:pPr>
-            <a:r>
-              <a:rPr sz="1800" b="1" i="0">
-                <a:solidFill>
-                  <a:srgbClr val="22B173"/>
-                </a:solidFill>
-                <a:latin typeface="Calibri"/>
-              </a:rPr>
-              <a:t>0 / 10,000</a:t>
-            </a:r>
-          </a:p>
-          <a:p>
-            <a:pPr algn="ctr">
-              <a:spcBef>
-                <a:spcPts val="0"/>
-              </a:spcBef>
-              <a:spcAft>
-                <a:spcPts val="0"/>
-              </a:spcAft>
-            </a:pPr>
-            <a:r>
-              <a:rPr sz="700" b="0" i="0">
+            <a:pPr algn="l">
+              <a:spcBef>
+                <a:spcPts val="0"/>
+              </a:spcBef>
+              <a:spcAft>
+                <a:spcPts val="0"/>
+              </a:spcAft>
+            </a:pPr>
+            <a:r>
+              <a:rPr sz="1500" b="1" i="0">
+                <a:solidFill>
+                  <a:srgbClr val="F2790D"/>
+                </a:solidFill>
+                <a:latin typeface="Calibri"/>
+              </a:rPr>
+              <a:t>4</a:t>
+            </a:r>
+          </a:p>
+          <a:p>
+            <a:pPr algn="l">
+              <a:spcBef>
+                <a:spcPts val="0"/>
+              </a:spcBef>
+              <a:spcAft>
+                <a:spcPts val="0"/>
+              </a:spcAft>
+            </a:pPr>
+            <a:r>
+              <a:rPr sz="690" b="0" i="0">
                 <a:solidFill>
                   <a:srgbClr val="A9BEDF"/>
                 </a:solidFill>
                 <a:latin typeface="Calibri"/>
               </a:rPr>
-              <a:t>innocent trials accused
-at α ≤ 1e-5</a:t>
-            </a:r>
-          </a:p>
-        </p:txBody>
-      </p:sp>
-      <p:sp>
-        <p:nvSpPr>
-          <p:cNvPr id="17428" name="TextBox 17427"/>
+              <a:t>attacks that defeat the carrier — every one published</a:t>
+            </a:r>
+          </a:p>
+        </p:txBody>
+      </p:sp>
+      <p:sp>
+        <p:nvSpPr>
+          <p:cNvPr id="17430" name="TextBox 17429"/>
           <p:cNvSpPr txBox="1"/>
           <p:nvPr/>
         </p:nvSpPr>
         <p:spPr>
           <a:xfrm>
-            <a:off x="7936992" y="4114800"/>
-            <a:ext cx="1842516" cy="713232"/>
+            <a:off x="8869680" y="4535424"/>
+            <a:ext cx="2834640" cy="402336"/>
           </a:xfrm>
           <a:prstGeom prst="rect">
             <a:avLst/>
@@ -14842,117 +15315,54 @@
           </a:bodyPr>
           <a:lstStyle/>
           <a:p>
-            <a:pPr algn="ctr">
-              <a:spcBef>
-                <a:spcPts val="0"/>
-              </a:spcBef>
-              <a:spcAft>
-                <a:spcPts val="100"/>
-              </a:spcAft>
-            </a:pPr>
-            <a:r>
-              <a:rPr sz="1800" b="1" i="0">
-                <a:solidFill>
-                  <a:srgbClr val="F2790D"/>
-                </a:solidFill>
-                <a:latin typeface="Calibri"/>
-              </a:rPr>
-              <a:t>4</a:t>
-            </a:r>
-          </a:p>
-          <a:p>
-            <a:pPr algn="ctr">
-              <a:spcBef>
-                <a:spcPts val="0"/>
-              </a:spcBef>
-              <a:spcAft>
-                <a:spcPts val="0"/>
-              </a:spcAft>
-            </a:pPr>
-            <a:r>
-              <a:rPr sz="700" b="0" i="0">
+            <a:pPr algn="l">
+              <a:spcBef>
+                <a:spcPts val="0"/>
+              </a:spcBef>
+              <a:spcAft>
+                <a:spcPts val="0"/>
+              </a:spcAft>
+            </a:pPr>
+            <a:r>
+              <a:rPr sz="1500" b="1" i="0">
+                <a:solidFill>
+                  <a:srgbClr val="22B173"/>
+                </a:solidFill>
+                <a:latin typeface="Calibri"/>
+              </a:rPr>
+              <a:t>163</a:t>
+            </a:r>
+          </a:p>
+          <a:p>
+            <a:pPr algn="l">
+              <a:spcBef>
+                <a:spcPts val="0"/>
+              </a:spcBef>
+              <a:spcAft>
+                <a:spcPts val="0"/>
+              </a:spcAft>
+            </a:pPr>
+            <a:r>
+              <a:rPr sz="690" b="0" i="0">
                 <a:solidFill>
                   <a:srgbClr val="A9BEDF"/>
                 </a:solidFill>
                 <a:latin typeface="Calibri"/>
               </a:rPr>
-              <a:t>attacks that defeat the
-carrier — all published</a:t>
-            </a:r>
-          </a:p>
-        </p:txBody>
-      </p:sp>
-      <p:sp>
-        <p:nvSpPr>
-          <p:cNvPr id="17429" name="TextBox 17428"/>
-          <p:cNvSpPr txBox="1"/>
-          <p:nvPr/>
-        </p:nvSpPr>
-        <p:spPr>
-          <a:xfrm>
-            <a:off x="9779508" y="4114800"/>
-            <a:ext cx="1842516" cy="713232"/>
-          </a:xfrm>
-          <a:prstGeom prst="rect">
-            <a:avLst/>
-          </a:prstGeom>
-          <a:noFill/>
-        </p:spPr>
-        <p:txBody>
-          <a:bodyPr wrap="square" anchor="t" lIns="0" rIns="0" tIns="0" bIns="0">
-            <a:spAutoFit/>
-          </a:bodyPr>
-          <a:lstStyle/>
-          <a:p>
-            <a:pPr algn="ctr">
-              <a:spcBef>
-                <a:spcPts val="0"/>
-              </a:spcBef>
-              <a:spcAft>
-                <a:spcPts val="100"/>
-              </a:spcAft>
-            </a:pPr>
-            <a:r>
-              <a:rPr sz="1800" b="1" i="0">
-                <a:solidFill>
-                  <a:srgbClr val="FFFFFF"/>
-                </a:solidFill>
-                <a:latin typeface="Calibri"/>
-              </a:rPr>
-              <a:t>163</a:t>
-            </a:r>
-          </a:p>
-          <a:p>
-            <a:pPr algn="ctr">
-              <a:spcBef>
-                <a:spcPts val="0"/>
-              </a:spcBef>
-              <a:spcAft>
-                <a:spcPts val="0"/>
-              </a:spcAft>
-            </a:pPr>
-            <a:r>
-              <a:rPr sz="700" b="0" i="0">
-                <a:solidFill>
-                  <a:srgbClr val="A9BEDF"/>
-                </a:solidFill>
-                <a:latin typeface="Calibri"/>
-              </a:rPr>
-              <a:t>automated tests,
-all passing</a:t>
-            </a:r>
-          </a:p>
-        </p:txBody>
-      </p:sp>
-      <p:sp>
-        <p:nvSpPr>
-          <p:cNvPr id="17430" name="Hexagon 17429"/>
+              <a:t>automated tests, all passing</a:t>
+            </a:r>
+          </a:p>
+        </p:txBody>
+      </p:sp>
+      <p:sp>
+        <p:nvSpPr>
+          <p:cNvPr id="17431" name="Hexagon 17430"/>
           <p:cNvSpPr/>
           <p:nvPr/>
         </p:nvSpPr>
         <p:spPr>
           <a:xfrm rot="5400000">
-            <a:off x="365760" y="5056632"/>
+            <a:off x="365760" y="5202936"/>
             <a:ext cx="274320" cy="241401"/>
           </a:xfrm>
           <a:prstGeom prst="hexagon">
@@ -14999,13 +15409,13 @@
       </p:sp>
       <p:sp>
         <p:nvSpPr>
-          <p:cNvPr id="17431" name="TextBox 17430"/>
+          <p:cNvPr id="17432" name="TextBox 17431"/>
           <p:cNvSpPr txBox="1"/>
           <p:nvPr/>
         </p:nvSpPr>
         <p:spPr>
           <a:xfrm>
-            <a:off x="749808" y="5038344"/>
+            <a:off x="749808" y="5184648"/>
             <a:ext cx="11073384" cy="310896"/>
           </a:xfrm>
           <a:prstGeom prst="rect">
@@ -15041,14 +15451,14 @@
       </p:sp>
       <p:sp>
         <p:nvSpPr>
-          <p:cNvPr id="17432" name="Rounded Rectangle 17431"/>
+          <p:cNvPr id="17433" name="Rounded Rectangle 17432"/>
           <p:cNvSpPr/>
           <p:nvPr/>
         </p:nvSpPr>
         <p:spPr>
           <a:xfrm>
-            <a:off x="365760" y="5431536"/>
-            <a:ext cx="2631186" cy="822960"/>
+            <a:off x="365760" y="5522976"/>
+            <a:ext cx="2631186" cy="749808"/>
           </a:xfrm>
           <a:prstGeom prst="roundRect">
             <a:avLst>
@@ -15089,14 +15499,14 @@
       </p:sp>
       <p:sp>
         <p:nvSpPr>
-          <p:cNvPr id="17433" name="TextBox 17432"/>
+          <p:cNvPr id="17434" name="TextBox 17433"/>
           <p:cNvSpPr txBox="1"/>
           <p:nvPr/>
         </p:nvSpPr>
         <p:spPr>
           <a:xfrm>
-            <a:off x="512064" y="5522976"/>
-            <a:ext cx="2338578" cy="658368"/>
+            <a:off x="512064" y="5614416"/>
+            <a:ext cx="2338578" cy="603504"/>
           </a:xfrm>
           <a:prstGeom prst="rect">
             <a:avLst/>
@@ -15169,13 +15579,13 @@
       </p:sp>
       <p:cxnSp>
         <p:nvCxnSpPr>
-          <p:cNvPr id="17434" name="Connector 17433"/>
+          <p:cNvPr id="17435" name="Connector 17434"/>
           <p:cNvCxnSpPr/>
           <p:nvPr/>
         </p:nvCxnSpPr>
         <p:spPr>
           <a:xfrm>
-            <a:off x="3042665" y="5843016"/>
+            <a:off x="3042665" y="5897880"/>
             <a:ext cx="219457" cy="0"/>
           </a:xfrm>
           <a:prstGeom prst="line">
@@ -15205,14 +15615,14 @@
       </p:cxnSp>
       <p:sp>
         <p:nvSpPr>
-          <p:cNvPr id="17435" name="Rounded Rectangle 17434"/>
+          <p:cNvPr id="17436" name="Rounded Rectangle 17435"/>
           <p:cNvSpPr/>
           <p:nvPr/>
         </p:nvSpPr>
         <p:spPr>
           <a:xfrm>
-            <a:off x="3307841" y="5431536"/>
-            <a:ext cx="2631186" cy="822960"/>
+            <a:off x="3307841" y="5522976"/>
+            <a:ext cx="2631186" cy="749808"/>
           </a:xfrm>
           <a:prstGeom prst="roundRect">
             <a:avLst>
@@ -15253,14 +15663,14 @@
       </p:sp>
       <p:sp>
         <p:nvSpPr>
-          <p:cNvPr id="17436" name="TextBox 17435"/>
+          <p:cNvPr id="17437" name="TextBox 17436"/>
           <p:cNvSpPr txBox="1"/>
           <p:nvPr/>
         </p:nvSpPr>
         <p:spPr>
           <a:xfrm>
-            <a:off x="3454146" y="5522976"/>
-            <a:ext cx="2338578" cy="658368"/>
+            <a:off x="3454146" y="5614416"/>
+            <a:ext cx="2338578" cy="603504"/>
           </a:xfrm>
           <a:prstGeom prst="rect">
             <a:avLst/>
@@ -15333,13 +15743,13 @@
       </p:sp>
       <p:cxnSp>
         <p:nvCxnSpPr>
-          <p:cNvPr id="17437" name="Connector 17436"/>
+          <p:cNvPr id="17438" name="Connector 17437"/>
           <p:cNvCxnSpPr/>
           <p:nvPr/>
         </p:nvCxnSpPr>
         <p:spPr>
           <a:xfrm>
-            <a:off x="5984747" y="5843016"/>
+            <a:off x="5984747" y="5897880"/>
             <a:ext cx="219456" cy="0"/>
           </a:xfrm>
           <a:prstGeom prst="line">
@@ -15369,14 +15779,14 @@
       </p:cxnSp>
       <p:sp>
         <p:nvSpPr>
-          <p:cNvPr id="17438" name="Rounded Rectangle 17437"/>
+          <p:cNvPr id="17439" name="Rounded Rectangle 17438"/>
           <p:cNvSpPr/>
           <p:nvPr/>
         </p:nvSpPr>
         <p:spPr>
           <a:xfrm>
-            <a:off x="6249923" y="5431536"/>
-            <a:ext cx="2631186" cy="822960"/>
+            <a:off x="6249923" y="5522976"/>
+            <a:ext cx="2631186" cy="749808"/>
           </a:xfrm>
           <a:prstGeom prst="roundRect">
             <a:avLst>
@@ -15417,14 +15827,14 @@
       </p:sp>
       <p:sp>
         <p:nvSpPr>
-          <p:cNvPr id="17439" name="TextBox 17438"/>
+          <p:cNvPr id="17440" name="TextBox 17439"/>
           <p:cNvSpPr txBox="1"/>
           <p:nvPr/>
         </p:nvSpPr>
         <p:spPr>
           <a:xfrm>
-            <a:off x="6396227" y="5522976"/>
-            <a:ext cx="2338578" cy="658368"/>
+            <a:off x="6396227" y="5614416"/>
+            <a:ext cx="2338578" cy="603504"/>
           </a:xfrm>
           <a:prstGeom prst="rect">
             <a:avLst/>
@@ -15497,13 +15907,13 @@
       </p:sp>
       <p:cxnSp>
         <p:nvCxnSpPr>
-          <p:cNvPr id="17440" name="Connector 17439"/>
+          <p:cNvPr id="17441" name="Connector 17440"/>
           <p:cNvCxnSpPr/>
           <p:nvPr/>
         </p:nvCxnSpPr>
         <p:spPr>
           <a:xfrm>
-            <a:off x="8926830" y="5843016"/>
+            <a:off x="8926830" y="5897880"/>
             <a:ext cx="219456" cy="0"/>
           </a:xfrm>
           <a:prstGeom prst="line">
@@ -15533,14 +15943,14 @@
       </p:cxnSp>
       <p:sp>
         <p:nvSpPr>
-          <p:cNvPr id="17441" name="Rounded Rectangle 17440"/>
+          <p:cNvPr id="17442" name="Rounded Rectangle 17441"/>
           <p:cNvSpPr/>
           <p:nvPr/>
         </p:nvSpPr>
         <p:spPr>
           <a:xfrm>
-            <a:off x="9192005" y="5431536"/>
-            <a:ext cx="2631186" cy="822960"/>
+            <a:off x="9192005" y="5522976"/>
+            <a:ext cx="2631186" cy="749808"/>
           </a:xfrm>
           <a:prstGeom prst="roundRect">
             <a:avLst>
@@ -15581,14 +15991,14 @@
       </p:sp>
       <p:sp>
         <p:nvSpPr>
-          <p:cNvPr id="17442" name="TextBox 17441"/>
+          <p:cNvPr id="17443" name="TextBox 17442"/>
           <p:cNvSpPr txBox="1"/>
           <p:nvPr/>
         </p:nvSpPr>
         <p:spPr>
           <a:xfrm>
-            <a:off x="9338309" y="5522976"/>
-            <a:ext cx="2338578" cy="658368"/>
+            <a:off x="9338309" y="5614416"/>
+            <a:ext cx="2338578" cy="603504"/>
           </a:xfrm>
           <a:prstGeom prst="rect">
             <a:avLst/>

--- a/ppt/NOX_SIH2026_PQFW.pptx
+++ b/ppt/NOX_SIH2026_PQFW.pptx
@@ -7098,7 +7098,7 @@
                 </a:solidFill>
                 <a:latin typeface="Calibri"/>
               </a:rPr>
-              <a:t>Proposed Solution (Describe your Idea/Solution/Prototype)</a:t>
+              <a:t>Proposed Solution</a:t>
             </a:r>
           </a:p>
         </p:txBody>

--- a/ppt/NOX_SIH2026_PQFW.pptx
+++ b/ppt/NOX_SIH2026_PQFW.pptx
@@ -872,7 +872,7 @@
           <a:lstStyle/>
           <a:p>
             <a:r>
-              <a:t>We are honest about what breaks it. Retyping, OCR and stripping invisible characters defeat the text carrier, and inserting a word desynchronises the slots — all four are measured and published rather than hidden. The point is the failure mode: when an attack wins the system fails to identify anybody. Both curves are drawn straight from the evaluation CSVs. The left one is the whole argument in one picture: as you destroy the marks the green line falls, and the orange line — naming the wrong person — stays flat on zero the entire way. The bottom row is the actual next four steps, not an aspiration.</a:t>
+              <a:t>We are honest about what breaks it. Two attacks still win — stripping invisible characters, and retyping — and both are measured and published rather than hidden. It was four until we anchored slot addresses to the text before them instead of to a position; prepending or deleting one word went from 51% bit error to zero. What is left cannot be fixed by addressing: those two delete the marks rather than move them. The point is the failure mode: when an attack wins the system fails to identify anybody. Both curves are drawn straight from the evaluation CSVs. The left one is the whole argument in one picture: as you destroy the marks the green line falls, and the orange line — naming the wrong person — stays flat on zero the entire way. The bottom row is the actual next four steps, not an aspiration.</a:t>
             </a:r>
           </a:p>
         </p:txBody>
@@ -1218,7 +1218,7 @@
           <a:lstStyle/>
           <a:p>
             <a:r>
-              <a:t>Every requirement in the problem statement, and every one is exercised by an automated test and by a step of the live demo — 163 tests. Two things we do not claim: this proves traceability, not unframeability, because the distributor knows the codewords; and post-quantum asymmetric fingerprinting has no drop-in construction yet, so we say so rather than pretending. Scan the code and try to break it.</a:t>
+              <a:t>Every requirement in the problem statement, and every one is exercised by an automated test and by a step of the live demo — 170 tests. Two things we do not claim: this proves traceability, not unframeability, because the distributor knows the codewords; and post-quantum asymmetric fingerprinting has no drop-in construction yet, so we say so rather than pretending. Scan the code and try to break it.</a:t>
             </a:r>
           </a:p>
         </p:txBody>
@@ -9511,7 +9511,7 @@
                 </a:solidFill>
                 <a:latin typeface="Calibri"/>
               </a:rPr>
-              <a:t>     163 automated tests</a:t>
+              <a:t>     170 automated tests</a:t>
             </a:r>
           </a:p>
         </p:txBody>
@@ -13611,7 +13611,7 @@
                 </a:solidFill>
                 <a:latin typeface="Calibri"/>
               </a:rPr>
-              <a:t>▪  Test-first: 163 tests, including the central claim that a recipient cannot decrypt the other variant.</a:t>
+              <a:t>▪  Test-first: 170 tests, including the central claim that a recipient cannot decrypt the other variant.</a:t>
             </a:r>
           </a:p>
           <a:p>
@@ -13630,7 +13630,7 @@
                 </a:solidFill>
                 <a:latin typeface="Calibri"/>
               </a:rPr>
-              <a:t>▪  Every attack on the carrier measured and published — including the four that defeat it.</a:t>
+              <a:t>▪  Every attack on the carrier measured and published — including the two that still defeat it.</a:t>
             </a:r>
           </a:p>
           <a:p>
@@ -14547,7 +14547,7 @@
                 </a:solidFill>
                 <a:latin typeface="Calibri"/>
               </a:rPr>
-              <a:t>Word insertion desynchronises. </a:t>
+              <a:t>Repeated boilerplate. </a:t>
             </a:r>
             <a:r>
               <a:rPr sz="840" b="0">
@@ -14556,7 +14556,7 @@
                 </a:solidFill>
                 <a:latin typeface="Calibri"/>
               </a:rPr>
-              <a:t>Slot addresses are ordinal, so adding a word shifts every later slot.</a:t>
+              <a:t>A slot anchored to identical text is ambiguous; the tie-break is bounded, so it refuses rather than guesses.</a:t>
             </a:r>
           </a:p>
           <a:p>
@@ -14946,7 +14946,7 @@
                 </a:solidFill>
                 <a:latin typeface="Calibri"/>
               </a:rPr>
-              <a:t>The named next step, replacing ordinal addressing.</a:t>
+              <a:t>Shipped. Addressed by the text before the slot, so an edit elsewhere cannot move it.</a:t>
             </a:r>
           </a:p>
         </p:txBody>
@@ -15269,7 +15269,7 @@
                 </a:solidFill>
                 <a:latin typeface="Calibri"/>
               </a:rPr>
-              <a:t>4</a:t>
+              <a:t>2 of 13</a:t>
             </a:r>
           </a:p>
           <a:p>
@@ -15288,7 +15288,7 @@
                 </a:solidFill>
                 <a:latin typeface="Calibri"/>
               </a:rPr>
-              <a:t>attacks that defeat the carrier — every one published</a:t>
+              <a:t>attacks still defeat the carrier — was 4, both published</a:t>
             </a:r>
           </a:p>
         </p:txBody>
@@ -15330,7 +15330,7 @@
                 </a:solidFill>
                 <a:latin typeface="Calibri"/>
               </a:rPr>
-              <a:t>163</a:t>
+              <a:t>170</a:t>
             </a:r>
           </a:p>
           <a:p>
@@ -15572,7 +15572,7 @@
                 </a:solidFill>
                 <a:latin typeface="Calibri"/>
               </a:rPr>
-              <a:t>text and PDF carriers, 3-validator ledger, live</a:t>
+              <a:t>content-anchored carriers, 3-validator ledger, live</a:t>
             </a:r>
           </a:p>
         </p:txBody>
@@ -15717,7 +15717,7 @@
                 </a:solidFill>
                 <a:latin typeface="Calibri"/>
               </a:rPr>
-              <a:t>Content-anchored slots</a:t>
+              <a:t>Lexical carrier</a:t>
             </a:r>
           </a:p>
           <a:p>
@@ -15736,7 +15736,7 @@
                 </a:solidFill>
                 <a:latin typeface="Calibri"/>
               </a:rPr>
-              <a:t>removes the word-insertion weakness</a:t>
+              <a:t>marks in word choice, to survive OCR and retyping</a:t>
             </a:r>
           </a:p>
         </p:txBody>

--- a/ppt/NOX_SIH2026_PQFW.pptx
+++ b/ppt/NOX_SIH2026_PQFW.pptx
@@ -13458,6 +13458,34 @@
               <a:t>zero-width space  ·  PDF kerning</a:t>
             </a:r>
           </a:p>
+          <a:p>
+            <a:pPr algn="l">
+              <a:spcBef>
+                <a:spcPts val="0"/>
+              </a:spcBef>
+              <a:spcAft>
+                <a:spcPts val="360"/>
+              </a:spcAft>
+            </a:pPr>
+            <a:r>
+              <a:rPr sz="860" b="1">
+                <a:solidFill>
+                  <a:srgbClr val="1B335E"/>
+                </a:solidFill>
+                <a:latin typeface="Calibri"/>
+              </a:rPr>
+              <a:t>Addressing   </a:t>
+            </a:r>
+            <a:r>
+              <a:rPr sz="860" b="0">
+                <a:solidFill>
+                  <a:srgbClr val="161D2B"/>
+                </a:solidFill>
+                <a:latin typeface="Calibri"/>
+              </a:rPr>
+              <a:t>content-anchored, SHA3-256</a:t>
+            </a:r>
+          </a:p>
         </p:txBody>
       </p:sp>
       <p:sp>

--- a/ppt/NOX_SIH2026_PQFW.pptx
+++ b/ppt/NOX_SIH2026_PQFW.pptx
@@ -758,7 +758,7 @@
           <a:lstStyle/>
           <a:p>
             <a:r>
-              <a:t>Three stages, all offline. Distribute: one ciphertext for everybody plus a 14 KB key bundle each. Decrypt: the recipient spends one credential, gets a uniquely marked copy, and signs an ML-DSA-65 receipt with their own key — that is the non-repudiation. Record: three validators independently verify that receipt and commit it 2-of-3. Trace: extract the marks, score them, check the ledger. No cloud KMS, no public chain, no network call at any point.</a:t>
+              <a:t>Three stages, all offline. Distribute: one ciphertext for everybody plus a 14 KB key bundle each. Decrypt: the recipient spends one credential, gets a uniquely marked copy, and signs an ML-DSA-65 receipt with their own key — that is the non-repudiation. Note the split on the right: the post-quantum primitives enforce and attest the fingerprint, they do not compute it — a Tardos code is information-theoretic, so there is no hardness assumption in it for a quantum computer to break. Record: three validators independently verify that receipt and commit it 2-of-3. Trace: extract the marks, score them, check the ledger. No cloud KMS, no public chain, no network call at any point.</a:t>
             </a:r>
           </a:p>
         </p:txBody>
@@ -12542,7 +12542,7 @@
         <p:spPr>
           <a:xfrm>
             <a:off x="8522208" y="1572768"/>
-            <a:ext cx="3300984" cy="2999232"/>
+            <a:ext cx="3300984" cy="3346704"/>
           </a:xfrm>
           <a:prstGeom prst="roundRect">
             <a:avLst>
@@ -13249,8 +13249,8 @@
         </p:nvSpPr>
         <p:spPr>
           <a:xfrm>
-            <a:off x="8686800" y="3054096"/>
-            <a:ext cx="2971800" cy="1316736"/>
+            <a:off x="8686800" y="2962656"/>
+            <a:ext cx="2971800" cy="164592"/>
           </a:xfrm>
           <a:prstGeom prst="rect">
             <a:avLst/>
@@ -13268,6 +13268,57 @@
                 <a:spcPts val="0"/>
               </a:spcBef>
               <a:spcAft>
+                <a:spcPts val="0"/>
+              </a:spcAft>
+            </a:pPr>
+            <a:r>
+              <a:rPr sz="720" b="1">
+                <a:solidFill>
+                  <a:srgbClr val="F2790D"/>
+                </a:solidFill>
+                <a:latin typeface="Calibri"/>
+              </a:rPr>
+              <a:t>POST-QUANTUM   </a:t>
+            </a:r>
+            <a:r>
+              <a:rPr sz="720" b="0">
+                <a:solidFill>
+                  <a:srgbClr val="54627A"/>
+                </a:solidFill>
+                <a:latin typeface="Calibri"/>
+              </a:rPr>
+              <a:t>enforces the fingerprint and attests it</a:t>
+            </a:r>
+          </a:p>
+        </p:txBody>
+      </p:sp>
+      <p:sp>
+        <p:nvSpPr>
+          <p:cNvPr id="17492" name="TextBox 17491"/>
+          <p:cNvSpPr txBox="1"/>
+          <p:nvPr/>
+        </p:nvSpPr>
+        <p:spPr>
+          <a:xfrm>
+            <a:off x="8686800" y="3127248"/>
+            <a:ext cx="2971800" cy="868680"/>
+          </a:xfrm>
+          <a:prstGeom prst="rect">
+            <a:avLst/>
+          </a:prstGeom>
+          <a:noFill/>
+        </p:spPr>
+        <p:txBody>
+          <a:bodyPr wrap="square" anchor="t" lIns="0" rIns="0" tIns="0" bIns="0">
+            <a:spAutoFit/>
+          </a:bodyPr>
+          <a:lstStyle/>
+          <a:p>
+            <a:pPr algn="l">
+              <a:spcBef>
+                <a:spcPts val="0"/>
+              </a:spcBef>
+              <a:spcAft>
                 <a:spcPts val="360"/>
               </a:spcAft>
             </a:pPr>
@@ -13390,6 +13441,108 @@
                 </a:solidFill>
                 <a:latin typeface="Calibri"/>
               </a:rPr>
+              <a:t>Ledger   </a:t>
+            </a:r>
+            <a:r>
+              <a:rPr sz="860" b="0">
+                <a:solidFill>
+                  <a:srgbClr val="161D2B"/>
+                </a:solidFill>
+                <a:latin typeface="Calibri"/>
+              </a:rPr>
+              <a:t>hash chain + Merkle blocks, 2-of-3</a:t>
+            </a:r>
+          </a:p>
+        </p:txBody>
+      </p:sp>
+      <p:sp>
+        <p:nvSpPr>
+          <p:cNvPr id="17493" name="TextBox 17492"/>
+          <p:cNvSpPr txBox="1"/>
+          <p:nvPr/>
+        </p:nvSpPr>
+        <p:spPr>
+          <a:xfrm>
+            <a:off x="8686800" y="4087368"/>
+            <a:ext cx="2971800" cy="164592"/>
+          </a:xfrm>
+          <a:prstGeom prst="rect">
+            <a:avLst/>
+          </a:prstGeom>
+          <a:noFill/>
+        </p:spPr>
+        <p:txBody>
+          <a:bodyPr wrap="square" anchor="t" lIns="0" rIns="0" tIns="0" bIns="0">
+            <a:spAutoFit/>
+          </a:bodyPr>
+          <a:lstStyle/>
+          <a:p>
+            <a:pPr algn="l">
+              <a:spcBef>
+                <a:spcPts val="0"/>
+              </a:spcBef>
+              <a:spcAft>
+                <a:spcPts val="0"/>
+              </a:spcAft>
+            </a:pPr>
+            <a:r>
+              <a:rPr sz="720" b="1">
+                <a:solidFill>
+                  <a:srgbClr val="F2790D"/>
+                </a:solidFill>
+                <a:latin typeface="Calibri"/>
+              </a:rPr>
+              <a:t>CLASSICAL   </a:t>
+            </a:r>
+            <a:r>
+              <a:rPr sz="720" b="0">
+                <a:solidFill>
+                  <a:srgbClr val="54627A"/>
+                </a:solidFill>
+                <a:latin typeface="Calibri"/>
+              </a:rPr>
+              <a:t>the code itself — information-theoretic, not computational</a:t>
+            </a:r>
+          </a:p>
+        </p:txBody>
+      </p:sp>
+      <p:sp>
+        <p:nvSpPr>
+          <p:cNvPr id="17494" name="TextBox 17493"/>
+          <p:cNvSpPr txBox="1"/>
+          <p:nvPr/>
+        </p:nvSpPr>
+        <p:spPr>
+          <a:xfrm>
+            <a:off x="8686800" y="4251959"/>
+            <a:ext cx="2971800" cy="521208"/>
+          </a:xfrm>
+          <a:prstGeom prst="rect">
+            <a:avLst/>
+          </a:prstGeom>
+          <a:noFill/>
+        </p:spPr>
+        <p:txBody>
+          <a:bodyPr wrap="square" anchor="t" lIns="0" rIns="0" tIns="0" bIns="0">
+            <a:spAutoFit/>
+          </a:bodyPr>
+          <a:lstStyle/>
+          <a:p>
+            <a:pPr algn="l">
+              <a:spcBef>
+                <a:spcPts val="0"/>
+              </a:spcBef>
+              <a:spcAft>
+                <a:spcPts val="360"/>
+              </a:spcAft>
+            </a:pPr>
+            <a:r>
+              <a:rPr sz="860" b="1">
+                <a:solidFill>
+                  <a:srgbClr val="1B335E"/>
+                </a:solidFill>
+                <a:latin typeface="Calibri"/>
+              </a:rPr>
               <a:t>Fingerprint   </a:t>
             </a:r>
             <a:r>
@@ -13418,7 +13571,7 @@
                 </a:solidFill>
                 <a:latin typeface="Calibri"/>
               </a:rPr>
-              <a:t>Ledger   </a:t>
+              <a:t>Carriers   </a:t>
             </a:r>
             <a:r>
               <a:rPr sz="860" b="0">
@@ -13427,7 +13580,7 @@
                 </a:solidFill>
                 <a:latin typeface="Calibri"/>
               </a:rPr>
-              <a:t>hash chain + Merkle blocks, 2-of-3</a:t>
+              <a:t>zero-width space  ·  PDF kerning</a:t>
             </a:r>
           </a:p>
           <a:p>
@@ -13446,7 +13599,7 @@
                 </a:solidFill>
                 <a:latin typeface="Calibri"/>
               </a:rPr>
-              <a:t>Carriers   </a:t>
+              <a:t>Addressing   </a:t>
             </a:r>
             <a:r>
               <a:rPr sz="860" b="0">
@@ -13455,34 +13608,6 @@
                 </a:solidFill>
                 <a:latin typeface="Calibri"/>
               </a:rPr>
-              <a:t>zero-width space  ·  PDF kerning</a:t>
-            </a:r>
-          </a:p>
-          <a:p>
-            <a:pPr algn="l">
-              <a:spcBef>
-                <a:spcPts val="0"/>
-              </a:spcBef>
-              <a:spcAft>
-                <a:spcPts val="360"/>
-              </a:spcAft>
-            </a:pPr>
-            <a:r>
-              <a:rPr sz="860" b="1">
-                <a:solidFill>
-                  <a:srgbClr val="1B335E"/>
-                </a:solidFill>
-                <a:latin typeface="Calibri"/>
-              </a:rPr>
-              <a:t>Addressing   </a:t>
-            </a:r>
-            <a:r>
-              <a:rPr sz="860" b="0">
-                <a:solidFill>
-                  <a:srgbClr val="161D2B"/>
-                </a:solidFill>
-                <a:latin typeface="Calibri"/>
-              </a:rPr>
               <a:t>content-anchored, SHA3-256</a:t>
             </a:r>
           </a:p>
@@ -13490,13 +13615,13 @@
       </p:sp>
       <p:sp>
         <p:nvSpPr>
-          <p:cNvPr id="17492" name="Hexagon 17491"/>
+          <p:cNvPr id="17495" name="Hexagon 17494"/>
           <p:cNvSpPr/>
           <p:nvPr/>
         </p:nvSpPr>
         <p:spPr>
           <a:xfrm rot="5400000">
-            <a:off x="8522208" y="4709160"/>
+            <a:off x="8522208" y="5056632"/>
             <a:ext cx="274320" cy="241401"/>
           </a:xfrm>
           <a:prstGeom prst="hexagon">
@@ -13543,13 +13668,13 @@
       </p:sp>
       <p:sp>
         <p:nvSpPr>
-          <p:cNvPr id="17493" name="TextBox 17492"/>
+          <p:cNvPr id="17496" name="TextBox 17495"/>
           <p:cNvSpPr txBox="1"/>
           <p:nvPr/>
         </p:nvSpPr>
         <p:spPr>
           <a:xfrm>
-            <a:off x="8906256" y="4690872"/>
+            <a:off x="8906256" y="5038344"/>
             <a:ext cx="2916936" cy="310896"/>
           </a:xfrm>
           <a:prstGeom prst="rect">
@@ -13585,13 +13710,13 @@
       </p:sp>
       <p:sp>
         <p:nvSpPr>
-          <p:cNvPr id="17494" name="TextBox 17493"/>
+          <p:cNvPr id="17497" name="TextBox 17496"/>
           <p:cNvSpPr txBox="1"/>
           <p:nvPr/>
         </p:nvSpPr>
         <p:spPr>
           <a:xfrm>
-            <a:off x="8522208" y="5102352"/>
+            <a:off x="8522208" y="5449824"/>
             <a:ext cx="3300984" cy="1371600"/>
           </a:xfrm>
           <a:prstGeom prst="rect">
@@ -13659,25 +13784,6 @@
                 <a:latin typeface="Calibri"/>
               </a:rPr>
               <a:t>▪  Every attack on the carrier measured and published — including the two that still defeat it.</a:t>
-            </a:r>
-          </a:p>
-          <a:p>
-            <a:pPr algn="l">
-              <a:spcBef>
-                <a:spcPts val="0"/>
-              </a:spcBef>
-              <a:spcAft>
-                <a:spcPts val="400"/>
-              </a:spcAft>
-            </a:pPr>
-            <a:r>
-              <a:rPr sz="840" b="0" i="0">
-                <a:solidFill>
-                  <a:srgbClr val="161D2B"/>
-                </a:solidFill>
-                <a:latin typeface="Calibri"/>
-              </a:rPr>
-              <a:t>▪  Shipped, not staged: one container on a free tier, no GPU and no HSM.</a:t>
             </a:r>
           </a:p>
         </p:txBody>
